--- a/Web/JavaScript-Notes.pptx
+++ b/Web/JavaScript-Notes.pptx
@@ -8,7 +8,7 @@
     <p:notesMasterId r:id="rId4"/>
   </p:notesMasterIdLst>
   <p:handoutMasterIdLst>
-    <p:handoutMasterId r:id="rId64"/>
+    <p:handoutMasterId r:id="rId67"/>
   </p:handoutMasterIdLst>
   <p:sldIdLst>
     <p:sldId id="256" r:id="rId3"/>
@@ -21,61 +21,64 @@
     <p:sldId id="262" r:id="rId11"/>
     <p:sldId id="268" r:id="rId12"/>
     <p:sldId id="600" r:id="rId13"/>
-    <p:sldId id="269" r:id="rId14"/>
-    <p:sldId id="260" r:id="rId15"/>
-    <p:sldId id="261" r:id="rId16"/>
-    <p:sldId id="258" r:id="rId17"/>
-    <p:sldId id="284" r:id="rId18"/>
-    <p:sldId id="285" r:id="rId19"/>
-    <p:sldId id="495" r:id="rId20"/>
-    <p:sldId id="392" r:id="rId21"/>
-    <p:sldId id="276" r:id="rId22"/>
-    <p:sldId id="557" r:id="rId23"/>
-    <p:sldId id="267" r:id="rId24"/>
-    <p:sldId id="283" r:id="rId25"/>
-    <p:sldId id="332" r:id="rId26"/>
-    <p:sldId id="411" r:id="rId27"/>
-    <p:sldId id="477" r:id="rId28"/>
-    <p:sldId id="676" r:id="rId29"/>
-    <p:sldId id="677" r:id="rId30"/>
-    <p:sldId id="706" r:id="rId31"/>
-    <p:sldId id="735" r:id="rId32"/>
-    <p:sldId id="297" r:id="rId33"/>
-    <p:sldId id="299" r:id="rId34"/>
-    <p:sldId id="380" r:id="rId35"/>
-    <p:sldId id="343" r:id="rId36"/>
-    <p:sldId id="298" r:id="rId37"/>
-    <p:sldId id="320" r:id="rId38"/>
-    <p:sldId id="326" r:id="rId39"/>
-    <p:sldId id="391" r:id="rId40"/>
-    <p:sldId id="587" r:id="rId41"/>
-    <p:sldId id="390" r:id="rId42"/>
-    <p:sldId id="429" r:id="rId43"/>
-    <p:sldId id="470" r:id="rId44"/>
-    <p:sldId id="580" r:id="rId45"/>
-    <p:sldId id="641" r:id="rId46"/>
-    <p:sldId id="662" r:id="rId47"/>
-    <p:sldId id="290" r:id="rId48"/>
-    <p:sldId id="291" r:id="rId49"/>
-    <p:sldId id="289" r:id="rId50"/>
-    <p:sldId id="426" r:id="rId51"/>
-    <p:sldId id="292" r:id="rId52"/>
-    <p:sldId id="293" r:id="rId53"/>
-    <p:sldId id="764" r:id="rId54"/>
-    <p:sldId id="766" r:id="rId55"/>
-    <p:sldId id="765" r:id="rId56"/>
-    <p:sldId id="655" r:id="rId57"/>
-    <p:sldId id="656" r:id="rId58"/>
-    <p:sldId id="637" r:id="rId59"/>
-    <p:sldId id="638" r:id="rId60"/>
-    <p:sldId id="652" r:id="rId61"/>
-    <p:sldId id="598" r:id="rId62"/>
-    <p:sldId id="599" r:id="rId63"/>
+    <p:sldId id="779" r:id="rId14"/>
+    <p:sldId id="269" r:id="rId15"/>
+    <p:sldId id="260" r:id="rId16"/>
+    <p:sldId id="261" r:id="rId17"/>
+    <p:sldId id="258" r:id="rId18"/>
+    <p:sldId id="284" r:id="rId19"/>
+    <p:sldId id="285" r:id="rId20"/>
+    <p:sldId id="495" r:id="rId21"/>
+    <p:sldId id="392" r:id="rId22"/>
+    <p:sldId id="276" r:id="rId23"/>
+    <p:sldId id="557" r:id="rId24"/>
+    <p:sldId id="267" r:id="rId25"/>
+    <p:sldId id="283" r:id="rId26"/>
+    <p:sldId id="332" r:id="rId27"/>
+    <p:sldId id="411" r:id="rId28"/>
+    <p:sldId id="477" r:id="rId29"/>
+    <p:sldId id="676" r:id="rId30"/>
+    <p:sldId id="677" r:id="rId31"/>
+    <p:sldId id="706" r:id="rId32"/>
+    <p:sldId id="778" r:id="rId33"/>
+    <p:sldId id="735" r:id="rId34"/>
+    <p:sldId id="297" r:id="rId35"/>
+    <p:sldId id="299" r:id="rId36"/>
+    <p:sldId id="380" r:id="rId37"/>
+    <p:sldId id="343" r:id="rId38"/>
+    <p:sldId id="298" r:id="rId39"/>
+    <p:sldId id="320" r:id="rId40"/>
+    <p:sldId id="326" r:id="rId41"/>
+    <p:sldId id="391" r:id="rId42"/>
+    <p:sldId id="587" r:id="rId43"/>
+    <p:sldId id="390" r:id="rId44"/>
+    <p:sldId id="429" r:id="rId45"/>
+    <p:sldId id="470" r:id="rId46"/>
+    <p:sldId id="580" r:id="rId47"/>
+    <p:sldId id="641" r:id="rId48"/>
+    <p:sldId id="662" r:id="rId49"/>
+    <p:sldId id="290" r:id="rId50"/>
+    <p:sldId id="291" r:id="rId51"/>
+    <p:sldId id="289" r:id="rId52"/>
+    <p:sldId id="426" r:id="rId53"/>
+    <p:sldId id="292" r:id="rId54"/>
+    <p:sldId id="293" r:id="rId55"/>
+    <p:sldId id="764" r:id="rId56"/>
+    <p:sldId id="766" r:id="rId57"/>
+    <p:sldId id="765" r:id="rId58"/>
+    <p:sldId id="655" r:id="rId59"/>
+    <p:sldId id="656" r:id="rId60"/>
+    <p:sldId id="637" r:id="rId61"/>
+    <p:sldId id="638" r:id="rId62"/>
+    <p:sldId id="652" r:id="rId63"/>
+    <p:sldId id="775" r:id="rId64"/>
+    <p:sldId id="598" r:id="rId65"/>
+    <p:sldId id="599" r:id="rId66"/>
   </p:sldIdLst>
   <p:sldSz cx="12192000" cy="6858000"/>
   <p:notesSz cx="6858000" cy="9144000"/>
   <p:custDataLst>
-    <p:tags r:id="rId68"/>
+    <p:tags r:id="rId71"/>
   </p:custDataLst>
   <p:defaultTextStyle>
     <a:defPPr>
@@ -3860,7 +3863,7 @@
             </a:pPr>
             <a:r>
               <a:rPr lang="en-US" altLang="zh-CN" sz="1800" smtClean="0"/>
-              <a:t>Last updated: 8/6/2021</a:t>
+              <a:t>Last updated: 9/7/2024</a:t>
             </a:r>
             <a:endParaRPr lang="en-US" altLang="zh-CN" sz="1800" smtClean="0"/>
           </a:p>
@@ -3959,6 +3962,116 @@
 </file>
 
 <file path=ppt/slides/slide11.xml><?xml version="1.0" encoding="utf-8"?>
+<p:sld xmlns:a="http://schemas.openxmlformats.org/drawingml/2006/main" xmlns:r="http://schemas.openxmlformats.org/officeDocument/2006/relationships" xmlns:p="http://schemas.openxmlformats.org/presentationml/2006/main">
+  <p:cSld>
+    <p:spTree>
+      <p:nvGrpSpPr>
+        <p:cNvPr id="1" name=""/>
+        <p:cNvGrpSpPr/>
+        <p:nvPr/>
+      </p:nvGrpSpPr>
+      <p:grpSpPr/>
+      <p:sp>
+        <p:nvSpPr>
+          <p:cNvPr id="2" name="标题 1"/>
+          <p:cNvSpPr>
+            <a:spLocks noGrp="1"/>
+          </p:cNvSpPr>
+          <p:nvPr>
+            <p:ph type="title"/>
+          </p:nvPr>
+        </p:nvSpPr>
+        <p:spPr/>
+        <p:txBody>
+          <a:bodyPr/>
+          <a:p>
+            <a:r>
+              <a:rPr lang="en-US" altLang="zh-CN"/>
+              <a:t>Promise/Async/Await</a:t>
+            </a:r>
+            <a:endParaRPr lang="en-US" altLang="zh-CN"/>
+          </a:p>
+        </p:txBody>
+      </p:sp>
+      <p:sp>
+        <p:nvSpPr>
+          <p:cNvPr id="3" name="内容占位符 2"/>
+          <p:cNvSpPr>
+            <a:spLocks noGrp="1"/>
+          </p:cNvSpPr>
+          <p:nvPr>
+            <p:ph idx="1"/>
+          </p:nvPr>
+        </p:nvSpPr>
+        <p:spPr>
+          <a:xfrm>
+            <a:off x="838200" y="1211580"/>
+            <a:ext cx="5379720" cy="4549140"/>
+          </a:xfrm>
+        </p:spPr>
+        <p:txBody>
+          <a:bodyPr/>
+          <a:p>
+            <a:r>
+              <a:rPr lang="en-US" altLang="zh-CN"/>
+              <a:t>References</a:t>
+            </a:r>
+            <a:endParaRPr lang="en-US" altLang="zh-CN"/>
+          </a:p>
+          <a:p>
+            <a:pPr lvl="1"/>
+            <a:r>
+              <a:rPr lang="en-US" altLang="zh-CN"/>
+              <a:t>https://segmentfault.com/a/1190000016788484</a:t>
+            </a:r>
+            <a:endParaRPr lang="en-US" altLang="zh-CN"/>
+          </a:p>
+          <a:p>
+            <a:pPr lvl="0"/>
+            <a:r>
+              <a:rPr lang="en-US" altLang="zh-CN"/>
+              <a:t>Promise</a:t>
+            </a:r>
+            <a:endParaRPr lang="en-US" altLang="zh-CN"/>
+          </a:p>
+          <a:p>
+            <a:pPr lvl="1"/>
+            <a:r>
+              <a:rPr lang="en-US" altLang="zh-CN"/>
+              <a:t>Promise.all(promises).then().catch()</a:t>
+            </a:r>
+            <a:endParaRPr lang="en-US" altLang="zh-CN"/>
+          </a:p>
+          <a:p>
+            <a:pPr lvl="0"/>
+            <a:r>
+              <a:rPr lang="en-US" altLang="zh-CN"/>
+              <a:t>async/await</a:t>
+            </a:r>
+            <a:endParaRPr lang="en-US" altLang="zh-CN"/>
+          </a:p>
+          <a:p>
+            <a:pPr lvl="1"/>
+            <a:r>
+              <a:rPr lang="en-US" altLang="zh-CN"/>
+              <a:t>await can only be used in async functions</a:t>
+            </a:r>
+            <a:endParaRPr lang="en-US" altLang="zh-CN"/>
+          </a:p>
+        </p:txBody>
+      </p:sp>
+    </p:spTree>
+    <p:custDataLst>
+      <p:tags r:id="rId1"/>
+    </p:custDataLst>
+  </p:cSld>
+  <p:clrMapOvr>
+    <a:masterClrMapping/>
+  </p:clrMapOvr>
+</p:sld>
+</file>
+
+<file path=ppt/slides/slide12.xml><?xml version="1.0" encoding="utf-8"?>
 <p:sld xmlns:a="http://schemas.openxmlformats.org/drawingml/2006/main" xmlns:r="http://schemas.openxmlformats.org/officeDocument/2006/relationships" xmlns:p="http://schemas.openxmlformats.org/presentationml/2006/main">
   <p:cSld>
     <p:spTree>
@@ -4296,143 +4409,6 @@
 </p:sld>
 </file>
 
-<file path=ppt/slides/slide12.xml><?xml version="1.0" encoding="utf-8"?>
-<p:sld xmlns:a="http://schemas.openxmlformats.org/drawingml/2006/main" xmlns:r="http://schemas.openxmlformats.org/officeDocument/2006/relationships" xmlns:p="http://schemas.openxmlformats.org/presentationml/2006/main">
-  <p:cSld>
-    <p:spTree>
-      <p:nvGrpSpPr>
-        <p:cNvPr id="1" name=""/>
-        <p:cNvGrpSpPr/>
-        <p:nvPr/>
-      </p:nvGrpSpPr>
-      <p:grpSpPr/>
-      <p:sp>
-        <p:nvSpPr>
-          <p:cNvPr id="2" name="标题 1"/>
-          <p:cNvSpPr>
-            <a:spLocks noGrp="1"/>
-          </p:cNvSpPr>
-          <p:nvPr>
-            <p:ph type="title"/>
-          </p:nvPr>
-        </p:nvSpPr>
-        <p:spPr/>
-        <p:txBody>
-          <a:bodyPr/>
-          <a:p>
-            <a:r>
-              <a:rPr lang="en-US" altLang="zh-CN"/>
-              <a:t>Event</a:t>
-            </a:r>
-            <a:endParaRPr lang="en-US" altLang="zh-CN"/>
-          </a:p>
-        </p:txBody>
-      </p:sp>
-      <p:sp>
-        <p:nvSpPr>
-          <p:cNvPr id="3" name="内容占位符 2"/>
-          <p:cNvSpPr>
-            <a:spLocks noGrp="1"/>
-          </p:cNvSpPr>
-          <p:nvPr>
-            <p:ph idx="1"/>
-          </p:nvPr>
-        </p:nvSpPr>
-        <p:spPr/>
-        <p:txBody>
-          <a:bodyPr/>
-          <a:p>
-            <a:r>
-              <a:rPr lang="en-US" altLang="zh-CN"/>
-              <a:t>Events</a:t>
-            </a:r>
-            <a:endParaRPr lang="en-US" altLang="zh-CN"/>
-          </a:p>
-          <a:p>
-            <a:pPr lvl="1"/>
-            <a:r>
-              <a:rPr lang="en-US" altLang="zh-CN"/>
-              <a:t>onchange, onclick, onmouseover, onmouseout, onkeydown, onload</a:t>
-            </a:r>
-            <a:endParaRPr lang="en-US" altLang="zh-CN"/>
-          </a:p>
-          <a:p>
-            <a:pPr lvl="1"/>
-            <a:r>
-              <a:rPr lang="en-US" altLang="en-US"/>
-              <a:t>onmouseover, onmouseout, onmousedown, onmouseup</a:t>
-            </a:r>
-            <a:endParaRPr lang="en-US" altLang="en-US"/>
-          </a:p>
-          <a:p>
-            <a:pPr lvl="1"/>
-            <a:r>
-              <a:rPr lang="en-US" altLang="en-US"/>
-              <a:t>onfocus</a:t>
-            </a:r>
-            <a:endParaRPr lang="en-US" altLang="en-US"/>
-          </a:p>
-          <a:p>
-            <a:pPr lvl="0"/>
-            <a:r>
-              <a:rPr lang="en-US" altLang="en-US"/>
-              <a:t>Functino</a:t>
-            </a:r>
-            <a:endParaRPr lang="en-US" altLang="en-US"/>
-          </a:p>
-          <a:p>
-            <a:pPr lvl="1"/>
-            <a:r>
-              <a:rPr lang="en-US" altLang="en-US"/>
-              <a:t>addEventListener('event', func, useCapture)</a:t>
-            </a:r>
-            <a:endParaRPr lang="en-US" altLang="en-US"/>
-          </a:p>
-          <a:p>
-            <a:pPr lvl="2"/>
-            <a:r>
-              <a:rPr lang="en-US" altLang="en-US" sz="1800"/>
-              <a:t>useCapture: default false, bubble-way propagation; true: capture-way propagation</a:t>
-            </a:r>
-            <a:endParaRPr lang="en-US" altLang="en-US"/>
-          </a:p>
-          <a:p>
-            <a:pPr lvl="1"/>
-            <a:r>
-              <a:rPr lang="en-US" altLang="en-US"/>
-              <a:t>removeEventListener(event, func)</a:t>
-            </a:r>
-            <a:endParaRPr lang="en-US" altLang="en-US"/>
-          </a:p>
-          <a:p>
-            <a:pPr lvl="0"/>
-            <a:r>
-              <a:rPr lang="en-US" altLang="en-US"/>
-              <a:t>Logging events in Chrome</a:t>
-            </a:r>
-            <a:endParaRPr lang="en-US" altLang="en-US"/>
-          </a:p>
-          <a:p>
-            <a:pPr lvl="1"/>
-            <a:r>
-              <a:rPr lang="en-US" altLang="en-US"/>
-              <a:t>in “console” tab, input “monitorEvents(obj)”</a:t>
-            </a:r>
-            <a:endParaRPr lang="en-US" altLang="en-US"/>
-          </a:p>
-        </p:txBody>
-      </p:sp>
-    </p:spTree>
-    <p:custDataLst>
-      <p:tags r:id="rId1"/>
-    </p:custDataLst>
-  </p:cSld>
-  <p:clrMapOvr>
-    <a:masterClrMapping/>
-  </p:clrMapOvr>
-</p:sld>
-</file>
-
 <file path=ppt/slides/slide13.xml><?xml version="1.0" encoding="utf-8"?>
 <p:sld xmlns:a="http://schemas.openxmlformats.org/drawingml/2006/main" xmlns:r="http://schemas.openxmlformats.org/officeDocument/2006/relationships" xmlns:p="http://schemas.openxmlformats.org/presentationml/2006/main">
   <p:cSld>
@@ -4459,7 +4435,7 @@
           <a:p>
             <a:r>
               <a:rPr lang="en-US" altLang="zh-CN"/>
-              <a:t>Classes</a:t>
+              <a:t>Event</a:t>
             </a:r>
             <a:endParaRPr lang="en-US" altLang="zh-CN"/>
           </a:p>
@@ -4477,131 +4453,83 @@
         </p:nvSpPr>
         <p:spPr/>
         <p:txBody>
-          <a:bodyPr>
-            <a:normAutofit lnSpcReduction="10000"/>
-          </a:bodyPr>
-          <a:p>
-            <a:r>
-              <a:rPr lang="en-US" altLang="zh-CN"/>
-              <a:t>Date</a:t>
-            </a:r>
-            <a:endParaRPr lang="en-US" altLang="zh-CN"/>
-          </a:p>
-          <a:p>
-            <a:pPr lvl="1"/>
-            <a:r>
-              <a:rPr lang="en-US" altLang="zh-CN"/>
-              <a:t>var now</a:t>
-            </a:r>
-            <a:r>
-              <a:rPr lang="en-US" altLang="zh-CN"/>
-              <a:t> = new Date()</a:t>
-            </a:r>
-            <a:endParaRPr lang="en-US" altLang="zh-CN"/>
-          </a:p>
-          <a:p>
-            <a:pPr lvl="1"/>
-            <a:r>
-              <a:rPr lang="en-US" altLang="zh-CN"/>
-              <a:t>var dt = new Date(year, month, date, hour, min, s, ms)</a:t>
-            </a:r>
-            <a:endParaRPr lang="en-US" altLang="zh-CN"/>
-          </a:p>
-          <a:p>
-            <a:pPr lvl="1"/>
-            <a:r>
-              <a:rPr lang="en-US" altLang="zh-CN"/>
-              <a:t>d.getTime(),</a:t>
-            </a:r>
-            <a:r>
-              <a:rPr lang="en-US" altLang="zh-CN">
-                <a:sym typeface="+mn-ea"/>
-              </a:rPr>
-              <a:t> getFullYear(), getMonth(),</a:t>
-            </a:r>
-            <a:r>
-              <a:rPr lang="en-US" altLang="zh-CN"/>
-              <a:t> getDate(), </a:t>
-            </a:r>
-            <a:r>
-              <a:rPr lang="en-US" altLang="zh-CN">
-                <a:sym typeface="+mn-ea"/>
-              </a:rPr>
-              <a:t>getDay(), </a:t>
-            </a:r>
-            <a:r>
-              <a:rPr lang="en-US" altLang="zh-CN"/>
-              <a:t>getHours()</a:t>
-            </a:r>
-            <a:r>
-              <a:rPr lang="en-US" altLang="zh-CN">
-                <a:sym typeface="+mn-ea"/>
-              </a:rPr>
-              <a:t>, getMinutes()</a:t>
-            </a:r>
-            <a:r>
-              <a:rPr lang="en-US" altLang="zh-CN"/>
-              <a:t>, getSeconds(), getMilliseconds()</a:t>
-            </a:r>
-            <a:endParaRPr lang="en-US" altLang="zh-CN"/>
-          </a:p>
-          <a:p>
-            <a:pPr lvl="1"/>
-            <a:r>
-              <a:rPr lang="en-US" altLang="zh-CN"/>
-              <a:t>d.getUTCxxx()</a:t>
-            </a:r>
-            <a:endParaRPr lang="en-US" altLang="zh-CN"/>
-          </a:p>
-          <a:p>
-            <a:pPr lvl="1"/>
-            <a:r>
-              <a:rPr lang="en-US" altLang="zh-CN"/>
-              <a:t>d.setXXX()</a:t>
-            </a:r>
-            <a:endParaRPr lang="en-US" altLang="zh-CN"/>
+          <a:bodyPr/>
+          <a:p>
+            <a:r>
+              <a:rPr lang="en-US" altLang="zh-CN"/>
+              <a:t>Events</a:t>
+            </a:r>
+            <a:endParaRPr lang="en-US" altLang="zh-CN"/>
+          </a:p>
+          <a:p>
+            <a:pPr lvl="1"/>
+            <a:r>
+              <a:rPr lang="en-US" altLang="zh-CN"/>
+              <a:t>onchange, onclick, onmouseover, onmouseout, onkeydown, onload</a:t>
+            </a:r>
+            <a:endParaRPr lang="en-US" altLang="zh-CN"/>
+          </a:p>
+          <a:p>
+            <a:pPr lvl="1"/>
+            <a:r>
+              <a:rPr lang="en-US" altLang="en-US"/>
+              <a:t>onmouseover, onmouseout, onmousedown, onmouseup</a:t>
+            </a:r>
+            <a:endParaRPr lang="en-US" altLang="en-US"/>
+          </a:p>
+          <a:p>
+            <a:pPr lvl="1"/>
+            <a:r>
+              <a:rPr lang="en-US" altLang="en-US"/>
+              <a:t>onfocus</a:t>
+            </a:r>
+            <a:endParaRPr lang="en-US" altLang="en-US"/>
           </a:p>
           <a:p>
             <a:pPr lvl="0"/>
             <a:r>
-              <a:rPr lang="en-US" altLang="zh-CN"/>
-              <a:t>Math</a:t>
-            </a:r>
-            <a:endParaRPr lang="en-US" altLang="zh-CN"/>
-          </a:p>
-          <a:p>
-            <a:pPr lvl="1"/>
-            <a:r>
-              <a:rPr lang="en-US" altLang="zh-CN"/>
-              <a:t>Math.PI, Math.round(), Math.pow(), Math.sqrt(), Math.abs(), Math.ceil(), Math.floor(), Math.sin(), Math.cos(), Math.min(), Math.max(), Math.random()</a:t>
-            </a:r>
-            <a:endParaRPr lang="en-US" altLang="zh-CN"/>
+              <a:rPr lang="en-US" altLang="en-US"/>
+              <a:t>Functino</a:t>
+            </a:r>
+            <a:endParaRPr lang="en-US" altLang="en-US"/>
+          </a:p>
+          <a:p>
+            <a:pPr lvl="1"/>
+            <a:r>
+              <a:rPr lang="en-US" altLang="en-US"/>
+              <a:t>addEventListener('event', func, useCapture)</a:t>
+            </a:r>
+            <a:endParaRPr lang="en-US" altLang="en-US"/>
+          </a:p>
+          <a:p>
+            <a:pPr lvl="2"/>
+            <a:r>
+              <a:rPr lang="en-US" altLang="en-US" sz="1800"/>
+              <a:t>useCapture: default false, bubble-way propagation; true: capture-way propagation</a:t>
+            </a:r>
+            <a:endParaRPr lang="en-US" altLang="en-US"/>
+          </a:p>
+          <a:p>
+            <a:pPr lvl="1"/>
+            <a:r>
+              <a:rPr lang="en-US" altLang="en-US"/>
+              <a:t>removeEventListener(event, func)</a:t>
+            </a:r>
+            <a:endParaRPr lang="en-US" altLang="en-US"/>
           </a:p>
           <a:p>
             <a:pPr lvl="0"/>
             <a:r>
-              <a:rPr lang="en-US" altLang="zh-CN"/>
-              <a:t>JSON</a:t>
-            </a:r>
-            <a:endParaRPr lang="en-US" altLang="zh-CN"/>
-          </a:p>
-          <a:p>
-            <a:pPr lvl="1"/>
-            <a:r>
               <a:rPr lang="en-US" altLang="en-US"/>
-              <a:t>var obj = </a:t>
-            </a:r>
-            <a:r>
-              <a:rPr lang="en-US" altLang="zh-CN"/>
-              <a:t>JSON.parse(str)</a:t>
-            </a:r>
-            <a:endParaRPr lang="en-US" altLang="zh-CN"/>
+              <a:t>Logging events in Chrome</a:t>
+            </a:r>
+            <a:endParaRPr lang="en-US" altLang="en-US"/>
           </a:p>
           <a:p>
             <a:pPr lvl="1"/>
             <a:r>
               <a:rPr lang="en-US" altLang="en-US"/>
-              <a:t>var str = JSON.stringify(obj)</a:t>
+              <a:t>in “console” tab, input “monitorEvents(obj)”</a:t>
             </a:r>
             <a:endParaRPr lang="en-US" altLang="en-US"/>
           </a:p>
@@ -4619,6 +4547,191 @@
 </file>
 
 <file path=ppt/slides/slide14.xml><?xml version="1.0" encoding="utf-8"?>
+<p:sld xmlns:a="http://schemas.openxmlformats.org/drawingml/2006/main" xmlns:r="http://schemas.openxmlformats.org/officeDocument/2006/relationships" xmlns:p="http://schemas.openxmlformats.org/presentationml/2006/main">
+  <p:cSld>
+    <p:spTree>
+      <p:nvGrpSpPr>
+        <p:cNvPr id="1" name=""/>
+        <p:cNvGrpSpPr/>
+        <p:nvPr/>
+      </p:nvGrpSpPr>
+      <p:grpSpPr/>
+      <p:sp>
+        <p:nvSpPr>
+          <p:cNvPr id="2" name="标题 1"/>
+          <p:cNvSpPr>
+            <a:spLocks noGrp="1"/>
+          </p:cNvSpPr>
+          <p:nvPr>
+            <p:ph type="title"/>
+          </p:nvPr>
+        </p:nvSpPr>
+        <p:spPr/>
+        <p:txBody>
+          <a:bodyPr/>
+          <a:p>
+            <a:r>
+              <a:rPr lang="en-US" altLang="zh-CN"/>
+              <a:t>Classes</a:t>
+            </a:r>
+            <a:endParaRPr lang="en-US" altLang="zh-CN"/>
+          </a:p>
+        </p:txBody>
+      </p:sp>
+      <p:sp>
+        <p:nvSpPr>
+          <p:cNvPr id="3" name="内容占位符 2"/>
+          <p:cNvSpPr>
+            <a:spLocks noGrp="1"/>
+          </p:cNvSpPr>
+          <p:nvPr>
+            <p:ph idx="1"/>
+          </p:nvPr>
+        </p:nvSpPr>
+        <p:spPr/>
+        <p:txBody>
+          <a:bodyPr>
+            <a:normAutofit lnSpcReduction="10000"/>
+          </a:bodyPr>
+          <a:p>
+            <a:r>
+              <a:rPr lang="en-US" altLang="zh-CN"/>
+              <a:t>Date</a:t>
+            </a:r>
+            <a:endParaRPr lang="en-US" altLang="zh-CN"/>
+          </a:p>
+          <a:p>
+            <a:pPr lvl="1"/>
+            <a:r>
+              <a:rPr lang="en-US" altLang="zh-CN"/>
+              <a:t>var now</a:t>
+            </a:r>
+            <a:r>
+              <a:rPr lang="en-US" altLang="zh-CN"/>
+              <a:t> = new Date()</a:t>
+            </a:r>
+            <a:endParaRPr lang="en-US" altLang="zh-CN"/>
+          </a:p>
+          <a:p>
+            <a:pPr lvl="1"/>
+            <a:r>
+              <a:rPr lang="en-US" altLang="zh-CN"/>
+              <a:t>var dt = new Date(year, month, date, hour, min, s, ms)</a:t>
+            </a:r>
+            <a:endParaRPr lang="en-US" altLang="zh-CN"/>
+          </a:p>
+          <a:p>
+            <a:pPr lvl="1"/>
+            <a:r>
+              <a:rPr lang="en-US" altLang="zh-CN"/>
+              <a:t>d.getTime(),</a:t>
+            </a:r>
+            <a:r>
+              <a:rPr lang="en-US" altLang="zh-CN">
+                <a:sym typeface="+mn-ea"/>
+              </a:rPr>
+              <a:t> getFullYear(), getMonth(),</a:t>
+            </a:r>
+            <a:r>
+              <a:rPr lang="en-US" altLang="zh-CN"/>
+              <a:t> getDate(), </a:t>
+            </a:r>
+            <a:r>
+              <a:rPr lang="en-US" altLang="zh-CN">
+                <a:sym typeface="+mn-ea"/>
+              </a:rPr>
+              <a:t>getDay(), </a:t>
+            </a:r>
+            <a:r>
+              <a:rPr lang="en-US" altLang="zh-CN"/>
+              <a:t>getHours()</a:t>
+            </a:r>
+            <a:r>
+              <a:rPr lang="en-US" altLang="zh-CN">
+                <a:sym typeface="+mn-ea"/>
+              </a:rPr>
+              <a:t>, getMinutes()</a:t>
+            </a:r>
+            <a:r>
+              <a:rPr lang="en-US" altLang="zh-CN"/>
+              <a:t>, getSeconds(), getMilliseconds()</a:t>
+            </a:r>
+            <a:endParaRPr lang="en-US" altLang="zh-CN"/>
+          </a:p>
+          <a:p>
+            <a:pPr lvl="1"/>
+            <a:r>
+              <a:rPr lang="en-US" altLang="zh-CN"/>
+              <a:t>d.getUTCxxx()</a:t>
+            </a:r>
+            <a:endParaRPr lang="en-US" altLang="zh-CN"/>
+          </a:p>
+          <a:p>
+            <a:pPr lvl="1"/>
+            <a:r>
+              <a:rPr lang="en-US" altLang="zh-CN"/>
+              <a:t>d.setXXX()</a:t>
+            </a:r>
+            <a:endParaRPr lang="en-US" altLang="zh-CN"/>
+          </a:p>
+          <a:p>
+            <a:pPr lvl="0"/>
+            <a:r>
+              <a:rPr lang="en-US" altLang="zh-CN"/>
+              <a:t>Math</a:t>
+            </a:r>
+            <a:endParaRPr lang="en-US" altLang="zh-CN"/>
+          </a:p>
+          <a:p>
+            <a:pPr lvl="1"/>
+            <a:r>
+              <a:rPr lang="en-US" altLang="zh-CN"/>
+              <a:t>Math.PI, Math.round(), Math.pow(), Math.sqrt(), Math.abs(), Math.ceil(), Math.floor(), Math.sin(), Math.cos(), Math.min(), Math.max(), Math.random()</a:t>
+            </a:r>
+            <a:endParaRPr lang="en-US" altLang="zh-CN"/>
+          </a:p>
+          <a:p>
+            <a:pPr lvl="0"/>
+            <a:r>
+              <a:rPr lang="en-US" altLang="zh-CN"/>
+              <a:t>JSON</a:t>
+            </a:r>
+            <a:endParaRPr lang="en-US" altLang="zh-CN"/>
+          </a:p>
+          <a:p>
+            <a:pPr lvl="1"/>
+            <a:r>
+              <a:rPr lang="en-US" altLang="en-US"/>
+              <a:t>var obj = </a:t>
+            </a:r>
+            <a:r>
+              <a:rPr lang="en-US" altLang="zh-CN"/>
+              <a:t>JSON.parse(str)</a:t>
+            </a:r>
+            <a:endParaRPr lang="en-US" altLang="zh-CN"/>
+          </a:p>
+          <a:p>
+            <a:pPr lvl="1"/>
+            <a:r>
+              <a:rPr lang="en-US" altLang="en-US"/>
+              <a:t>var str = JSON.stringify(obj)</a:t>
+            </a:r>
+            <a:endParaRPr lang="en-US" altLang="en-US"/>
+          </a:p>
+        </p:txBody>
+      </p:sp>
+    </p:spTree>
+    <p:custDataLst>
+      <p:tags r:id="rId1"/>
+    </p:custDataLst>
+  </p:cSld>
+  <p:clrMapOvr>
+    <a:masterClrMapping/>
+  </p:clrMapOvr>
+</p:sld>
+</file>
+
+<file path=ppt/slides/slide15.xml><?xml version="1.0" encoding="utf-8"?>
 <p:sld xmlns:a="http://schemas.openxmlformats.org/drawingml/2006/main" xmlns:r="http://schemas.openxmlformats.org/officeDocument/2006/relationships" xmlns:p="http://schemas.openxmlformats.org/presentationml/2006/main">
   <p:cSld>
     <p:spTree>
@@ -5012,159 +5125,6 @@
 </p:sld>
 </file>
 
-<file path=ppt/slides/slide15.xml><?xml version="1.0" encoding="utf-8"?>
-<p:sld xmlns:a="http://schemas.openxmlformats.org/drawingml/2006/main" xmlns:r="http://schemas.openxmlformats.org/officeDocument/2006/relationships" xmlns:p="http://schemas.openxmlformats.org/presentationml/2006/main">
-  <p:cSld>
-    <p:spTree>
-      <p:nvGrpSpPr>
-        <p:cNvPr id="1" name=""/>
-        <p:cNvGrpSpPr/>
-        <p:nvPr/>
-      </p:nvGrpSpPr>
-      <p:grpSpPr/>
-      <p:sp>
-        <p:nvSpPr>
-          <p:cNvPr id="2" name="标题 1"/>
-          <p:cNvSpPr>
-            <a:spLocks noGrp="1"/>
-          </p:cNvSpPr>
-          <p:nvPr>
-            <p:ph type="title"/>
-          </p:nvPr>
-        </p:nvSpPr>
-        <p:spPr/>
-        <p:txBody>
-          <a:bodyPr/>
-          <a:p>
-            <a:r>
-              <a:rPr lang="en-US" altLang="zh-CN"/>
-              <a:t>DateTime</a:t>
-            </a:r>
-            <a:endParaRPr lang="en-US" altLang="zh-CN"/>
-          </a:p>
-        </p:txBody>
-      </p:sp>
-      <p:sp>
-        <p:nvSpPr>
-          <p:cNvPr id="3" name="内容占位符 2"/>
-          <p:cNvSpPr>
-            <a:spLocks noGrp="1"/>
-          </p:cNvSpPr>
-          <p:nvPr>
-            <p:ph idx="1"/>
-          </p:nvPr>
-        </p:nvSpPr>
-        <p:spPr/>
-        <p:txBody>
-          <a:bodyPr/>
-          <a:p>
-            <a:r>
-              <a:rPr lang="en-US" altLang="zh-CN"/>
-              <a:t>Date</a:t>
-            </a:r>
-            <a:endParaRPr lang="en-US" altLang="zh-CN"/>
-          </a:p>
-          <a:p>
-            <a:pPr lvl="1"/>
-            <a:r>
-              <a:rPr lang="en-US" altLang="zh-CN"/>
-              <a:t>var today = new Date()</a:t>
-            </a:r>
-            <a:endParaRPr lang="en-US" altLang="zh-CN"/>
-          </a:p>
-          <a:p>
-            <a:pPr lvl="1"/>
-            <a:r>
-              <a:rPr lang="en-US" altLang="zh-CN"/>
-              <a:t>today.getFullYear()</a:t>
-            </a:r>
-            <a:endParaRPr lang="en-US" altLang="zh-CN"/>
-          </a:p>
-          <a:p>
-            <a:pPr lvl="1"/>
-            <a:r>
-              <a:rPr lang="en-US" altLang="zh-CN"/>
-              <a:t>today.getMonth() + 1</a:t>
-            </a:r>
-            <a:endParaRPr lang="en-US" altLang="zh-CN"/>
-          </a:p>
-          <a:p>
-            <a:pPr lvl="1"/>
-            <a:r>
-              <a:rPr lang="en-US" altLang="zh-CN"/>
-              <a:t>today.getDate()</a:t>
-            </a:r>
-            <a:endParaRPr lang="en-US" altLang="zh-CN"/>
-          </a:p>
-          <a:p>
-            <a:pPr lvl="1"/>
-            <a:r>
-              <a:rPr lang="en-US" altLang="zh-CN"/>
-              <a:t>today.getHours()</a:t>
-            </a:r>
-            <a:endParaRPr lang="en-US" altLang="zh-CN"/>
-          </a:p>
-          <a:p>
-            <a:pPr lvl="1"/>
-            <a:r>
-              <a:rPr lang="en-US" altLang="zh-CN"/>
-              <a:t>today.getMinutes()</a:t>
-            </a:r>
-            <a:endParaRPr lang="en-US" altLang="zh-CN"/>
-          </a:p>
-          <a:p>
-            <a:pPr lvl="1"/>
-            <a:r>
-              <a:rPr lang="en-US" altLang="zh-CN"/>
-              <a:t>today.getSeconds()</a:t>
-            </a:r>
-            <a:endParaRPr lang="en-US" altLang="zh-CN"/>
-          </a:p>
-          <a:p>
-            <a:pPr lvl="0"/>
-            <a:r>
-              <a:rPr lang="en-US" altLang="zh-CN"/>
-              <a:t>Diff</a:t>
-            </a:r>
-            <a:endParaRPr lang="en-US" altLang="zh-CN"/>
-          </a:p>
-          <a:p>
-            <a:pPr lvl="1"/>
-            <a:r>
-              <a:rPr lang="en-US" altLang="zh-CN"/>
-              <a:t>date1 = new Date('str')</a:t>
-            </a:r>
-            <a:endParaRPr lang="en-US" altLang="zh-CN"/>
-          </a:p>
-          <a:p>
-            <a:pPr lvl="1"/>
-            <a:r>
-              <a:rPr lang="en-US" altLang="zh-CN"/>
-              <a:t>date2 = new Date('str')</a:t>
-            </a:r>
-            <a:endParaRPr lang="en-US" altLang="zh-CN"/>
-          </a:p>
-          <a:p>
-            <a:pPr lvl="1"/>
-            <a:r>
-              <a:rPr lang="en-US" altLang="zh-CN"/>
-              <a:t>diff = date1.getTime() - date2.getTime()	// in ms</a:t>
-            </a:r>
-            <a:endParaRPr lang="en-US" altLang="zh-CN"/>
-          </a:p>
-        </p:txBody>
-      </p:sp>
-    </p:spTree>
-    <p:custDataLst>
-      <p:tags r:id="rId1"/>
-    </p:custDataLst>
-  </p:cSld>
-  <p:clrMapOvr>
-    <a:masterClrMapping/>
-  </p:clrMapOvr>
-</p:sld>
-</file>
-
 <file path=ppt/slides/slide16.xml><?xml version="1.0" encoding="utf-8"?>
 <p:sld xmlns:a="http://schemas.openxmlformats.org/drawingml/2006/main" xmlns:r="http://schemas.openxmlformats.org/officeDocument/2006/relationships" xmlns:p="http://schemas.openxmlformats.org/presentationml/2006/main">
   <p:cSld>
@@ -5191,7 +5151,7 @@
           <a:p>
             <a:r>
               <a:rPr lang="en-US" altLang="zh-CN"/>
-              <a:t>Form</a:t>
+              <a:t>DateTime</a:t>
             </a:r>
             <a:endParaRPr lang="en-US" altLang="zh-CN"/>
           </a:p>
@@ -5213,15 +5173,63 @@
           <a:p>
             <a:r>
               <a:rPr lang="en-US" altLang="zh-CN"/>
-              <a:t>Email validation</a:t>
-            </a:r>
-            <a:endParaRPr lang="en-US" altLang="zh-CN"/>
-          </a:p>
-          <a:p>
-            <a:pPr lvl="1"/>
-            <a:r>
-              <a:rPr lang="en-US" altLang="zh-CN"/>
-              <a:t>/^\w+([\.-]?\w+)*@\w+([\.-]?\w+)*(\.\w{2,3})+$/</a:t>
+              <a:t>Date</a:t>
+            </a:r>
+            <a:endParaRPr lang="en-US" altLang="zh-CN"/>
+          </a:p>
+          <a:p>
+            <a:pPr lvl="1"/>
+            <a:r>
+              <a:rPr lang="en-US" altLang="zh-CN"/>
+              <a:t>var today = new Date()</a:t>
+            </a:r>
+            <a:endParaRPr lang="en-US" altLang="zh-CN"/>
+          </a:p>
+          <a:p>
+            <a:pPr lvl="1"/>
+            <a:r>
+              <a:rPr lang="en-US" altLang="zh-CN"/>
+              <a:t>today.getFullYear()</a:t>
+            </a:r>
+            <a:endParaRPr lang="en-US" altLang="zh-CN"/>
+          </a:p>
+          <a:p>
+            <a:pPr lvl="1"/>
+            <a:r>
+              <a:rPr lang="en-US" altLang="zh-CN"/>
+              <a:t>today.getMonth() + 1</a:t>
+            </a:r>
+            <a:endParaRPr lang="en-US" altLang="zh-CN"/>
+          </a:p>
+          <a:p>
+            <a:pPr lvl="1"/>
+            <a:r>
+              <a:rPr lang="en-US" altLang="zh-CN"/>
+              <a:t>today.getDate()</a:t>
+            </a:r>
+            <a:endParaRPr lang="en-US" altLang="zh-CN"/>
+          </a:p>
+          <a:p>
+            <a:pPr lvl="1"/>
+            <a:r>
+              <a:rPr lang="en-US" altLang="zh-CN"/>
+              <a:t>today.getHours()</a:t>
+            </a:r>
+            <a:endParaRPr lang="en-US" altLang="zh-CN"/>
+          </a:p>
+          <a:p>
+            <a:pPr lvl="1"/>
+            <a:r>
+              <a:rPr lang="en-US" altLang="zh-CN"/>
+              <a:t>today.getMinutes()</a:t>
+            </a:r>
+            <a:endParaRPr lang="en-US" altLang="zh-CN"/>
+          </a:p>
+          <a:p>
+            <a:pPr lvl="1"/>
+            <a:r>
+              <a:rPr lang="en-US" altLang="zh-CN"/>
+              <a:t>today.getSeconds()</a:t>
             </a:r>
             <a:endParaRPr lang="en-US" altLang="zh-CN"/>
           </a:p>
@@ -5229,12 +5237,32 @@
             <a:pPr lvl="0"/>
             <a:r>
               <a:rPr lang="en-US" altLang="zh-CN"/>
-              <a:t>Phone validation</a:t>
-            </a:r>
-            <a:endParaRPr lang="en-US" altLang="zh-CN"/>
-          </a:p>
-          <a:p>
-            <a:pPr lvl="1"/>
+              <a:t>Diff</a:t>
+            </a:r>
+            <a:endParaRPr lang="en-US" altLang="zh-CN"/>
+          </a:p>
+          <a:p>
+            <a:pPr lvl="1"/>
+            <a:r>
+              <a:rPr lang="en-US" altLang="zh-CN"/>
+              <a:t>date1 = new Date('str')</a:t>
+            </a:r>
+            <a:endParaRPr lang="en-US" altLang="zh-CN"/>
+          </a:p>
+          <a:p>
+            <a:pPr lvl="1"/>
+            <a:r>
+              <a:rPr lang="en-US" altLang="zh-CN"/>
+              <a:t>date2 = new Date('str')</a:t>
+            </a:r>
+            <a:endParaRPr lang="en-US" altLang="zh-CN"/>
+          </a:p>
+          <a:p>
+            <a:pPr lvl="1"/>
+            <a:r>
+              <a:rPr lang="en-US" altLang="zh-CN"/>
+              <a:t>diff = date1.getTime() - date2.getTime()	// in ms</a:t>
+            </a:r>
             <a:endParaRPr lang="en-US" altLang="zh-CN"/>
           </a:p>
         </p:txBody>
@@ -5276,7 +5304,7 @@
           <a:p>
             <a:r>
               <a:rPr lang="en-US" altLang="zh-CN"/>
-              <a:t>Storage</a:t>
+              <a:t>Form</a:t>
             </a:r>
             <a:endParaRPr lang="en-US" altLang="zh-CN"/>
           </a:p>
@@ -5292,43 +5320,21 @@
             <p:ph idx="1"/>
           </p:nvPr>
         </p:nvSpPr>
-        <p:spPr>
-          <a:xfrm>
-            <a:off x="838200" y="1211580"/>
-            <a:ext cx="6198870" cy="4991100"/>
-          </a:xfrm>
-        </p:spPr>
-        <p:txBody>
-          <a:bodyPr>
-            <a:normAutofit fontScale="60000"/>
-          </a:bodyPr>
-          <a:p>
-            <a:r>
-              <a:rPr lang="en-US" altLang="zh-CN"/>
-              <a:t>localStorage</a:t>
-            </a:r>
-            <a:endParaRPr lang="en-US" altLang="zh-CN"/>
-          </a:p>
-          <a:p>
-            <a:pPr lvl="1"/>
-            <a:r>
-              <a:rPr lang="en-US" altLang="zh-CN"/>
-              <a:t>persists until explicitly deleted</a:t>
-            </a:r>
-            <a:endParaRPr lang="en-US" altLang="zh-CN"/>
-          </a:p>
-          <a:p>
-            <a:r>
-              <a:rPr lang="en-US" altLang="zh-CN"/>
-              <a:t>sessionStorage</a:t>
-            </a:r>
-            <a:endParaRPr lang="en-US" altLang="zh-CN"/>
-          </a:p>
-          <a:p>
-            <a:pPr lvl="1"/>
-            <a:r>
-              <a:rPr lang="en-US" altLang="zh-CN"/>
-              <a:t>changes are only available per tab</a:t>
+        <p:spPr/>
+        <p:txBody>
+          <a:bodyPr/>
+          <a:p>
+            <a:r>
+              <a:rPr lang="en-US" altLang="zh-CN"/>
+              <a:t>Email validation</a:t>
+            </a:r>
+            <a:endParaRPr lang="en-US" altLang="zh-CN"/>
+          </a:p>
+          <a:p>
+            <a:pPr lvl="1"/>
+            <a:r>
+              <a:rPr lang="en-US" altLang="zh-CN"/>
+              <a:t>/^\w+([\.-]?\w+)*@\w+([\.-]?\w+)*(\.\w{2,3})+$/</a:t>
             </a:r>
             <a:endParaRPr lang="en-US" altLang="zh-CN"/>
           </a:p>
@@ -5336,494 +5342,13 @@
             <a:pPr lvl="0"/>
             <a:r>
               <a:rPr lang="en-US" altLang="zh-CN"/>
-              <a:t>File</a:t>
-            </a:r>
-            <a:endParaRPr lang="en-US" altLang="zh-CN"/>
-          </a:p>
-          <a:p>
-            <a:pPr lvl="1"/>
-            <a:r>
-              <a:rPr lang="en-US" altLang="zh-CN"/>
-              <a:t>file-saver</a:t>
-            </a:r>
-            <a:endParaRPr lang="en-US" altLang="zh-CN"/>
-          </a:p>
-          <a:p>
-            <a:pPr lvl="1"/>
-            <a:r>
-              <a:rPr lang="en-US" altLang="zh-CN"/>
-              <a:t>https://github.com/eligrey/FileSaver.js/</a:t>
-            </a:r>
-            <a:endParaRPr lang="en-US" altLang="zh-CN"/>
-          </a:p>
-          <a:p>
-            <a:pPr lvl="1"/>
-            <a:r>
-              <a:rPr lang="en-US" altLang="zh-CN"/>
-              <a:t>import { saveAs } from 'file-saver'</a:t>
-            </a:r>
-            <a:endParaRPr lang="en-US" altLang="zh-CN"/>
-          </a:p>
-          <a:p>
-            <a:pPr lvl="1"/>
-            <a:r>
-              <a:rPr lang="en-US" altLang="zh-CN"/>
-              <a:t>example</a:t>
-            </a:r>
-            <a:endParaRPr lang="en-US" altLang="zh-CN"/>
-          </a:p>
-          <a:p>
-            <a:pPr lvl="2"/>
-            <a:r>
-              <a:rPr lang="en-US" altLang="zh-CN"/>
-              <a:t>var canvas = document.getElementById("my-canvas");</a:t>
-            </a:r>
-            <a:endParaRPr lang="en-US" altLang="zh-CN"/>
-          </a:p>
-          <a:p>
-            <a:pPr lvl="2"/>
-            <a:r>
-              <a:rPr lang="en-US" altLang="zh-CN"/>
-              <a:t>canvas.toBlob(function(blob) {</a:t>
-            </a:r>
-            <a:endParaRPr lang="en-US" altLang="zh-CN"/>
-          </a:p>
-          <a:p>
-            <a:pPr lvl="2"/>
-            <a:r>
-              <a:rPr lang="en-US" altLang="zh-CN"/>
-              <a:t>    saveAs(blob, "pretty image.png");</a:t>
-            </a:r>
-            <a:endParaRPr lang="en-US" altLang="zh-CN"/>
-          </a:p>
-          <a:p>
-            <a:pPr lvl="2"/>
-            <a:r>
-              <a:rPr lang="en-US" altLang="zh-CN"/>
-              <a:t>});</a:t>
-            </a:r>
-            <a:endParaRPr lang="en-US" altLang="zh-CN"/>
-          </a:p>
-          <a:p>
-            <a:pPr lvl="0"/>
-            <a:r>
-              <a:rPr lang="en-US" altLang="zh-CN"/>
-              <a:t>jszip</a:t>
-            </a:r>
-            <a:endParaRPr lang="en-US" altLang="zh-CN"/>
-          </a:p>
-          <a:p>
-            <a:pPr lvl="1"/>
-            <a:r>
-              <a:rPr lang="en-US" altLang="zh-CN" sz="2000"/>
-              <a:t>https://stuk.github.io/jszip/</a:t>
-            </a:r>
-            <a:endParaRPr lang="en-US" altLang="zh-CN" sz="2000"/>
-          </a:p>
-          <a:p>
-            <a:pPr lvl="1"/>
-            <a:r>
-              <a:rPr lang="en-US" altLang="zh-CN" sz="2000"/>
-              <a:t>generateAsync</a:t>
-            </a:r>
-            <a:endParaRPr lang="en-US" altLang="zh-CN" sz="2000"/>
-          </a:p>
-          <a:p>
-            <a:pPr lvl="2"/>
-            <a:r>
-              <a:rPr lang="en-US" altLang="zh-CN"/>
-              <a:t>type: nodebuffer, to save content with fs.writeFile()</a:t>
-            </a:r>
-            <a:endParaRPr lang="en-US" altLang="zh-CN"/>
-          </a:p>
-          <a:p>
-            <a:pPr lvl="0"/>
-            <a:r>
-              <a:rPr lang="en-US" altLang="zh-CN"/>
-              <a:t>jszipUtils</a:t>
-            </a:r>
-            <a:endParaRPr lang="en-US" altLang="zh-CN"/>
-          </a:p>
-          <a:p>
-            <a:pPr lvl="1"/>
-            <a:r>
-              <a:rPr lang="en-US" altLang="zh-CN"/>
-              <a:t>https://github.com/Stuk/jszip-utils</a:t>
-            </a:r>
-            <a:endParaRPr lang="en-US" altLang="zh-CN"/>
-          </a:p>
-          <a:p>
-            <a:pPr lvl="1"/>
-            <a:endParaRPr lang="en-US" altLang="zh-CN"/>
-          </a:p>
-        </p:txBody>
-      </p:sp>
-      <p:sp>
-        <p:nvSpPr>
-          <p:cNvPr id="4" name="文本框 3"/>
-          <p:cNvSpPr txBox="1"/>
-          <p:nvPr/>
-        </p:nvSpPr>
-        <p:spPr>
-          <a:xfrm>
-            <a:off x="7265035" y="1081405"/>
-            <a:ext cx="4575810" cy="1938020"/>
-          </a:xfrm>
-          <a:prstGeom prst="rect">
-            <a:avLst/>
-          </a:prstGeom>
-          <a:noFill/>
-          <a:ln>
-            <a:solidFill>
-              <a:srgbClr val="FFC000"/>
-            </a:solidFill>
-          </a:ln>
-        </p:spPr>
-        <p:txBody>
-          <a:bodyPr wrap="square" rtlCol="0">
-            <a:spAutoFit/>
-          </a:bodyPr>
-          <a:p>
-            <a:r>
-              <a:rPr lang="zh-CN" altLang="en-US" sz="1000"/>
-              <a:t>var zip = new JsZip()</a:t>
-            </a:r>
-            <a:endParaRPr lang="zh-CN" altLang="en-US" sz="1000"/>
-          </a:p>
-          <a:p>
-            <a:r>
-              <a:rPr lang="zh-CN" altLang="en-US" sz="1000"/>
-              <a:t>var img = zip.folder('images')</a:t>
-            </a:r>
-            <a:endParaRPr lang="zh-CN" altLang="en-US" sz="1000"/>
-          </a:p>
-          <a:p>
-            <a:r>
-              <a:rPr lang="zh-CN" altLang="en-US" sz="1000"/>
-              <a:t>fs.readFile('C:/tmp/1.jpg', function(err, data) {</a:t>
-            </a:r>
-            <a:endParaRPr lang="zh-CN" altLang="en-US" sz="1000"/>
-          </a:p>
-          <a:p>
-            <a:r>
-              <a:rPr lang="zh-CN" altLang="en-US" sz="1000"/>
-              <a:t>  img.file('1.jpg', data, {base64: true})</a:t>
-            </a:r>
-            <a:endParaRPr lang="zh-CN" altLang="en-US" sz="1000"/>
-          </a:p>
-          <a:p>
-            <a:r>
-              <a:rPr lang="zh-CN" altLang="en-US" sz="1000"/>
-              <a:t>  zip.generateAsync({type: </a:t>
-            </a:r>
-            <a:r>
-              <a:rPr lang="zh-CN" altLang="en-US" sz="1000" b="1"/>
-              <a:t>'nodebuffer'</a:t>
-            </a:r>
-            <a:r>
-              <a:rPr lang="zh-CN" altLang="en-US" sz="1000"/>
-              <a:t>}).then(function(content) {</a:t>
-            </a:r>
-            <a:endParaRPr lang="zh-CN" altLang="en-US" sz="1000"/>
-          </a:p>
-          <a:p>
-            <a:r>
-              <a:rPr lang="en-US" altLang="zh-CN" sz="1000"/>
-              <a:t> </a:t>
-            </a:r>
-            <a:r>
-              <a:rPr lang="zh-CN" altLang="en-US" sz="1000"/>
-              <a:t>    console.log('Generated zip. content: ', content)</a:t>
-            </a:r>
-            <a:endParaRPr lang="zh-CN" altLang="en-US" sz="1000"/>
-          </a:p>
-          <a:p>
-            <a:r>
-              <a:rPr lang="zh-CN" altLang="en-US" sz="1000"/>
-              <a:t>     fs.writeFile('C:/tmp/test.zip', content, (err) =&gt; {</a:t>
-            </a:r>
-            <a:endParaRPr lang="zh-CN" altLang="en-US" sz="1000"/>
-          </a:p>
-          <a:p>
-            <a:r>
-              <a:rPr lang="zh-CN" altLang="en-US" sz="1000"/>
-              <a:t>     </a:t>
-            </a:r>
-            <a:r>
-              <a:rPr lang="en-US" altLang="zh-CN" sz="1000"/>
-              <a:t>  </a:t>
-            </a:r>
-            <a:r>
-              <a:rPr lang="zh-CN" altLang="en-US" sz="1000"/>
-              <a:t>if (err)</a:t>
-            </a:r>
-            <a:r>
-              <a:rPr lang="en-US" altLang="zh-CN" sz="1000"/>
-              <a:t> </a:t>
-            </a:r>
-            <a:r>
-              <a:rPr lang="zh-CN" altLang="en-US" sz="1000"/>
-              <a:t>throw err</a:t>
-            </a:r>
-            <a:endParaRPr lang="zh-CN" altLang="en-US" sz="1000"/>
-          </a:p>
-          <a:p>
-            <a:r>
-              <a:rPr lang="zh-CN" altLang="en-US" sz="1000"/>
-              <a:t>     </a:t>
-            </a:r>
-            <a:r>
-              <a:rPr lang="en-US" altLang="zh-CN" sz="1000"/>
-              <a:t> </a:t>
-            </a:r>
-            <a:r>
-              <a:rPr lang="zh-CN" altLang="en-US" sz="1000"/>
-              <a:t>console.log('Saved test.zip file.')</a:t>
-            </a:r>
-            <a:endParaRPr lang="zh-CN" altLang="en-US" sz="1000"/>
-          </a:p>
-          <a:p>
-            <a:r>
-              <a:rPr lang="zh-CN" altLang="en-US" sz="1000"/>
-              <a:t>    })</a:t>
-            </a:r>
-            <a:endParaRPr lang="zh-CN" altLang="en-US" sz="1000"/>
-          </a:p>
-          <a:p>
-            <a:r>
-              <a:rPr lang="zh-CN" altLang="en-US" sz="1000"/>
-              <a:t>  })</a:t>
-            </a:r>
-            <a:endParaRPr lang="zh-CN" altLang="en-US" sz="1000"/>
-          </a:p>
-          <a:p>
-            <a:r>
-              <a:rPr lang="zh-CN" altLang="en-US" sz="1000"/>
-              <a:t>})</a:t>
-            </a:r>
-            <a:endParaRPr lang="zh-CN" altLang="en-US" sz="1000"/>
-          </a:p>
-        </p:txBody>
-      </p:sp>
-      <p:sp>
-        <p:nvSpPr>
-          <p:cNvPr id="5" name="文本框 4"/>
-          <p:cNvSpPr txBox="1"/>
-          <p:nvPr/>
-        </p:nvSpPr>
-        <p:spPr>
-          <a:xfrm>
-            <a:off x="7265035" y="3132455"/>
-            <a:ext cx="4575810" cy="706755"/>
-          </a:xfrm>
-          <a:prstGeom prst="rect">
-            <a:avLst/>
-          </a:prstGeom>
-          <a:noFill/>
-          <a:ln>
-            <a:solidFill>
-              <a:srgbClr val="FFC000"/>
-            </a:solidFill>
-          </a:ln>
-        </p:spPr>
-        <p:txBody>
-          <a:bodyPr wrap="square" rtlCol="0">
-            <a:spAutoFit/>
-          </a:bodyPr>
-          <a:p>
-            <a:r>
-              <a:rPr lang="zh-CN" altLang="en-US" sz="1000"/>
-              <a:t>zip.generateAsync({type:"</a:t>
-            </a:r>
-            <a:r>
-              <a:rPr lang="zh-CN" altLang="en-US" sz="1000" b="1"/>
-              <a:t>blob</a:t>
-            </a:r>
-            <a:r>
-              <a:rPr lang="zh-CN" altLang="en-US" sz="1000"/>
-              <a:t>"}).then(function (content) {</a:t>
-            </a:r>
-            <a:endParaRPr lang="zh-CN" altLang="en-US" sz="1000"/>
-          </a:p>
-          <a:p>
-            <a:r>
-              <a:rPr lang="zh-CN" altLang="en-US" sz="1000"/>
-              <a:t>    // see FileSaver.js</a:t>
-            </a:r>
-            <a:endParaRPr lang="zh-CN" altLang="en-US" sz="1000"/>
-          </a:p>
-          <a:p>
-            <a:r>
-              <a:rPr lang="zh-CN" altLang="en-US" sz="1000"/>
-              <a:t>    saveAs(content, "hello.zip");</a:t>
-            </a:r>
-            <a:endParaRPr lang="zh-CN" altLang="en-US" sz="1000"/>
-          </a:p>
-          <a:p>
-            <a:r>
-              <a:rPr lang="zh-CN" altLang="en-US" sz="1000"/>
-              <a:t>});</a:t>
-            </a:r>
-            <a:endParaRPr lang="zh-CN" altLang="en-US" sz="1000"/>
-          </a:p>
-        </p:txBody>
-      </p:sp>
-      <p:sp>
-        <p:nvSpPr>
-          <p:cNvPr id="6" name="文本框 5"/>
-          <p:cNvSpPr txBox="1"/>
-          <p:nvPr/>
-        </p:nvSpPr>
-        <p:spPr>
-          <a:xfrm>
-            <a:off x="7265035" y="3925570"/>
-            <a:ext cx="4575810" cy="1322070"/>
-          </a:xfrm>
-          <a:prstGeom prst="rect">
-            <a:avLst/>
-          </a:prstGeom>
-          <a:noFill/>
-          <a:ln>
-            <a:solidFill>
-              <a:srgbClr val="FFC000"/>
-            </a:solidFill>
-          </a:ln>
-        </p:spPr>
-        <p:txBody>
-          <a:bodyPr wrap="square" rtlCol="0">
-            <a:spAutoFit/>
-          </a:bodyPr>
-          <a:p>
-            <a:r>
-              <a:rPr lang="en-US" altLang="zh-CN" sz="1000"/>
-              <a:t>var imgData = canvas.toDataUrl()</a:t>
-            </a:r>
-            <a:endParaRPr lang="en-US" altLang="zh-CN" sz="1000"/>
-          </a:p>
-          <a:p>
-            <a:r>
-              <a:rPr lang="en-US" altLang="zh-CN" sz="1000"/>
-              <a:t>imgData = imgData.replace(/^data:image\/(png|jpg);base64,/, "")</a:t>
-            </a:r>
-            <a:endParaRPr lang="en-US" altLang="zh-CN" sz="1000"/>
-          </a:p>
-          <a:p>
-            <a:r>
-              <a:rPr lang="zh-CN" altLang="en-US" sz="1000">
-                <a:sym typeface="+mn-ea"/>
-              </a:rPr>
-              <a:t>var zip = new JsZip()</a:t>
-            </a:r>
-            <a:endParaRPr lang="zh-CN" altLang="en-US" sz="1000"/>
-          </a:p>
-          <a:p>
-            <a:r>
-              <a:rPr lang="en-US" altLang="zh-CN" sz="1000"/>
-              <a:t>zip.file(‘1.png’, imgData, {base64: true})</a:t>
-            </a:r>
-            <a:endParaRPr lang="en-US" altLang="zh-CN" sz="1000"/>
-          </a:p>
-          <a:p>
-            <a:r>
-              <a:rPr lang="zh-CN" altLang="en-US" sz="1000">
-                <a:sym typeface="+mn-ea"/>
-              </a:rPr>
-              <a:t>zip.generateAsync({type:"base64"}).then(function (content) {</a:t>
-            </a:r>
-            <a:endParaRPr lang="zh-CN" altLang="en-US" sz="1000"/>
-          </a:p>
-          <a:p>
-            <a:r>
-              <a:rPr lang="zh-CN" altLang="en-US" sz="1000">
-                <a:sym typeface="+mn-ea"/>
-              </a:rPr>
-              <a:t>    location.href="data:application/zip;base64,"+content;</a:t>
-            </a:r>
-            <a:endParaRPr lang="zh-CN" altLang="en-US" sz="1000"/>
-          </a:p>
-          <a:p>
-            <a:r>
-              <a:rPr lang="en-US" altLang="zh-CN" sz="1000">
-                <a:sym typeface="+mn-ea"/>
-              </a:rPr>
-              <a:t>  </a:t>
-            </a:r>
-            <a:r>
-              <a:rPr lang="zh-CN" altLang="en-US" sz="1000">
-                <a:sym typeface="+mn-ea"/>
-              </a:rPr>
-              <a:t>});</a:t>
-            </a:r>
-            <a:endParaRPr lang="en-US" altLang="zh-CN" sz="1000"/>
-          </a:p>
-          <a:p>
-            <a:r>
-              <a:rPr lang="en-US" altLang="zh-CN" sz="1000"/>
-              <a:t>}</a:t>
-            </a:r>
-            <a:endParaRPr lang="en-US" altLang="zh-CN" sz="1000"/>
-          </a:p>
-        </p:txBody>
-      </p:sp>
-      <p:sp>
-        <p:nvSpPr>
-          <p:cNvPr id="7" name="文本框 6"/>
-          <p:cNvSpPr txBox="1"/>
-          <p:nvPr/>
-        </p:nvSpPr>
-        <p:spPr>
-          <a:xfrm>
-            <a:off x="7265035" y="5342255"/>
-            <a:ext cx="4575810" cy="860425"/>
-          </a:xfrm>
-          <a:prstGeom prst="rect">
-            <a:avLst/>
-          </a:prstGeom>
-          <a:noFill/>
-          <a:ln>
-            <a:solidFill>
-              <a:srgbClr val="FFC000"/>
-            </a:solidFill>
-          </a:ln>
-        </p:spPr>
-        <p:txBody>
-          <a:bodyPr wrap="square" rtlCol="0">
-            <a:spAutoFit/>
-          </a:bodyPr>
-          <a:p>
-            <a:r>
-              <a:rPr lang="en-US" altLang="zh-CN" sz="1000"/>
-              <a:t>zip.generateAsync({type:"blob"}).then(function(content){</a:t>
-            </a:r>
-            <a:endParaRPr lang="en-US" altLang="zh-CN" sz="1000"/>
-          </a:p>
-          <a:p>
-            <a:r>
-              <a:rPr lang="en-US" altLang="zh-CN" sz="1000"/>
-              <a:t>  var file = new File([content], "name.zip");</a:t>
-            </a:r>
-            <a:endParaRPr lang="en-US" altLang="zh-CN" sz="1000"/>
-          </a:p>
-          <a:p>
-            <a:r>
-              <a:rPr lang="en-US" altLang="zh-CN" sz="1000"/>
-              <a:t>  var formData = new FormData();</a:t>
-            </a:r>
-            <a:endParaRPr lang="en-US" altLang="zh-CN" sz="1000"/>
-          </a:p>
-          <a:p>
-            <a:r>
-              <a:rPr lang="en-US" altLang="zh-CN" sz="1000"/>
-              <a:t>  formData.append('fileZip', file);</a:t>
-            </a:r>
-            <a:endParaRPr lang="en-US" altLang="zh-CN" sz="1000"/>
-          </a:p>
-          <a:p>
-            <a:r>
-              <a:rPr lang="en-US" altLang="zh-CN" sz="1000"/>
-              <a:t>})</a:t>
-            </a:r>
-            <a:endParaRPr lang="en-US" altLang="zh-CN" sz="1000"/>
+              <a:t>Phone validation</a:t>
+            </a:r>
+            <a:endParaRPr lang="en-US" altLang="zh-CN"/>
+          </a:p>
+          <a:p>
+            <a:pPr lvl="1"/>
+            <a:endParaRPr lang="en-US" altLang="zh-CN"/>
           </a:p>
         </p:txBody>
       </p:sp>
@@ -5864,7 +5389,7 @@
           <a:p>
             <a:r>
               <a:rPr lang="en-US" altLang="zh-CN"/>
-              <a:t>Bundle Javascript Library</a:t>
+              <a:t>Storage</a:t>
             </a:r>
             <a:endParaRPr lang="en-US" altLang="zh-CN"/>
           </a:p>
@@ -5880,53 +5405,43 @@
             <p:ph idx="1"/>
           </p:nvPr>
         </p:nvSpPr>
-        <p:spPr/>
-        <p:txBody>
-          <a:bodyPr/>
-          <a:p>
-            <a:r>
-              <a:rPr lang="en-US" altLang="zh-CN"/>
-              <a:t>Webpack</a:t>
-            </a:r>
-            <a:endParaRPr lang="en-US" altLang="zh-CN"/>
-          </a:p>
-          <a:p>
-            <a:pPr lvl="1"/>
-            <a:r>
-              <a:rPr lang="en-US" altLang="zh-CN"/>
-              <a:t>https://webpack.js.org/guides/author-libraries/</a:t>
-            </a:r>
-            <a:endParaRPr lang="en-US" altLang="zh-CN"/>
-          </a:p>
-          <a:p>
-            <a:pPr lvl="1"/>
-            <a:r>
-              <a:rPr lang="en-US" altLang="zh-CN"/>
-              <a:t>webpack.config.js</a:t>
-            </a:r>
-            <a:endParaRPr lang="en-US" altLang="zh-CN"/>
-          </a:p>
-          <a:p>
-            <a:pPr lvl="1"/>
-            <a:r>
-              <a:rPr lang="en-US" altLang="zh-CN"/>
-              <a:t>package.json</a:t>
-            </a:r>
-            <a:endParaRPr lang="en-US" altLang="zh-CN"/>
-          </a:p>
-          <a:p>
-            <a:pPr lvl="1"/>
-            <a:r>
-              <a:rPr lang="en-US" altLang="zh-CN"/>
-              <a:t>Run 'npm i'</a:t>
-            </a:r>
-            <a:endParaRPr lang="en-US" altLang="zh-CN"/>
-          </a:p>
-          <a:p>
-            <a:pPr lvl="1"/>
-            <a:r>
-              <a:rPr lang="en-US" altLang="zh-CN"/>
-              <a:t>Run 'webpack'</a:t>
+        <p:spPr>
+          <a:xfrm>
+            <a:off x="838200" y="1211580"/>
+            <a:ext cx="6198870" cy="4991100"/>
+          </a:xfrm>
+        </p:spPr>
+        <p:txBody>
+          <a:bodyPr>
+            <a:normAutofit fontScale="60000"/>
+          </a:bodyPr>
+          <a:p>
+            <a:r>
+              <a:rPr lang="en-US" altLang="zh-CN"/>
+              <a:t>localStorage</a:t>
+            </a:r>
+            <a:endParaRPr lang="en-US" altLang="zh-CN"/>
+          </a:p>
+          <a:p>
+            <a:pPr lvl="1"/>
+            <a:r>
+              <a:rPr lang="en-US" altLang="zh-CN"/>
+              <a:t>persists until explicitly deleted</a:t>
+            </a:r>
+            <a:endParaRPr lang="en-US" altLang="zh-CN"/>
+          </a:p>
+          <a:p>
+            <a:r>
+              <a:rPr lang="en-US" altLang="zh-CN"/>
+              <a:t>sessionStorage</a:t>
+            </a:r>
+            <a:endParaRPr lang="en-US" altLang="zh-CN"/>
+          </a:p>
+          <a:p>
+            <a:pPr lvl="1"/>
+            <a:r>
+              <a:rPr lang="en-US" altLang="zh-CN"/>
+              <a:t>changes are only available per tab</a:t>
             </a:r>
             <a:endParaRPr lang="en-US" altLang="zh-CN"/>
           </a:p>
@@ -5934,21 +5449,494 @@
             <a:pPr lvl="0"/>
             <a:r>
               <a:rPr lang="en-US" altLang="zh-CN"/>
-              <a:t>npm Packaging</a:t>
-            </a:r>
-            <a:endParaRPr lang="en-US" altLang="zh-CN"/>
-          </a:p>
-          <a:p>
-            <a:pPr lvl="1"/>
-            <a:r>
-              <a:rPr lang="en-US" altLang="zh-CN"/>
-              <a:t>https://docs.npmjs.com/packages-and-modules/contributing-packages-to-the-registry</a:t>
-            </a:r>
-            <a:endParaRPr lang="en-US" altLang="zh-CN"/>
-          </a:p>
-          <a:p>
-            <a:pPr lvl="1"/>
-            <a:endParaRPr lang="en-US" altLang="zh-CN"/>
+              <a:t>File</a:t>
+            </a:r>
+            <a:endParaRPr lang="en-US" altLang="zh-CN"/>
+          </a:p>
+          <a:p>
+            <a:pPr lvl="1"/>
+            <a:r>
+              <a:rPr lang="en-US" altLang="zh-CN"/>
+              <a:t>file-saver</a:t>
+            </a:r>
+            <a:endParaRPr lang="en-US" altLang="zh-CN"/>
+          </a:p>
+          <a:p>
+            <a:pPr lvl="1"/>
+            <a:r>
+              <a:rPr lang="en-US" altLang="zh-CN"/>
+              <a:t>https://github.com/eligrey/FileSaver.js/</a:t>
+            </a:r>
+            <a:endParaRPr lang="en-US" altLang="zh-CN"/>
+          </a:p>
+          <a:p>
+            <a:pPr lvl="1"/>
+            <a:r>
+              <a:rPr lang="en-US" altLang="zh-CN"/>
+              <a:t>import { saveAs } from 'file-saver'</a:t>
+            </a:r>
+            <a:endParaRPr lang="en-US" altLang="zh-CN"/>
+          </a:p>
+          <a:p>
+            <a:pPr lvl="1"/>
+            <a:r>
+              <a:rPr lang="en-US" altLang="zh-CN"/>
+              <a:t>example</a:t>
+            </a:r>
+            <a:endParaRPr lang="en-US" altLang="zh-CN"/>
+          </a:p>
+          <a:p>
+            <a:pPr lvl="2"/>
+            <a:r>
+              <a:rPr lang="en-US" altLang="zh-CN"/>
+              <a:t>var canvas = document.getElementById("my-canvas");</a:t>
+            </a:r>
+            <a:endParaRPr lang="en-US" altLang="zh-CN"/>
+          </a:p>
+          <a:p>
+            <a:pPr lvl="2"/>
+            <a:r>
+              <a:rPr lang="en-US" altLang="zh-CN"/>
+              <a:t>canvas.toBlob(function(blob) {</a:t>
+            </a:r>
+            <a:endParaRPr lang="en-US" altLang="zh-CN"/>
+          </a:p>
+          <a:p>
+            <a:pPr lvl="2"/>
+            <a:r>
+              <a:rPr lang="en-US" altLang="zh-CN"/>
+              <a:t>    saveAs(blob, "pretty image.png");</a:t>
+            </a:r>
+            <a:endParaRPr lang="en-US" altLang="zh-CN"/>
+          </a:p>
+          <a:p>
+            <a:pPr lvl="2"/>
+            <a:r>
+              <a:rPr lang="en-US" altLang="zh-CN"/>
+              <a:t>});</a:t>
+            </a:r>
+            <a:endParaRPr lang="en-US" altLang="zh-CN"/>
+          </a:p>
+          <a:p>
+            <a:pPr lvl="0"/>
+            <a:r>
+              <a:rPr lang="en-US" altLang="zh-CN"/>
+              <a:t>jszip</a:t>
+            </a:r>
+            <a:endParaRPr lang="en-US" altLang="zh-CN"/>
+          </a:p>
+          <a:p>
+            <a:pPr lvl="1"/>
+            <a:r>
+              <a:rPr lang="en-US" altLang="zh-CN" sz="2000"/>
+              <a:t>https://stuk.github.io/jszip/</a:t>
+            </a:r>
+            <a:endParaRPr lang="en-US" altLang="zh-CN" sz="2000"/>
+          </a:p>
+          <a:p>
+            <a:pPr lvl="1"/>
+            <a:r>
+              <a:rPr lang="en-US" altLang="zh-CN" sz="2000"/>
+              <a:t>generateAsync</a:t>
+            </a:r>
+            <a:endParaRPr lang="en-US" altLang="zh-CN" sz="2000"/>
+          </a:p>
+          <a:p>
+            <a:pPr lvl="2"/>
+            <a:r>
+              <a:rPr lang="en-US" altLang="zh-CN"/>
+              <a:t>type: nodebuffer, to save content with fs.writeFile()</a:t>
+            </a:r>
+            <a:endParaRPr lang="en-US" altLang="zh-CN"/>
+          </a:p>
+          <a:p>
+            <a:pPr lvl="0"/>
+            <a:r>
+              <a:rPr lang="en-US" altLang="zh-CN"/>
+              <a:t>jszipUtils</a:t>
+            </a:r>
+            <a:endParaRPr lang="en-US" altLang="zh-CN"/>
+          </a:p>
+          <a:p>
+            <a:pPr lvl="1"/>
+            <a:r>
+              <a:rPr lang="en-US" altLang="zh-CN"/>
+              <a:t>https://github.com/Stuk/jszip-utils</a:t>
+            </a:r>
+            <a:endParaRPr lang="en-US" altLang="zh-CN"/>
+          </a:p>
+          <a:p>
+            <a:pPr lvl="1"/>
+            <a:endParaRPr lang="en-US" altLang="zh-CN"/>
+          </a:p>
+        </p:txBody>
+      </p:sp>
+      <p:sp>
+        <p:nvSpPr>
+          <p:cNvPr id="4" name="文本框 3"/>
+          <p:cNvSpPr txBox="1"/>
+          <p:nvPr/>
+        </p:nvSpPr>
+        <p:spPr>
+          <a:xfrm>
+            <a:off x="7265035" y="1081405"/>
+            <a:ext cx="4575810" cy="1938020"/>
+          </a:xfrm>
+          <a:prstGeom prst="rect">
+            <a:avLst/>
+          </a:prstGeom>
+          <a:noFill/>
+          <a:ln>
+            <a:solidFill>
+              <a:srgbClr val="FFC000"/>
+            </a:solidFill>
+          </a:ln>
+        </p:spPr>
+        <p:txBody>
+          <a:bodyPr wrap="square" rtlCol="0">
+            <a:spAutoFit/>
+          </a:bodyPr>
+          <a:p>
+            <a:r>
+              <a:rPr lang="zh-CN" altLang="en-US" sz="1000"/>
+              <a:t>var zip = new JsZip()</a:t>
+            </a:r>
+            <a:endParaRPr lang="zh-CN" altLang="en-US" sz="1000"/>
+          </a:p>
+          <a:p>
+            <a:r>
+              <a:rPr lang="zh-CN" altLang="en-US" sz="1000"/>
+              <a:t>var img = zip.folder('images')</a:t>
+            </a:r>
+            <a:endParaRPr lang="zh-CN" altLang="en-US" sz="1000"/>
+          </a:p>
+          <a:p>
+            <a:r>
+              <a:rPr lang="zh-CN" altLang="en-US" sz="1000"/>
+              <a:t>fs.readFile('C:/tmp/1.jpg', function(err, data) {</a:t>
+            </a:r>
+            <a:endParaRPr lang="zh-CN" altLang="en-US" sz="1000"/>
+          </a:p>
+          <a:p>
+            <a:r>
+              <a:rPr lang="zh-CN" altLang="en-US" sz="1000"/>
+              <a:t>  img.file('1.jpg', data, {base64: true})</a:t>
+            </a:r>
+            <a:endParaRPr lang="zh-CN" altLang="en-US" sz="1000"/>
+          </a:p>
+          <a:p>
+            <a:r>
+              <a:rPr lang="zh-CN" altLang="en-US" sz="1000"/>
+              <a:t>  zip.generateAsync({type: </a:t>
+            </a:r>
+            <a:r>
+              <a:rPr lang="zh-CN" altLang="en-US" sz="1000" b="1"/>
+              <a:t>'nodebuffer'</a:t>
+            </a:r>
+            <a:r>
+              <a:rPr lang="zh-CN" altLang="en-US" sz="1000"/>
+              <a:t>}).then(function(content) {</a:t>
+            </a:r>
+            <a:endParaRPr lang="zh-CN" altLang="en-US" sz="1000"/>
+          </a:p>
+          <a:p>
+            <a:r>
+              <a:rPr lang="en-US" altLang="zh-CN" sz="1000"/>
+              <a:t> </a:t>
+            </a:r>
+            <a:r>
+              <a:rPr lang="zh-CN" altLang="en-US" sz="1000"/>
+              <a:t>    console.log('Generated zip. content: ', content)</a:t>
+            </a:r>
+            <a:endParaRPr lang="zh-CN" altLang="en-US" sz="1000"/>
+          </a:p>
+          <a:p>
+            <a:r>
+              <a:rPr lang="zh-CN" altLang="en-US" sz="1000"/>
+              <a:t>     fs.writeFile('C:/tmp/test.zip', content, (err) =&gt; {</a:t>
+            </a:r>
+            <a:endParaRPr lang="zh-CN" altLang="en-US" sz="1000"/>
+          </a:p>
+          <a:p>
+            <a:r>
+              <a:rPr lang="zh-CN" altLang="en-US" sz="1000"/>
+              <a:t>     </a:t>
+            </a:r>
+            <a:r>
+              <a:rPr lang="en-US" altLang="zh-CN" sz="1000"/>
+              <a:t>  </a:t>
+            </a:r>
+            <a:r>
+              <a:rPr lang="zh-CN" altLang="en-US" sz="1000"/>
+              <a:t>if (err)</a:t>
+            </a:r>
+            <a:r>
+              <a:rPr lang="en-US" altLang="zh-CN" sz="1000"/>
+              <a:t> </a:t>
+            </a:r>
+            <a:r>
+              <a:rPr lang="zh-CN" altLang="en-US" sz="1000"/>
+              <a:t>throw err</a:t>
+            </a:r>
+            <a:endParaRPr lang="zh-CN" altLang="en-US" sz="1000"/>
+          </a:p>
+          <a:p>
+            <a:r>
+              <a:rPr lang="zh-CN" altLang="en-US" sz="1000"/>
+              <a:t>     </a:t>
+            </a:r>
+            <a:r>
+              <a:rPr lang="en-US" altLang="zh-CN" sz="1000"/>
+              <a:t> </a:t>
+            </a:r>
+            <a:r>
+              <a:rPr lang="zh-CN" altLang="en-US" sz="1000"/>
+              <a:t>console.log('Saved test.zip file.')</a:t>
+            </a:r>
+            <a:endParaRPr lang="zh-CN" altLang="en-US" sz="1000"/>
+          </a:p>
+          <a:p>
+            <a:r>
+              <a:rPr lang="zh-CN" altLang="en-US" sz="1000"/>
+              <a:t>    })</a:t>
+            </a:r>
+            <a:endParaRPr lang="zh-CN" altLang="en-US" sz="1000"/>
+          </a:p>
+          <a:p>
+            <a:r>
+              <a:rPr lang="zh-CN" altLang="en-US" sz="1000"/>
+              <a:t>  })</a:t>
+            </a:r>
+            <a:endParaRPr lang="zh-CN" altLang="en-US" sz="1000"/>
+          </a:p>
+          <a:p>
+            <a:r>
+              <a:rPr lang="zh-CN" altLang="en-US" sz="1000"/>
+              <a:t>})</a:t>
+            </a:r>
+            <a:endParaRPr lang="zh-CN" altLang="en-US" sz="1000"/>
+          </a:p>
+        </p:txBody>
+      </p:sp>
+      <p:sp>
+        <p:nvSpPr>
+          <p:cNvPr id="5" name="文本框 4"/>
+          <p:cNvSpPr txBox="1"/>
+          <p:nvPr/>
+        </p:nvSpPr>
+        <p:spPr>
+          <a:xfrm>
+            <a:off x="7265035" y="3132455"/>
+            <a:ext cx="4575810" cy="706755"/>
+          </a:xfrm>
+          <a:prstGeom prst="rect">
+            <a:avLst/>
+          </a:prstGeom>
+          <a:noFill/>
+          <a:ln>
+            <a:solidFill>
+              <a:srgbClr val="FFC000"/>
+            </a:solidFill>
+          </a:ln>
+        </p:spPr>
+        <p:txBody>
+          <a:bodyPr wrap="square" rtlCol="0">
+            <a:spAutoFit/>
+          </a:bodyPr>
+          <a:p>
+            <a:r>
+              <a:rPr lang="zh-CN" altLang="en-US" sz="1000"/>
+              <a:t>zip.generateAsync({type:"</a:t>
+            </a:r>
+            <a:r>
+              <a:rPr lang="zh-CN" altLang="en-US" sz="1000" b="1"/>
+              <a:t>blob</a:t>
+            </a:r>
+            <a:r>
+              <a:rPr lang="zh-CN" altLang="en-US" sz="1000"/>
+              <a:t>"}).then(function (content) {</a:t>
+            </a:r>
+            <a:endParaRPr lang="zh-CN" altLang="en-US" sz="1000"/>
+          </a:p>
+          <a:p>
+            <a:r>
+              <a:rPr lang="zh-CN" altLang="en-US" sz="1000"/>
+              <a:t>    // see FileSaver.js</a:t>
+            </a:r>
+            <a:endParaRPr lang="zh-CN" altLang="en-US" sz="1000"/>
+          </a:p>
+          <a:p>
+            <a:r>
+              <a:rPr lang="zh-CN" altLang="en-US" sz="1000"/>
+              <a:t>    saveAs(content, "hello.zip");</a:t>
+            </a:r>
+            <a:endParaRPr lang="zh-CN" altLang="en-US" sz="1000"/>
+          </a:p>
+          <a:p>
+            <a:r>
+              <a:rPr lang="zh-CN" altLang="en-US" sz="1000"/>
+              <a:t>});</a:t>
+            </a:r>
+            <a:endParaRPr lang="zh-CN" altLang="en-US" sz="1000"/>
+          </a:p>
+        </p:txBody>
+      </p:sp>
+      <p:sp>
+        <p:nvSpPr>
+          <p:cNvPr id="6" name="文本框 5"/>
+          <p:cNvSpPr txBox="1"/>
+          <p:nvPr/>
+        </p:nvSpPr>
+        <p:spPr>
+          <a:xfrm>
+            <a:off x="7265035" y="3925570"/>
+            <a:ext cx="4575810" cy="1322070"/>
+          </a:xfrm>
+          <a:prstGeom prst="rect">
+            <a:avLst/>
+          </a:prstGeom>
+          <a:noFill/>
+          <a:ln>
+            <a:solidFill>
+              <a:srgbClr val="FFC000"/>
+            </a:solidFill>
+          </a:ln>
+        </p:spPr>
+        <p:txBody>
+          <a:bodyPr wrap="square" rtlCol="0">
+            <a:spAutoFit/>
+          </a:bodyPr>
+          <a:p>
+            <a:r>
+              <a:rPr lang="en-US" altLang="zh-CN" sz="1000"/>
+              <a:t>var imgData = canvas.toDataUrl()</a:t>
+            </a:r>
+            <a:endParaRPr lang="en-US" altLang="zh-CN" sz="1000"/>
+          </a:p>
+          <a:p>
+            <a:r>
+              <a:rPr lang="en-US" altLang="zh-CN" sz="1000"/>
+              <a:t>imgData = imgData.replace(/^data:image\/(png|jpg);base64,/, "")</a:t>
+            </a:r>
+            <a:endParaRPr lang="en-US" altLang="zh-CN" sz="1000"/>
+          </a:p>
+          <a:p>
+            <a:r>
+              <a:rPr lang="zh-CN" altLang="en-US" sz="1000">
+                <a:sym typeface="+mn-ea"/>
+              </a:rPr>
+              <a:t>var zip = new JsZip()</a:t>
+            </a:r>
+            <a:endParaRPr lang="zh-CN" altLang="en-US" sz="1000"/>
+          </a:p>
+          <a:p>
+            <a:r>
+              <a:rPr lang="en-US" altLang="zh-CN" sz="1000"/>
+              <a:t>zip.file(‘1.png’, imgData, {base64: true})</a:t>
+            </a:r>
+            <a:endParaRPr lang="en-US" altLang="zh-CN" sz="1000"/>
+          </a:p>
+          <a:p>
+            <a:r>
+              <a:rPr lang="zh-CN" altLang="en-US" sz="1000">
+                <a:sym typeface="+mn-ea"/>
+              </a:rPr>
+              <a:t>zip.generateAsync({type:"base64"}).then(function (content) {</a:t>
+            </a:r>
+            <a:endParaRPr lang="zh-CN" altLang="en-US" sz="1000"/>
+          </a:p>
+          <a:p>
+            <a:r>
+              <a:rPr lang="zh-CN" altLang="en-US" sz="1000">
+                <a:sym typeface="+mn-ea"/>
+              </a:rPr>
+              <a:t>    location.href="data:application/zip;base64,"+content;</a:t>
+            </a:r>
+            <a:endParaRPr lang="zh-CN" altLang="en-US" sz="1000"/>
+          </a:p>
+          <a:p>
+            <a:r>
+              <a:rPr lang="en-US" altLang="zh-CN" sz="1000">
+                <a:sym typeface="+mn-ea"/>
+              </a:rPr>
+              <a:t>  </a:t>
+            </a:r>
+            <a:r>
+              <a:rPr lang="zh-CN" altLang="en-US" sz="1000">
+                <a:sym typeface="+mn-ea"/>
+              </a:rPr>
+              <a:t>});</a:t>
+            </a:r>
+            <a:endParaRPr lang="en-US" altLang="zh-CN" sz="1000"/>
+          </a:p>
+          <a:p>
+            <a:r>
+              <a:rPr lang="en-US" altLang="zh-CN" sz="1000"/>
+              <a:t>}</a:t>
+            </a:r>
+            <a:endParaRPr lang="en-US" altLang="zh-CN" sz="1000"/>
+          </a:p>
+        </p:txBody>
+      </p:sp>
+      <p:sp>
+        <p:nvSpPr>
+          <p:cNvPr id="7" name="文本框 6"/>
+          <p:cNvSpPr txBox="1"/>
+          <p:nvPr/>
+        </p:nvSpPr>
+        <p:spPr>
+          <a:xfrm>
+            <a:off x="7265035" y="5342255"/>
+            <a:ext cx="4575810" cy="860425"/>
+          </a:xfrm>
+          <a:prstGeom prst="rect">
+            <a:avLst/>
+          </a:prstGeom>
+          <a:noFill/>
+          <a:ln>
+            <a:solidFill>
+              <a:srgbClr val="FFC000"/>
+            </a:solidFill>
+          </a:ln>
+        </p:spPr>
+        <p:txBody>
+          <a:bodyPr wrap="square" rtlCol="0">
+            <a:spAutoFit/>
+          </a:bodyPr>
+          <a:p>
+            <a:r>
+              <a:rPr lang="en-US" altLang="zh-CN" sz="1000"/>
+              <a:t>zip.generateAsync({type:"blob"}).then(function(content){</a:t>
+            </a:r>
+            <a:endParaRPr lang="en-US" altLang="zh-CN" sz="1000"/>
+          </a:p>
+          <a:p>
+            <a:r>
+              <a:rPr lang="en-US" altLang="zh-CN" sz="1000"/>
+              <a:t>  var file = new File([content], "name.zip");</a:t>
+            </a:r>
+            <a:endParaRPr lang="en-US" altLang="zh-CN" sz="1000"/>
+          </a:p>
+          <a:p>
+            <a:r>
+              <a:rPr lang="en-US" altLang="zh-CN" sz="1000"/>
+              <a:t>  var formData = new FormData();</a:t>
+            </a:r>
+            <a:endParaRPr lang="en-US" altLang="zh-CN" sz="1000"/>
+          </a:p>
+          <a:p>
+            <a:r>
+              <a:rPr lang="en-US" altLang="zh-CN" sz="1000"/>
+              <a:t>  formData.append('fileZip', file);</a:t>
+            </a:r>
+            <a:endParaRPr lang="en-US" altLang="zh-CN" sz="1000"/>
+          </a:p>
+          <a:p>
+            <a:r>
+              <a:rPr lang="en-US" altLang="zh-CN" sz="1000"/>
+              <a:t>})</a:t>
+            </a:r>
+            <a:endParaRPr lang="en-US" altLang="zh-CN" sz="1000"/>
           </a:p>
         </p:txBody>
       </p:sp>
@@ -5975,7 +5963,7 @@
       <p:grpSpPr/>
       <p:sp>
         <p:nvSpPr>
-          <p:cNvPr id="2" name="Title 1"/>
+          <p:cNvPr id="2" name="标题 1"/>
           <p:cNvSpPr>
             <a:spLocks noGrp="1"/>
           </p:cNvSpPr>
@@ -5988,16 +5976,16 @@
           <a:bodyPr/>
           <a:p>
             <a:r>
-              <a:rPr lang="en-US" altLang="en-US"/>
-              <a:t>jQuery</a:t>
-            </a:r>
-            <a:endParaRPr lang="en-US" altLang="en-US"/>
-          </a:p>
-        </p:txBody>
-      </p:sp>
-      <p:sp>
-        <p:nvSpPr>
-          <p:cNvPr id="3" name="Content Placeholder 2"/>
+              <a:rPr lang="en-US" altLang="zh-CN"/>
+              <a:t>Bundle Javascript Library</a:t>
+            </a:r>
+            <a:endParaRPr lang="en-US" altLang="zh-CN"/>
+          </a:p>
+        </p:txBody>
+      </p:sp>
+      <p:sp>
+        <p:nvSpPr>
+          <p:cNvPr id="3" name="内容占位符 2"/>
           <p:cNvSpPr>
             <a:spLocks noGrp="1"/>
           </p:cNvSpPr>
@@ -6010,22 +5998,77 @@
           <a:bodyPr/>
           <a:p>
             <a:r>
-              <a:rPr lang="en-US" altLang="en-US"/>
-              <a:t>Find element</a:t>
-            </a:r>
-            <a:endParaRPr lang="en-US" altLang="en-US"/>
-          </a:p>
-          <a:p>
-            <a:pPr lvl="1"/>
-            <a:r>
-              <a:rPr lang="en-US" altLang="en-US"/>
-              <a:t>$('#id01'), $('.class1')</a:t>
-            </a:r>
-            <a:endParaRPr lang="en-US" altLang="en-US"/>
+              <a:rPr lang="en-US" altLang="zh-CN"/>
+              <a:t>Webpack</a:t>
+            </a:r>
+            <a:endParaRPr lang="en-US" altLang="zh-CN"/>
+          </a:p>
+          <a:p>
+            <a:pPr lvl="1"/>
+            <a:r>
+              <a:rPr lang="en-US" altLang="zh-CN"/>
+              <a:t>https://webpack.js.org/guides/author-libraries/</a:t>
+            </a:r>
+            <a:endParaRPr lang="en-US" altLang="zh-CN"/>
+          </a:p>
+          <a:p>
+            <a:pPr lvl="1"/>
+            <a:r>
+              <a:rPr lang="en-US" altLang="zh-CN"/>
+              <a:t>webpack.config.js</a:t>
+            </a:r>
+            <a:endParaRPr lang="en-US" altLang="zh-CN"/>
+          </a:p>
+          <a:p>
+            <a:pPr lvl="1"/>
+            <a:r>
+              <a:rPr lang="en-US" altLang="zh-CN"/>
+              <a:t>package.json</a:t>
+            </a:r>
+            <a:endParaRPr lang="en-US" altLang="zh-CN"/>
+          </a:p>
+          <a:p>
+            <a:pPr lvl="1"/>
+            <a:r>
+              <a:rPr lang="en-US" altLang="zh-CN"/>
+              <a:t>Run 'npm i'</a:t>
+            </a:r>
+            <a:endParaRPr lang="en-US" altLang="zh-CN"/>
+          </a:p>
+          <a:p>
+            <a:pPr lvl="1"/>
+            <a:r>
+              <a:rPr lang="en-US" altLang="zh-CN"/>
+              <a:t>Run 'webpack'</a:t>
+            </a:r>
+            <a:endParaRPr lang="en-US" altLang="zh-CN"/>
+          </a:p>
+          <a:p>
+            <a:pPr lvl="0"/>
+            <a:r>
+              <a:rPr lang="en-US" altLang="zh-CN"/>
+              <a:t>npm Packaging</a:t>
+            </a:r>
+            <a:endParaRPr lang="en-US" altLang="zh-CN"/>
+          </a:p>
+          <a:p>
+            <a:pPr lvl="1"/>
+            <a:r>
+              <a:rPr lang="en-US" altLang="zh-CN"/>
+              <a:t>https://docs.npmjs.com/packages-and-modules/contributing-packages-to-the-registry</a:t>
+            </a:r>
+            <a:endParaRPr lang="en-US" altLang="zh-CN"/>
+          </a:p>
+          <a:p>
+            <a:pPr lvl="1"/>
+            <a:endParaRPr lang="en-US" altLang="zh-CN"/>
           </a:p>
         </p:txBody>
       </p:sp>
     </p:spTree>
+    <p:custDataLst>
+      <p:tags r:id="rId1"/>
+    </p:custDataLst>
   </p:cSld>
   <p:clrMapOvr>
     <a:masterClrMapping/>
@@ -6095,6 +6138,76 @@
 </file>
 
 <file path=ppt/slides/slide20.xml><?xml version="1.0" encoding="utf-8"?>
+<p:sld xmlns:a="http://schemas.openxmlformats.org/drawingml/2006/main" xmlns:r="http://schemas.openxmlformats.org/officeDocument/2006/relationships" xmlns:p="http://schemas.openxmlformats.org/presentationml/2006/main">
+  <p:cSld>
+    <p:spTree>
+      <p:nvGrpSpPr>
+        <p:cNvPr id="1" name=""/>
+        <p:cNvGrpSpPr/>
+        <p:nvPr/>
+      </p:nvGrpSpPr>
+      <p:grpSpPr/>
+      <p:sp>
+        <p:nvSpPr>
+          <p:cNvPr id="2" name="Title 1"/>
+          <p:cNvSpPr>
+            <a:spLocks noGrp="1"/>
+          </p:cNvSpPr>
+          <p:nvPr>
+            <p:ph type="title"/>
+          </p:nvPr>
+        </p:nvSpPr>
+        <p:spPr/>
+        <p:txBody>
+          <a:bodyPr/>
+          <a:p>
+            <a:r>
+              <a:rPr lang="en-US" altLang="en-US"/>
+              <a:t>jQuery</a:t>
+            </a:r>
+            <a:endParaRPr lang="en-US" altLang="en-US"/>
+          </a:p>
+        </p:txBody>
+      </p:sp>
+      <p:sp>
+        <p:nvSpPr>
+          <p:cNvPr id="3" name="Content Placeholder 2"/>
+          <p:cNvSpPr>
+            <a:spLocks noGrp="1"/>
+          </p:cNvSpPr>
+          <p:nvPr>
+            <p:ph idx="1"/>
+          </p:nvPr>
+        </p:nvSpPr>
+        <p:spPr/>
+        <p:txBody>
+          <a:bodyPr/>
+          <a:p>
+            <a:r>
+              <a:rPr lang="en-US" altLang="en-US"/>
+              <a:t>Find element</a:t>
+            </a:r>
+            <a:endParaRPr lang="en-US" altLang="en-US"/>
+          </a:p>
+          <a:p>
+            <a:pPr lvl="1"/>
+            <a:r>
+              <a:rPr lang="en-US" altLang="en-US"/>
+              <a:t>$('#id01'), $('.class1')</a:t>
+            </a:r>
+            <a:endParaRPr lang="en-US" altLang="en-US"/>
+          </a:p>
+        </p:txBody>
+      </p:sp>
+    </p:spTree>
+  </p:cSld>
+  <p:clrMapOvr>
+    <a:masterClrMapping/>
+  </p:clrMapOvr>
+</p:sld>
+</file>
+
+<file path=ppt/slides/slide21.xml><?xml version="1.0" encoding="utf-8"?>
 <p:sld xmlns:a="http://schemas.openxmlformats.org/drawingml/2006/main" xmlns:r="http://schemas.openxmlformats.org/officeDocument/2006/relationships" xmlns:p="http://schemas.openxmlformats.org/presentationml/2006/main">
   <p:cSld>
     <p:spTree>
@@ -6468,7 +6581,7 @@
 </p:sld>
 </file>
 
-<file path=ppt/slides/slide21.xml><?xml version="1.0" encoding="utf-8"?>
+<file path=ppt/slides/slide22.xml><?xml version="1.0" encoding="utf-8"?>
 <p:sld xmlns:a="http://schemas.openxmlformats.org/drawingml/2006/main" xmlns:r="http://schemas.openxmlformats.org/officeDocument/2006/relationships" xmlns:p="http://schemas.openxmlformats.org/presentationml/2006/main">
   <p:cSld>
     <p:spTree>
@@ -6663,7 +6776,7 @@
 </p:sld>
 </file>
 
-<file path=ppt/slides/slide22.xml><?xml version="1.0" encoding="utf-8"?>
+<file path=ppt/slides/slide23.xml><?xml version="1.0" encoding="utf-8"?>
 <p:sld xmlns:a="http://schemas.openxmlformats.org/drawingml/2006/main" xmlns:r="http://schemas.openxmlformats.org/officeDocument/2006/relationships" xmlns:p="http://schemas.openxmlformats.org/presentationml/2006/main">
   <p:cSld>
     <p:spTree>
@@ -6884,7 +6997,7 @@
 </p:sld>
 </file>
 
-<file path=ppt/slides/slide23.xml><?xml version="1.0" encoding="utf-8"?>
+<file path=ppt/slides/slide24.xml><?xml version="1.0" encoding="utf-8"?>
 <p:sld xmlns:a="http://schemas.openxmlformats.org/drawingml/2006/main" xmlns:r="http://schemas.openxmlformats.org/officeDocument/2006/relationships" xmlns:p="http://schemas.openxmlformats.org/presentationml/2006/main">
   <p:cSld>
     <p:spTree>
@@ -7012,7 +7125,7 @@
 </p:sld>
 </file>
 
-<file path=ppt/slides/slide24.xml><?xml version="1.0" encoding="utf-8"?>
+<file path=ppt/slides/slide25.xml><?xml version="1.0" encoding="utf-8"?>
 <p:sld xmlns:a="http://schemas.openxmlformats.org/drawingml/2006/main" xmlns:r="http://schemas.openxmlformats.org/officeDocument/2006/relationships" xmlns:p="http://schemas.openxmlformats.org/presentationml/2006/main">
   <p:cSld>
     <p:spTree>
@@ -7142,7 +7255,7 @@
 </p:sld>
 </file>
 
-<file path=ppt/slides/slide25.xml><?xml version="1.0" encoding="utf-8"?>
+<file path=ppt/slides/slide26.xml><?xml version="1.0" encoding="utf-8"?>
 <p:sld xmlns:a="http://schemas.openxmlformats.org/drawingml/2006/main" xmlns:r="http://schemas.openxmlformats.org/officeDocument/2006/relationships" xmlns:p="http://schemas.openxmlformats.org/presentationml/2006/main">
   <p:cSld>
     <p:spTree>
@@ -7369,7 +7482,7 @@
 </p:sld>
 </file>
 
-<file path=ppt/slides/slide26.xml><?xml version="1.0" encoding="utf-8"?>
+<file path=ppt/slides/slide27.xml><?xml version="1.0" encoding="utf-8"?>
 <p:sld xmlns:a="http://schemas.openxmlformats.org/drawingml/2006/main" xmlns:r="http://schemas.openxmlformats.org/officeDocument/2006/relationships" xmlns:p="http://schemas.openxmlformats.org/presentationml/2006/main">
   <p:cSld>
     <p:spTree>
@@ -7732,7 +7845,7 @@
 </p:sld>
 </file>
 
-<file path=ppt/slides/slide27.xml><?xml version="1.0" encoding="utf-8"?>
+<file path=ppt/slides/slide28.xml><?xml version="1.0" encoding="utf-8"?>
 <p:sld xmlns:a="http://schemas.openxmlformats.org/drawingml/2006/main" xmlns:r="http://schemas.openxmlformats.org/officeDocument/2006/relationships" xmlns:p="http://schemas.openxmlformats.org/presentationml/2006/main">
   <p:cSld>
     <p:spTree>
@@ -7894,103 +8007,6 @@
 </p:sld>
 </file>
 
-<file path=ppt/slides/slide28.xml><?xml version="1.0" encoding="utf-8"?>
-<p:sld xmlns:a="http://schemas.openxmlformats.org/drawingml/2006/main" xmlns:r="http://schemas.openxmlformats.org/officeDocument/2006/relationships" xmlns:p="http://schemas.openxmlformats.org/presentationml/2006/main">
-  <p:cSld>
-    <p:spTree>
-      <p:nvGrpSpPr>
-        <p:cNvPr id="1" name=""/>
-        <p:cNvGrpSpPr/>
-        <p:nvPr/>
-      </p:nvGrpSpPr>
-      <p:grpSpPr/>
-      <p:sp>
-        <p:nvSpPr>
-          <p:cNvPr id="2" name="标题 1"/>
-          <p:cNvSpPr>
-            <a:spLocks noGrp="1"/>
-          </p:cNvSpPr>
-          <p:nvPr>
-            <p:ph type="title"/>
-          </p:nvPr>
-        </p:nvSpPr>
-        <p:spPr/>
-        <p:txBody>
-          <a:bodyPr/>
-          <a:p>
-            <a:r>
-              <a:rPr lang="en-US" altLang="zh-CN"/>
-              <a:t>Javascript Modules</a:t>
-            </a:r>
-            <a:endParaRPr lang="en-US" altLang="zh-CN"/>
-          </a:p>
-        </p:txBody>
-      </p:sp>
-      <p:sp>
-        <p:nvSpPr>
-          <p:cNvPr id="3" name="内容占位符 2"/>
-          <p:cNvSpPr>
-            <a:spLocks noGrp="1"/>
-          </p:cNvSpPr>
-          <p:nvPr>
-            <p:ph idx="1"/>
-          </p:nvPr>
-        </p:nvSpPr>
-        <p:spPr/>
-        <p:txBody>
-          <a:bodyPr/>
-          <a:p>
-            <a:r>
-              <a:rPr lang="en-US" altLang="zh-CN"/>
-              <a:t>References</a:t>
-            </a:r>
-            <a:endParaRPr lang="en-US" altLang="zh-CN"/>
-          </a:p>
-          <a:p>
-            <a:pPr lvl="1"/>
-            <a:r>
-              <a:rPr lang="en-US" altLang="zh-CN"/>
-              <a:t>https://developer.mozilla.org/en-US/docs/Web/JavaScript/Guide/Modules</a:t>
-            </a:r>
-            <a:endParaRPr lang="en-US" altLang="zh-CN"/>
-          </a:p>
-          <a:p>
-            <a:pPr lvl="0"/>
-            <a:r>
-              <a:rPr lang="en-US" altLang="zh-CN"/>
-              <a:t>Modules</a:t>
-            </a:r>
-            <a:endParaRPr lang="en-US" altLang="zh-CN"/>
-          </a:p>
-          <a:p>
-            <a:pPr lvl="1"/>
-            <a:r>
-              <a:rPr lang="en-US" altLang="zh-CN"/>
-              <a:t>import</a:t>
-            </a:r>
-            <a:endParaRPr lang="en-US" altLang="zh-CN"/>
-          </a:p>
-          <a:p>
-            <a:pPr lvl="1"/>
-            <a:r>
-              <a:rPr lang="en-US" altLang="zh-CN"/>
-              <a:t>export</a:t>
-            </a:r>
-            <a:endParaRPr lang="en-US" altLang="zh-CN"/>
-          </a:p>
-        </p:txBody>
-      </p:sp>
-    </p:spTree>
-    <p:custDataLst>
-      <p:tags r:id="rId1"/>
-    </p:custDataLst>
-  </p:cSld>
-  <p:clrMapOvr>
-    <a:masterClrMapping/>
-  </p:clrMapOvr>
-</p:sld>
-</file>
-
 <file path=ppt/slides/slide29.xml><?xml version="1.0" encoding="utf-8"?>
 <p:sld xmlns:a="http://schemas.openxmlformats.org/drawingml/2006/main" xmlns:r="http://schemas.openxmlformats.org/officeDocument/2006/relationships" xmlns:p="http://schemas.openxmlformats.org/presentationml/2006/main">
   <p:cSld>
@@ -8017,7 +8033,7 @@
           <a:p>
             <a:r>
               <a:rPr lang="en-US" altLang="zh-CN"/>
-              <a:t>FAQ</a:t>
+              <a:t>Javascript Modules</a:t>
             </a:r>
             <a:endParaRPr lang="en-US" altLang="zh-CN"/>
           </a:p>
@@ -8038,32 +8054,40 @@
           <a:bodyPr/>
           <a:p>
             <a:r>
-              <a:rPr lang="zh-CN" altLang="en-US"/>
-              <a:t>npm: unable to verify the first certificate</a:t>
-            </a:r>
-            <a:endParaRPr lang="zh-CN" altLang="en-US"/>
-          </a:p>
-          <a:p>
-            <a:pPr lvl="1"/>
-            <a:r>
-              <a:rPr lang="zh-CN" altLang="en-US"/>
-              <a:t>npm config set registry http://registry.npmjs.org/ --global</a:t>
-            </a:r>
-            <a:endParaRPr lang="zh-CN" altLang="en-US"/>
-          </a:p>
-          <a:p>
-            <a:pPr lvl="1"/>
-            <a:r>
-              <a:rPr lang="en-US" altLang="zh-CN"/>
-              <a:t>npm config set registry http://registry.npm.taobao.org/ --global</a:t>
-            </a:r>
-            <a:endParaRPr lang="en-US" altLang="zh-CN"/>
-          </a:p>
-          <a:p>
-            <a:pPr lvl="1"/>
-            <a:r>
-              <a:rPr lang="en-US" altLang="zh-CN"/>
-              <a:t>npm config set strict SSL false</a:t>
+              <a:rPr lang="en-US" altLang="zh-CN"/>
+              <a:t>References</a:t>
+            </a:r>
+            <a:endParaRPr lang="en-US" altLang="zh-CN"/>
+          </a:p>
+          <a:p>
+            <a:pPr lvl="1"/>
+            <a:r>
+              <a:rPr lang="en-US" altLang="zh-CN"/>
+              <a:t>https://developer.mozilla.org/en-US/docs/Web/JavaScript/Guide/Modules</a:t>
+            </a:r>
+            <a:endParaRPr lang="en-US" altLang="zh-CN"/>
+          </a:p>
+          <a:p>
+            <a:pPr lvl="0"/>
+            <a:r>
+              <a:rPr lang="en-US" altLang="zh-CN"/>
+              <a:t>Modules</a:t>
+            </a:r>
+            <a:endParaRPr lang="en-US" altLang="zh-CN"/>
+          </a:p>
+          <a:p>
+            <a:pPr lvl="1"/>
+            <a:r>
+              <a:rPr lang="en-US" altLang="zh-CN"/>
+              <a:t>import</a:t>
+            </a:r>
+            <a:endParaRPr lang="en-US" altLang="zh-CN"/>
+          </a:p>
+          <a:p>
+            <a:pPr lvl="1"/>
+            <a:r>
+              <a:rPr lang="en-US" altLang="zh-CN"/>
+              <a:t>export</a:t>
             </a:r>
             <a:endParaRPr lang="en-US" altLang="zh-CN"/>
           </a:p>
@@ -8157,7 +8181,7 @@
       <p:grpSpPr/>
       <p:sp>
         <p:nvSpPr>
-          <p:cNvPr id="4" name="标题 3"/>
+          <p:cNvPr id="2" name="标题 1"/>
           <p:cNvSpPr>
             <a:spLocks noGrp="1"/>
           </p:cNvSpPr>
@@ -8171,27 +8195,87 @@
           <a:p>
             <a:r>
               <a:rPr lang="en-US" altLang="zh-CN"/>
-              <a:t>Image Process</a:t>
-            </a:r>
-            <a:endParaRPr lang="en-US" altLang="zh-CN"/>
-          </a:p>
-        </p:txBody>
-      </p:sp>
-      <p:sp>
-        <p:nvSpPr>
-          <p:cNvPr id="5" name="文本占位符 4"/>
-          <p:cNvSpPr>
-            <a:spLocks noGrp="1"/>
-          </p:cNvSpPr>
-          <p:nvPr>
-            <p:ph type="body" idx="1"/>
+              <a:t>Libraries</a:t>
+            </a:r>
+            <a:endParaRPr lang="en-US" altLang="zh-CN"/>
+          </a:p>
+        </p:txBody>
+      </p:sp>
+      <p:sp>
+        <p:nvSpPr>
+          <p:cNvPr id="3" name="内容占位符 2"/>
+          <p:cNvSpPr>
+            <a:spLocks noGrp="1"/>
+          </p:cNvSpPr>
+          <p:nvPr>
+            <p:ph idx="1"/>
           </p:nvPr>
         </p:nvSpPr>
         <p:spPr/>
         <p:txBody>
           <a:bodyPr/>
           <a:p>
-            <a:endParaRPr lang="zh-CN" altLang="en-US"/>
+            <a:r>
+              <a:rPr lang="en-US" altLang="zh-CN"/>
+              <a:t>https://fireworks.js.org/</a:t>
+            </a:r>
+            <a:endParaRPr lang="en-US" altLang="zh-CN"/>
+          </a:p>
+          <a:p>
+            <a:pPr lvl="1"/>
+            <a:r>
+              <a:rPr lang="en-US" altLang="zh-CN"/>
+              <a:t>fireworks effects</a:t>
+            </a:r>
+            <a:endParaRPr lang="en-US" altLang="zh-CN"/>
+          </a:p>
+          <a:p>
+            <a:pPr lvl="1"/>
+            <a:r>
+              <a:rPr lang="en-US" altLang="zh-CN"/>
+              <a:t>MIT</a:t>
+            </a:r>
+            <a:endParaRPr lang="en-US" altLang="zh-CN"/>
+          </a:p>
+          <a:p>
+            <a:pPr lvl="1"/>
+            <a:r>
+              <a:rPr lang="en-US" altLang="zh-CN"/>
+              <a:t>2D?</a:t>
+            </a:r>
+            <a:endParaRPr lang="en-US" altLang="zh-CN"/>
+          </a:p>
+          <a:p>
+            <a:pPr lvl="0"/>
+            <a:r>
+              <a:rPr lang="en-US" altLang="zh-CN"/>
+              <a:t>https://github.com/tsparticles/tsparticles</a:t>
+            </a:r>
+            <a:endParaRPr lang="en-US" altLang="zh-CN"/>
+          </a:p>
+          <a:p>
+            <a:pPr lvl="1"/>
+            <a:r>
+              <a:rPr lang="en-US" altLang="zh-CN"/>
+              <a:t>various particles effects</a:t>
+            </a:r>
+            <a:endParaRPr lang="en-US" altLang="zh-CN"/>
+          </a:p>
+          <a:p>
+            <a:pPr lvl="1"/>
+            <a:r>
+              <a:rPr lang="en-US" altLang="zh-CN"/>
+              <a:t>MIT</a:t>
+            </a:r>
+            <a:endParaRPr lang="en-US" altLang="zh-CN"/>
+          </a:p>
+          <a:p>
+            <a:pPr lvl="1"/>
+            <a:r>
+              <a:rPr lang="en-US" altLang="zh-CN"/>
+              <a:t>2D?</a:t>
+            </a:r>
+            <a:endParaRPr lang="en-US" altLang="zh-CN"/>
           </a:p>
         </p:txBody>
       </p:sp>
@@ -8232,7 +8316,7 @@
           <a:p>
             <a:r>
               <a:rPr lang="en-US" altLang="zh-CN"/>
-              <a:t>References</a:t>
+              <a:t>FAQ</a:t>
             </a:r>
             <a:endParaRPr lang="en-US" altLang="zh-CN"/>
           </a:p>
@@ -8253,80 +8337,32 @@
           <a:bodyPr/>
           <a:p>
             <a:r>
-              <a:rPr lang="en-US" altLang="zh-CN"/>
-              <a:t>References</a:t>
-            </a:r>
-            <a:endParaRPr lang="en-US" altLang="zh-CN"/>
-          </a:p>
-          <a:p>
-            <a:pPr lvl="1"/>
-            <a:r>
-              <a:rPr lang="en-US" altLang="zh-CN"/>
-              <a:t>https://webkid.io/blog/image-processing-in-javascript/</a:t>
-            </a:r>
-            <a:endParaRPr lang="en-US" altLang="zh-CN"/>
-          </a:p>
-          <a:p>
-            <a:pPr lvl="1"/>
-            <a:r>
-              <a:rPr lang="en-US" altLang="zh-CN"/>
-              <a:t>https://github.com/image-js/image-js</a:t>
-            </a:r>
-            <a:endParaRPr lang="en-US" altLang="zh-CN"/>
-          </a:p>
-          <a:p>
-            <a:pPr lvl="1"/>
-            <a:r>
-              <a:rPr lang="en-US" altLang="zh-CN"/>
-              <a:t>https://github.com/meltingice/CamanJS/</a:t>
-            </a:r>
-            <a:endParaRPr lang="en-US" altLang="zh-CN"/>
-          </a:p>
-          <a:p>
-            <a:pPr lvl="1"/>
-            <a:r>
-              <a:rPr lang="en-US" altLang="zh-CN"/>
-              <a:t>https://bashooka.com/coding/best-of-20-javascript-image-processing-plugins/</a:t>
-            </a:r>
-            <a:endParaRPr lang="en-US" altLang="zh-CN"/>
-          </a:p>
-          <a:p>
-            <a:pPr lvl="1"/>
-            <a:r>
-              <a:rPr lang="en-US" altLang="zh-CN"/>
-              <a:t>https://codegeekz.com/best-javascript-image-manipulation-libraries/</a:t>
-            </a:r>
-            <a:endParaRPr lang="en-US" altLang="zh-CN"/>
-          </a:p>
-          <a:p>
-            <a:pPr lvl="1"/>
-            <a:r>
-              <a:rPr lang="en-US" altLang="zh-CN"/>
-              <a:t>https://github.com/oliver-moran/jimp</a:t>
-            </a:r>
-            <a:endParaRPr lang="en-US" altLang="zh-CN"/>
-          </a:p>
-          <a:p>
-            <a:pPr lvl="1"/>
-            <a:r>
-              <a:rPr lang="en-US" altLang="zh-CN"/>
-              <a:t>https://sharp.pixelplumbing.com/</a:t>
-            </a:r>
-            <a:endParaRPr lang="en-US" altLang="zh-CN"/>
-          </a:p>
-          <a:p>
-            <a:pPr lvl="1"/>
-            <a:r>
-              <a:rPr lang="en-US" altLang="zh-CN"/>
-              <a:t>https://github.com/vanruesc/postprocessing</a:t>
-            </a:r>
-            <a:endParaRPr lang="en-US" altLang="zh-CN"/>
-          </a:p>
-          <a:p>
-            <a:pPr lvl="1"/>
-            <a:r>
-              <a:rPr lang="en-US" altLang="zh-CN"/>
-              <a:t>https://github.com/foo123/FILTER.js</a:t>
+              <a:rPr lang="zh-CN" altLang="en-US"/>
+              <a:t>npm: unable to verify the first certificate</a:t>
+            </a:r>
+            <a:endParaRPr lang="zh-CN" altLang="en-US"/>
+          </a:p>
+          <a:p>
+            <a:pPr lvl="1"/>
+            <a:r>
+              <a:rPr lang="zh-CN" altLang="en-US"/>
+              <a:t>npm config set registry http://registry.npmjs.org/ --global</a:t>
+            </a:r>
+            <a:endParaRPr lang="zh-CN" altLang="en-US"/>
+          </a:p>
+          <a:p>
+            <a:pPr lvl="1"/>
+            <a:r>
+              <a:rPr lang="en-US" altLang="zh-CN"/>
+              <a:t>npm config set registry http://registry.npm.taobao.org/ --global</a:t>
+            </a:r>
+            <a:endParaRPr lang="en-US" altLang="zh-CN"/>
+          </a:p>
+          <a:p>
+            <a:pPr lvl="1"/>
+            <a:r>
+              <a:rPr lang="en-US" altLang="zh-CN"/>
+              <a:t>npm config set strict SSL false</a:t>
             </a:r>
             <a:endParaRPr lang="en-US" altLang="zh-CN"/>
           </a:p>
@@ -8355,7 +8391,7 @@
       <p:grpSpPr/>
       <p:sp>
         <p:nvSpPr>
-          <p:cNvPr id="2" name="标题 1"/>
+          <p:cNvPr id="4" name="标题 3"/>
           <p:cNvSpPr>
             <a:spLocks noGrp="1"/>
           </p:cNvSpPr>
@@ -8369,39 +8405,27 @@
           <a:p>
             <a:r>
               <a:rPr lang="en-US" altLang="zh-CN"/>
-              <a:t>Viewer</a:t>
-            </a:r>
-            <a:endParaRPr lang="en-US" altLang="zh-CN"/>
-          </a:p>
-        </p:txBody>
-      </p:sp>
-      <p:sp>
-        <p:nvSpPr>
-          <p:cNvPr id="3" name="内容占位符 2"/>
-          <p:cNvSpPr>
-            <a:spLocks noGrp="1"/>
-          </p:cNvSpPr>
-          <p:nvPr>
-            <p:ph idx="1"/>
+              <a:t>Image Process</a:t>
+            </a:r>
+            <a:endParaRPr lang="en-US" altLang="zh-CN"/>
+          </a:p>
+        </p:txBody>
+      </p:sp>
+      <p:sp>
+        <p:nvSpPr>
+          <p:cNvPr id="5" name="文本占位符 4"/>
+          <p:cNvSpPr>
+            <a:spLocks noGrp="1"/>
+          </p:cNvSpPr>
+          <p:nvPr>
+            <p:ph type="body" idx="1"/>
           </p:nvPr>
         </p:nvSpPr>
         <p:spPr/>
         <p:txBody>
           <a:bodyPr/>
           <a:p>
-            <a:r>
-              <a:rPr lang="en-US" altLang="zh-CN"/>
-              <a:t>References</a:t>
-            </a:r>
-            <a:endParaRPr lang="en-US" altLang="zh-CN"/>
-          </a:p>
-          <a:p>
-            <a:pPr lvl="1"/>
-            <a:r>
-              <a:rPr lang="en-US" altLang="zh-CN"/>
-              <a:t>https://ourcodeworld.com/articles/read/54/top-10-gallery-and-photo-viewer-plugins-for-javascript-and-jquery</a:t>
-            </a:r>
-            <a:endParaRPr lang="en-US" altLang="zh-CN"/>
+            <a:endParaRPr lang="zh-CN" altLang="en-US"/>
           </a:p>
         </p:txBody>
       </p:sp>
@@ -8442,7 +8466,7 @@
           <a:p>
             <a:r>
               <a:rPr lang="en-US" altLang="zh-CN"/>
-              <a:t>List</a:t>
+              <a:t>References</a:t>
             </a:r>
             <a:endParaRPr lang="en-US" altLang="zh-CN"/>
           </a:p>
@@ -8464,19 +8488,80 @@
           <a:p>
             <a:r>
               <a:rPr lang="en-US" altLang="zh-CN"/>
-              <a:t>Sharp</a:t>
-            </a:r>
-            <a:endParaRPr lang="en-US" altLang="zh-CN"/>
-          </a:p>
-          <a:p>
-            <a:pPr lvl="1"/>
-            <a:r>
-              <a:rPr lang="en-US" altLang="zh-CN"/>
-              <a:t>https://github.com/lovell/sharp</a:t>
-            </a:r>
-            <a:endParaRPr lang="en-US" altLang="zh-CN"/>
-          </a:p>
-          <a:p>
+              <a:t>References</a:t>
+            </a:r>
+            <a:endParaRPr lang="en-US" altLang="zh-CN"/>
+          </a:p>
+          <a:p>
+            <a:pPr lvl="1"/>
+            <a:r>
+              <a:rPr lang="en-US" altLang="zh-CN"/>
+              <a:t>https://webkid.io/blog/image-processing-in-javascript/</a:t>
+            </a:r>
+            <a:endParaRPr lang="en-US" altLang="zh-CN"/>
+          </a:p>
+          <a:p>
+            <a:pPr lvl="1"/>
+            <a:r>
+              <a:rPr lang="en-US" altLang="zh-CN"/>
+              <a:t>https://github.com/image-js/image-js</a:t>
+            </a:r>
+            <a:endParaRPr lang="en-US" altLang="zh-CN"/>
+          </a:p>
+          <a:p>
+            <a:pPr lvl="1"/>
+            <a:r>
+              <a:rPr lang="en-US" altLang="zh-CN"/>
+              <a:t>https://github.com/meltingice/CamanJS/</a:t>
+            </a:r>
+            <a:endParaRPr lang="en-US" altLang="zh-CN"/>
+          </a:p>
+          <a:p>
+            <a:pPr lvl="1"/>
+            <a:r>
+              <a:rPr lang="en-US" altLang="zh-CN"/>
+              <a:t>https://bashooka.com/coding/best-of-20-javascript-image-processing-plugins/</a:t>
+            </a:r>
+            <a:endParaRPr lang="en-US" altLang="zh-CN"/>
+          </a:p>
+          <a:p>
+            <a:pPr lvl="1"/>
+            <a:r>
+              <a:rPr lang="en-US" altLang="zh-CN"/>
+              <a:t>https://codegeekz.com/best-javascript-image-manipulation-libraries/</a:t>
+            </a:r>
+            <a:endParaRPr lang="en-US" altLang="zh-CN"/>
+          </a:p>
+          <a:p>
+            <a:pPr lvl="1"/>
+            <a:r>
+              <a:rPr lang="en-US" altLang="zh-CN"/>
+              <a:t>https://github.com/oliver-moran/jimp</a:t>
+            </a:r>
+            <a:endParaRPr lang="en-US" altLang="zh-CN"/>
+          </a:p>
+          <a:p>
+            <a:pPr lvl="1"/>
+            <a:r>
+              <a:rPr lang="en-US" altLang="zh-CN"/>
+              <a:t>https://sharp.pixelplumbing.com/</a:t>
+            </a:r>
+            <a:endParaRPr lang="en-US" altLang="zh-CN"/>
+          </a:p>
+          <a:p>
+            <a:pPr lvl="1"/>
+            <a:r>
+              <a:rPr lang="en-US" altLang="zh-CN"/>
+              <a:t>https://github.com/vanruesc/postprocessing</a:t>
+            </a:r>
+            <a:endParaRPr lang="en-US" altLang="zh-CN"/>
+          </a:p>
+          <a:p>
+            <a:pPr lvl="1"/>
+            <a:r>
+              <a:rPr lang="en-US" altLang="zh-CN"/>
+              <a:t>https://github.com/foo123/FILTER.js</a:t>
+            </a:r>
             <a:endParaRPr lang="en-US" altLang="zh-CN"/>
           </a:p>
         </p:txBody>
@@ -8493,6 +8578,155 @@
 </file>
 
 <file path=ppt/slides/slide34.xml><?xml version="1.0" encoding="utf-8"?>
+<p:sld xmlns:a="http://schemas.openxmlformats.org/drawingml/2006/main" xmlns:r="http://schemas.openxmlformats.org/officeDocument/2006/relationships" xmlns:p="http://schemas.openxmlformats.org/presentationml/2006/main">
+  <p:cSld>
+    <p:spTree>
+      <p:nvGrpSpPr>
+        <p:cNvPr id="1" name=""/>
+        <p:cNvGrpSpPr/>
+        <p:nvPr/>
+      </p:nvGrpSpPr>
+      <p:grpSpPr/>
+      <p:sp>
+        <p:nvSpPr>
+          <p:cNvPr id="2" name="标题 1"/>
+          <p:cNvSpPr>
+            <a:spLocks noGrp="1"/>
+          </p:cNvSpPr>
+          <p:nvPr>
+            <p:ph type="title"/>
+          </p:nvPr>
+        </p:nvSpPr>
+        <p:spPr/>
+        <p:txBody>
+          <a:bodyPr/>
+          <a:p>
+            <a:r>
+              <a:rPr lang="en-US" altLang="zh-CN"/>
+              <a:t>Viewer</a:t>
+            </a:r>
+            <a:endParaRPr lang="en-US" altLang="zh-CN"/>
+          </a:p>
+        </p:txBody>
+      </p:sp>
+      <p:sp>
+        <p:nvSpPr>
+          <p:cNvPr id="3" name="内容占位符 2"/>
+          <p:cNvSpPr>
+            <a:spLocks noGrp="1"/>
+          </p:cNvSpPr>
+          <p:nvPr>
+            <p:ph idx="1"/>
+          </p:nvPr>
+        </p:nvSpPr>
+        <p:spPr/>
+        <p:txBody>
+          <a:bodyPr/>
+          <a:p>
+            <a:r>
+              <a:rPr lang="en-US" altLang="zh-CN"/>
+              <a:t>References</a:t>
+            </a:r>
+            <a:endParaRPr lang="en-US" altLang="zh-CN"/>
+          </a:p>
+          <a:p>
+            <a:pPr lvl="1"/>
+            <a:r>
+              <a:rPr lang="en-US" altLang="zh-CN"/>
+              <a:t>https://ourcodeworld.com/articles/read/54/top-10-gallery-and-photo-viewer-plugins-for-javascript-and-jquery</a:t>
+            </a:r>
+            <a:endParaRPr lang="en-US" altLang="zh-CN"/>
+          </a:p>
+        </p:txBody>
+      </p:sp>
+    </p:spTree>
+    <p:custDataLst>
+      <p:tags r:id="rId1"/>
+    </p:custDataLst>
+  </p:cSld>
+  <p:clrMapOvr>
+    <a:masterClrMapping/>
+  </p:clrMapOvr>
+</p:sld>
+</file>
+
+<file path=ppt/slides/slide35.xml><?xml version="1.0" encoding="utf-8"?>
+<p:sld xmlns:a="http://schemas.openxmlformats.org/drawingml/2006/main" xmlns:r="http://schemas.openxmlformats.org/officeDocument/2006/relationships" xmlns:p="http://schemas.openxmlformats.org/presentationml/2006/main">
+  <p:cSld>
+    <p:spTree>
+      <p:nvGrpSpPr>
+        <p:cNvPr id="1" name=""/>
+        <p:cNvGrpSpPr/>
+        <p:nvPr/>
+      </p:nvGrpSpPr>
+      <p:grpSpPr/>
+      <p:sp>
+        <p:nvSpPr>
+          <p:cNvPr id="2" name="标题 1"/>
+          <p:cNvSpPr>
+            <a:spLocks noGrp="1"/>
+          </p:cNvSpPr>
+          <p:nvPr>
+            <p:ph type="title"/>
+          </p:nvPr>
+        </p:nvSpPr>
+        <p:spPr/>
+        <p:txBody>
+          <a:bodyPr/>
+          <a:p>
+            <a:r>
+              <a:rPr lang="en-US" altLang="zh-CN"/>
+              <a:t>List</a:t>
+            </a:r>
+            <a:endParaRPr lang="en-US" altLang="zh-CN"/>
+          </a:p>
+        </p:txBody>
+      </p:sp>
+      <p:sp>
+        <p:nvSpPr>
+          <p:cNvPr id="3" name="内容占位符 2"/>
+          <p:cNvSpPr>
+            <a:spLocks noGrp="1"/>
+          </p:cNvSpPr>
+          <p:nvPr>
+            <p:ph idx="1"/>
+          </p:nvPr>
+        </p:nvSpPr>
+        <p:spPr/>
+        <p:txBody>
+          <a:bodyPr/>
+          <a:p>
+            <a:r>
+              <a:rPr lang="en-US" altLang="zh-CN"/>
+              <a:t>Sharp</a:t>
+            </a:r>
+            <a:endParaRPr lang="en-US" altLang="zh-CN"/>
+          </a:p>
+          <a:p>
+            <a:pPr lvl="1"/>
+            <a:r>
+              <a:rPr lang="en-US" altLang="zh-CN"/>
+              <a:t>https://github.com/lovell/sharp</a:t>
+            </a:r>
+            <a:endParaRPr lang="en-US" altLang="zh-CN"/>
+          </a:p>
+          <a:p>
+            <a:endParaRPr lang="en-US" altLang="zh-CN"/>
+          </a:p>
+        </p:txBody>
+      </p:sp>
+    </p:spTree>
+    <p:custDataLst>
+      <p:tags r:id="rId1"/>
+    </p:custDataLst>
+  </p:cSld>
+  <p:clrMapOvr>
+    <a:masterClrMapping/>
+  </p:clrMapOvr>
+</p:sld>
+</file>
+
+<file path=ppt/slides/slide36.xml><?xml version="1.0" encoding="utf-8"?>
 <p:sld xmlns:a="http://schemas.openxmlformats.org/drawingml/2006/main" xmlns:r="http://schemas.openxmlformats.org/officeDocument/2006/relationships" xmlns:p="http://schemas.openxmlformats.org/presentationml/2006/main">
   <p:cSld>
     <p:spTree>
@@ -8587,7 +8821,7 @@
 </p:sld>
 </file>
 
-<file path=ppt/slides/slide35.xml><?xml version="1.0" encoding="utf-8"?>
+<file path=ppt/slides/slide37.xml><?xml version="1.0" encoding="utf-8"?>
 <p:sld xmlns:a="http://schemas.openxmlformats.org/drawingml/2006/main" xmlns:r="http://schemas.openxmlformats.org/officeDocument/2006/relationships" xmlns:p="http://schemas.openxmlformats.org/presentationml/2006/main">
   <p:cSld>
     <p:spTree>
@@ -8668,7 +8902,7 @@
 </p:sld>
 </file>
 
-<file path=ppt/slides/slide36.xml><?xml version="1.0" encoding="utf-8"?>
+<file path=ppt/slides/slide38.xml><?xml version="1.0" encoding="utf-8"?>
 <p:sld xmlns:a="http://schemas.openxmlformats.org/drawingml/2006/main" xmlns:r="http://schemas.openxmlformats.org/officeDocument/2006/relationships" xmlns:p="http://schemas.openxmlformats.org/presentationml/2006/main">
   <p:cSld>
     <p:spTree>
@@ -8818,7 +9052,7 @@
 </p:sld>
 </file>
 
-<file path=ppt/slides/slide37.xml><?xml version="1.0" encoding="utf-8"?>
+<file path=ppt/slides/slide39.xml><?xml version="1.0" encoding="utf-8"?>
 <p:sld xmlns:a="http://schemas.openxmlformats.org/drawingml/2006/main" xmlns:r="http://schemas.openxmlformats.org/officeDocument/2006/relationships" xmlns:p="http://schemas.openxmlformats.org/presentationml/2006/main">
   <p:cSld>
     <p:spTree>
@@ -9640,574 +9874,6 @@
 </p:sld>
 </file>
 
-<file path=ppt/slides/slide38.xml><?xml version="1.0" encoding="utf-8"?>
-<p:sld xmlns:a="http://schemas.openxmlformats.org/drawingml/2006/main" xmlns:r="http://schemas.openxmlformats.org/officeDocument/2006/relationships" xmlns:p="http://schemas.openxmlformats.org/presentationml/2006/main">
-  <p:cSld>
-    <p:spTree>
-      <p:nvGrpSpPr>
-        <p:cNvPr id="1" name=""/>
-        <p:cNvGrpSpPr/>
-        <p:nvPr/>
-      </p:nvGrpSpPr>
-      <p:grpSpPr/>
-      <p:sp>
-        <p:nvSpPr>
-          <p:cNvPr id="2" name="标题 1"/>
-          <p:cNvSpPr>
-            <a:spLocks noGrp="1"/>
-          </p:cNvSpPr>
-          <p:nvPr>
-            <p:ph type="title"/>
-          </p:nvPr>
-        </p:nvSpPr>
-        <p:spPr/>
-        <p:txBody>
-          <a:bodyPr/>
-          <a:p>
-            <a:r>
-              <a:rPr lang="en-US" altLang="zh-CN"/>
-              <a:t>Encryption/Decryption</a:t>
-            </a:r>
-            <a:endParaRPr lang="en-US" altLang="zh-CN"/>
-          </a:p>
-        </p:txBody>
-      </p:sp>
-      <p:sp>
-        <p:nvSpPr>
-          <p:cNvPr id="3" name="内容占位符 2"/>
-          <p:cNvSpPr>
-            <a:spLocks noGrp="1"/>
-          </p:cNvSpPr>
-          <p:nvPr>
-            <p:ph idx="1"/>
-          </p:nvPr>
-        </p:nvSpPr>
-        <p:spPr>
-          <a:xfrm>
-            <a:off x="838200" y="1211580"/>
-            <a:ext cx="5829300" cy="3856355"/>
-          </a:xfrm>
-        </p:spPr>
-        <p:txBody>
-          <a:bodyPr>
-            <a:normAutofit/>
-          </a:bodyPr>
-          <a:p>
-            <a:r>
-              <a:rPr lang="en-US" altLang="zh-CN" sz="1600"/>
-              <a:t>CryptoJS</a:t>
-            </a:r>
-            <a:endParaRPr lang="en-US" altLang="zh-CN" sz="1600"/>
-          </a:p>
-          <a:p>
-            <a:pPr lvl="1"/>
-            <a:r>
-              <a:rPr lang="en-US" altLang="zh-CN" sz="1200"/>
-              <a:t>References</a:t>
-            </a:r>
-            <a:endParaRPr lang="en-US" altLang="zh-CN" sz="1200"/>
-          </a:p>
-          <a:p>
-            <a:pPr lvl="2"/>
-            <a:r>
-              <a:rPr lang="en-US" altLang="zh-CN" sz="1200"/>
-              <a:t>https://cryptojs.gitbook.io/docs/</a:t>
-            </a:r>
-            <a:endParaRPr lang="en-US" altLang="zh-CN" sz="1200"/>
-          </a:p>
-          <a:p>
-            <a:pPr lvl="2"/>
-            <a:r>
-              <a:rPr lang="en-US" altLang="zh-CN" sz="1200"/>
-              <a:t>https://newbedev.com/cryptojs-aes-encryption-and-java-aes-decryption/</a:t>
-            </a:r>
-            <a:endParaRPr lang="en-US" altLang="zh-CN" sz="1200"/>
-          </a:p>
-          <a:p>
-            <a:pPr lvl="2"/>
-            <a:r>
-              <a:rPr lang="en-US" altLang="zh-CN" sz="1200"/>
-              <a:t>https://github.com/tpenaranda/vue-cryptojs</a:t>
-            </a:r>
-            <a:endParaRPr lang="en-US" altLang="zh-CN" sz="1200"/>
-          </a:p>
-          <a:p>
-            <a:pPr lvl="1"/>
-            <a:r>
-              <a:rPr lang="en-US" altLang="zh-CN" sz="1200"/>
-              <a:t>Hashing</a:t>
-            </a:r>
-            <a:endParaRPr lang="en-US" altLang="zh-CN" sz="1200"/>
-          </a:p>
-          <a:p>
-            <a:pPr lvl="2"/>
-            <a:r>
-              <a:rPr lang="en-US" altLang="zh-CN" sz="1200"/>
-              <a:t>MD5, SHA-1, SHA-2, SHA-3, RIPEMD-160, HMAC, PBKDF2</a:t>
-            </a:r>
-            <a:endParaRPr lang="en-US" altLang="zh-CN" sz="1200"/>
-          </a:p>
-          <a:p>
-            <a:pPr lvl="3"/>
-            <a:r>
-              <a:rPr lang="en-US" altLang="zh-CN" sz="1200"/>
-              <a:t>var hash = CryptoJS.MD5("Message");</a:t>
-            </a:r>
-            <a:endParaRPr lang="en-US" altLang="zh-CN" sz="1200"/>
-          </a:p>
-          <a:p>
-            <a:pPr lvl="3"/>
-            <a:r>
-              <a:rPr lang="en-US" altLang="zh-CN" sz="1200"/>
-              <a:t>var hash = CryptoJS.SHA1("Message");</a:t>
-            </a:r>
-            <a:endParaRPr lang="en-US" altLang="zh-CN" sz="1200"/>
-          </a:p>
-          <a:p>
-            <a:pPr lvl="1"/>
-            <a:r>
-              <a:rPr lang="en-US" altLang="zh-CN" sz="1200"/>
-              <a:t>Ciphers</a:t>
-            </a:r>
-            <a:endParaRPr lang="en-US" altLang="zh-CN" sz="1200"/>
-          </a:p>
-          <a:p>
-            <a:pPr lvl="2"/>
-            <a:r>
-              <a:rPr lang="en-US" altLang="zh-CN" sz="1200"/>
-              <a:t>AES</a:t>
-            </a:r>
-            <a:endParaRPr lang="en-US" altLang="zh-CN" sz="1200"/>
-          </a:p>
-          <a:p>
-            <a:pPr lvl="3"/>
-            <a:r>
-              <a:rPr lang="en-US" altLang="zh-CN" sz="1000"/>
-              <a:t>var encrypted = CryptoJS.AES.encrypt("Message", "Secret Passphrase");</a:t>
-            </a:r>
-            <a:endParaRPr lang="en-US" altLang="zh-CN" sz="1000"/>
-          </a:p>
-          <a:p>
-            <a:pPr lvl="3"/>
-            <a:r>
-              <a:rPr lang="en-US" altLang="zh-CN" sz="1000"/>
-              <a:t>var decrypted = CryptoJS.AES.decrypt(encrypted, "Secret Passphrase");</a:t>
-            </a:r>
-            <a:endParaRPr lang="en-US" altLang="zh-CN" sz="1000"/>
-          </a:p>
-          <a:p>
-            <a:pPr lvl="2"/>
-            <a:r>
-              <a:rPr lang="en-US" altLang="zh-CN" sz="1200"/>
-              <a:t>DES</a:t>
-            </a:r>
-            <a:endParaRPr lang="en-US" altLang="zh-CN" sz="1200"/>
-          </a:p>
-        </p:txBody>
-      </p:sp>
-      <p:sp>
-        <p:nvSpPr>
-          <p:cNvPr id="4" name="文本框 3"/>
-          <p:cNvSpPr txBox="1"/>
-          <p:nvPr/>
-        </p:nvSpPr>
-        <p:spPr>
-          <a:xfrm>
-            <a:off x="6813550" y="1083945"/>
-            <a:ext cx="4540250" cy="5323205"/>
-          </a:xfrm>
-          <a:prstGeom prst="rect">
-            <a:avLst/>
-          </a:prstGeom>
-          <a:noFill/>
-          <a:ln>
-            <a:solidFill>
-              <a:srgbClr val="FFC000"/>
-            </a:solidFill>
-          </a:ln>
-        </p:spPr>
-        <p:txBody>
-          <a:bodyPr wrap="square" rtlCol="0">
-            <a:spAutoFit/>
-          </a:bodyPr>
-          <a:p>
-            <a:r>
-              <a:rPr lang="zh-CN" altLang="en-US" sz="1000"/>
-              <a:t>// crypto module</a:t>
-            </a:r>
-            <a:endParaRPr lang="zh-CN" altLang="en-US" sz="1000"/>
-          </a:p>
-          <a:p>
-            <a:r>
-              <a:rPr lang="zh-CN" altLang="en-US" sz="1000"/>
-              <a:t>const crypto = require("crypto");</a:t>
-            </a:r>
-            <a:endParaRPr lang="zh-CN" altLang="en-US" sz="1000"/>
-          </a:p>
-          <a:p>
-            <a:endParaRPr lang="zh-CN" altLang="en-US" sz="1000"/>
-          </a:p>
-          <a:p>
-            <a:r>
-              <a:rPr lang="zh-CN" altLang="en-US" sz="1000"/>
-              <a:t>const algorithm = "aes-256-cbc"; </a:t>
-            </a:r>
-            <a:endParaRPr lang="zh-CN" altLang="en-US" sz="1000"/>
-          </a:p>
-          <a:p>
-            <a:endParaRPr lang="zh-CN" altLang="en-US" sz="1000"/>
-          </a:p>
-          <a:p>
-            <a:r>
-              <a:rPr lang="zh-CN" altLang="en-US" sz="1000"/>
-              <a:t>// generate 16 bytes of random data</a:t>
-            </a:r>
-            <a:endParaRPr lang="zh-CN" altLang="en-US" sz="1000"/>
-          </a:p>
-          <a:p>
-            <a:r>
-              <a:rPr lang="zh-CN" altLang="en-US" sz="1000"/>
-              <a:t>const initVector = crypto.randomBytes(16);</a:t>
-            </a:r>
-            <a:endParaRPr lang="zh-CN" altLang="en-US" sz="1000"/>
-          </a:p>
-          <a:p>
-            <a:endParaRPr lang="zh-CN" altLang="en-US" sz="1000"/>
-          </a:p>
-          <a:p>
-            <a:r>
-              <a:rPr lang="zh-CN" altLang="en-US" sz="1000"/>
-              <a:t>// protected data</a:t>
-            </a:r>
-            <a:endParaRPr lang="zh-CN" altLang="en-US" sz="1000"/>
-          </a:p>
-          <a:p>
-            <a:r>
-              <a:rPr lang="zh-CN" altLang="en-US" sz="1000"/>
-              <a:t>const message = "This is a secret message";</a:t>
-            </a:r>
-            <a:endParaRPr lang="zh-CN" altLang="en-US" sz="1000"/>
-          </a:p>
-          <a:p>
-            <a:endParaRPr lang="zh-CN" altLang="en-US" sz="1000"/>
-          </a:p>
-          <a:p>
-            <a:r>
-              <a:rPr lang="zh-CN" altLang="en-US" sz="1000"/>
-              <a:t>// secret key generate 32 bytes of random data</a:t>
-            </a:r>
-            <a:endParaRPr lang="zh-CN" altLang="en-US" sz="1000"/>
-          </a:p>
-          <a:p>
-            <a:r>
-              <a:rPr lang="zh-CN" altLang="en-US" sz="1000"/>
-              <a:t>const Securitykey = crypto.randomBytes(32);</a:t>
-            </a:r>
-            <a:endParaRPr lang="zh-CN" altLang="en-US" sz="1000"/>
-          </a:p>
-          <a:p>
-            <a:endParaRPr lang="zh-CN" altLang="en-US" sz="1000"/>
-          </a:p>
-          <a:p>
-            <a:r>
-              <a:rPr lang="zh-CN" altLang="en-US" sz="1000"/>
-              <a:t>// the cipher function</a:t>
-            </a:r>
-            <a:endParaRPr lang="zh-CN" altLang="en-US" sz="1000"/>
-          </a:p>
-          <a:p>
-            <a:r>
-              <a:rPr lang="zh-CN" altLang="en-US" sz="1000"/>
-              <a:t>const cipher = crypto.</a:t>
-            </a:r>
-            <a:r>
-              <a:rPr lang="zh-CN" altLang="en-US" sz="1000" b="1"/>
-              <a:t>createCipheriv</a:t>
-            </a:r>
-            <a:r>
-              <a:rPr lang="zh-CN" altLang="en-US" sz="1000"/>
-              <a:t>(algorithm, Securitykey, initVector);</a:t>
-            </a:r>
-            <a:endParaRPr lang="zh-CN" altLang="en-US" sz="1000"/>
-          </a:p>
-          <a:p>
-            <a:endParaRPr lang="zh-CN" altLang="en-US" sz="1000"/>
-          </a:p>
-          <a:p>
-            <a:r>
-              <a:rPr lang="zh-CN" altLang="en-US" sz="1000"/>
-              <a:t>// encrypt the message</a:t>
-            </a:r>
-            <a:endParaRPr lang="zh-CN" altLang="en-US" sz="1000"/>
-          </a:p>
-          <a:p>
-            <a:r>
-              <a:rPr lang="zh-CN" altLang="en-US" sz="1000"/>
-              <a:t>// input encoding</a:t>
-            </a:r>
-            <a:endParaRPr lang="zh-CN" altLang="en-US" sz="1000"/>
-          </a:p>
-          <a:p>
-            <a:r>
-              <a:rPr lang="zh-CN" altLang="en-US" sz="1000"/>
-              <a:t>// output encoding</a:t>
-            </a:r>
-            <a:endParaRPr lang="zh-CN" altLang="en-US" sz="1000"/>
-          </a:p>
-          <a:p>
-            <a:r>
-              <a:rPr lang="zh-CN" altLang="en-US" sz="1000"/>
-              <a:t>let encryptedData = cipher.update(message, "utf-8", "hex");</a:t>
-            </a:r>
-            <a:endParaRPr lang="zh-CN" altLang="en-US" sz="1000"/>
-          </a:p>
-          <a:p>
-            <a:endParaRPr lang="zh-CN" altLang="en-US" sz="1000"/>
-          </a:p>
-          <a:p>
-            <a:r>
-              <a:rPr lang="zh-CN" altLang="en-US" sz="1000"/>
-              <a:t>encryptedData += cipher.final("hex");</a:t>
-            </a:r>
-            <a:endParaRPr lang="zh-CN" altLang="en-US" sz="1000"/>
-          </a:p>
-          <a:p>
-            <a:endParaRPr lang="zh-CN" altLang="en-US" sz="1000"/>
-          </a:p>
-          <a:p>
-            <a:r>
-              <a:rPr lang="zh-CN" altLang="en-US" sz="1000"/>
-              <a:t>console.log("Encrypted message: " + encryptedData);</a:t>
-            </a:r>
-            <a:endParaRPr lang="zh-CN" altLang="en-US" sz="1000"/>
-          </a:p>
-          <a:p>
-            <a:endParaRPr lang="zh-CN" altLang="en-US" sz="1000"/>
-          </a:p>
-          <a:p>
-            <a:r>
-              <a:rPr lang="zh-CN" altLang="en-US" sz="1000"/>
-              <a:t>// the decipher function</a:t>
-            </a:r>
-            <a:endParaRPr lang="zh-CN" altLang="en-US" sz="1000"/>
-          </a:p>
-          <a:p>
-            <a:r>
-              <a:rPr lang="zh-CN" altLang="en-US" sz="1000"/>
-              <a:t>const decipher = crypto.</a:t>
-            </a:r>
-            <a:r>
-              <a:rPr lang="zh-CN" altLang="en-US" sz="1000" b="1"/>
-              <a:t>createDecipheriv</a:t>
-            </a:r>
-            <a:r>
-              <a:rPr lang="zh-CN" altLang="en-US" sz="1000"/>
-              <a:t>(algorithm, Securitykey, initVector);</a:t>
-            </a:r>
-            <a:endParaRPr lang="zh-CN" altLang="en-US" sz="1000"/>
-          </a:p>
-          <a:p>
-            <a:endParaRPr lang="zh-CN" altLang="en-US" sz="1000"/>
-          </a:p>
-          <a:p>
-            <a:r>
-              <a:rPr lang="zh-CN" altLang="en-US" sz="1000"/>
-              <a:t>let decryptedData = decipher.update(encryptedData, "hex", "utf-8");</a:t>
-            </a:r>
-            <a:endParaRPr lang="zh-CN" altLang="en-US" sz="1000"/>
-          </a:p>
-          <a:p>
-            <a:endParaRPr lang="zh-CN" altLang="en-US" sz="1000"/>
-          </a:p>
-          <a:p>
-            <a:r>
-              <a:rPr lang="zh-CN" altLang="en-US" sz="1000"/>
-              <a:t>decryptedData += decipher.final("utf8");</a:t>
-            </a:r>
-            <a:endParaRPr lang="zh-CN" altLang="en-US" sz="1000"/>
-          </a:p>
-          <a:p>
-            <a:endParaRPr lang="zh-CN" altLang="en-US" sz="1000"/>
-          </a:p>
-          <a:p>
-            <a:r>
-              <a:rPr lang="zh-CN" altLang="en-US" sz="1000"/>
-              <a:t>console.log("Decrypted message: " + decryptedData);</a:t>
-            </a:r>
-            <a:endParaRPr lang="zh-CN" altLang="en-US" sz="1000"/>
-          </a:p>
-        </p:txBody>
-      </p:sp>
-      <p:sp>
-        <p:nvSpPr>
-          <p:cNvPr id="5" name="文本框 4"/>
-          <p:cNvSpPr txBox="1"/>
-          <p:nvPr/>
-        </p:nvSpPr>
-        <p:spPr>
-          <a:xfrm>
-            <a:off x="1438910" y="5067935"/>
-            <a:ext cx="4951095" cy="1168400"/>
-          </a:xfrm>
-          <a:prstGeom prst="rect">
-            <a:avLst/>
-          </a:prstGeom>
-          <a:noFill/>
-          <a:ln>
-            <a:solidFill>
-              <a:srgbClr val="C00000"/>
-            </a:solidFill>
-          </a:ln>
-        </p:spPr>
-        <p:txBody>
-          <a:bodyPr wrap="square" rtlCol="0">
-            <a:spAutoFit/>
-          </a:bodyPr>
-          <a:p>
-            <a:r>
-              <a:rPr lang="en-US" altLang="zh-CN" sz="1000"/>
-              <a:t>// </a:t>
-            </a:r>
-            <a:r>
-              <a:rPr lang="zh-CN" altLang="en-US" sz="1000"/>
-              <a:t>npm install vue-cryptojs</a:t>
-            </a:r>
-            <a:endParaRPr lang="zh-CN" altLang="en-US" sz="1000"/>
-          </a:p>
-          <a:p>
-            <a:r>
-              <a:rPr lang="zh-CN" altLang="en-US" sz="1000"/>
-              <a:t>import VueCryptojs from 'vue-cryptojs'</a:t>
-            </a:r>
-            <a:endParaRPr lang="zh-CN" altLang="en-US" sz="1000"/>
-          </a:p>
-          <a:p>
-            <a:r>
-              <a:rPr lang="zh-CN" altLang="en-US" sz="1000"/>
-              <a:t>Vue.use(VueCryptojs)</a:t>
-            </a:r>
-            <a:endParaRPr lang="zh-CN" altLang="en-US" sz="1000"/>
-          </a:p>
-          <a:p>
-            <a:r>
-              <a:rPr lang="zh-CN" altLang="en-US" sz="1000"/>
-              <a:t>const encryptedText = this.$CryptoJS.AES.encrypt("Hi There!", "Secret Passphrase").toString()</a:t>
-            </a:r>
-            <a:endParaRPr lang="zh-CN" altLang="en-US" sz="1000"/>
-          </a:p>
-          <a:p>
-            <a:r>
-              <a:rPr lang="zh-CN" altLang="en-US" sz="1000"/>
-              <a:t>const decryptedText = this.$CryptoJS.AES.decrypt(encryptedText, "Secret Passphrase").toString(this.CryptoJS.enc.Utf8)</a:t>
-            </a:r>
-            <a:endParaRPr lang="zh-CN" altLang="en-US" sz="1000"/>
-          </a:p>
-        </p:txBody>
-      </p:sp>
-    </p:spTree>
-    <p:custDataLst>
-      <p:tags r:id="rId1"/>
-    </p:custDataLst>
-  </p:cSld>
-  <p:clrMapOvr>
-    <a:masterClrMapping/>
-  </p:clrMapOvr>
-</p:sld>
-</file>
-
-<file path=ppt/slides/slide39.xml><?xml version="1.0" encoding="utf-8"?>
-<p:sld xmlns:a="http://schemas.openxmlformats.org/drawingml/2006/main" xmlns:r="http://schemas.openxmlformats.org/officeDocument/2006/relationships" xmlns:p="http://schemas.openxmlformats.org/presentationml/2006/main">
-  <p:cSld>
-    <p:spTree>
-      <p:nvGrpSpPr>
-        <p:cNvPr id="1" name=""/>
-        <p:cNvGrpSpPr/>
-        <p:nvPr/>
-      </p:nvGrpSpPr>
-      <p:grpSpPr/>
-      <p:sp>
-        <p:nvSpPr>
-          <p:cNvPr id="2" name="标题 1"/>
-          <p:cNvSpPr>
-            <a:spLocks noGrp="1"/>
-          </p:cNvSpPr>
-          <p:nvPr>
-            <p:ph type="title"/>
-          </p:nvPr>
-        </p:nvSpPr>
-        <p:spPr/>
-        <p:txBody>
-          <a:bodyPr/>
-          <a:p>
-            <a:r>
-              <a:rPr lang="en-US" altLang="zh-CN"/>
-              <a:t>Cytoscape</a:t>
-            </a:r>
-            <a:endParaRPr lang="en-US" altLang="zh-CN"/>
-          </a:p>
-        </p:txBody>
-      </p:sp>
-      <p:sp>
-        <p:nvSpPr>
-          <p:cNvPr id="3" name="内容占位符 2"/>
-          <p:cNvSpPr>
-            <a:spLocks noGrp="1"/>
-          </p:cNvSpPr>
-          <p:nvPr>
-            <p:ph idx="1"/>
-          </p:nvPr>
-        </p:nvSpPr>
-        <p:spPr>
-          <a:xfrm>
-            <a:off x="838200" y="1211580"/>
-            <a:ext cx="5483225" cy="4549140"/>
-          </a:xfrm>
-        </p:spPr>
-        <p:txBody>
-          <a:bodyPr/>
-          <a:p>
-            <a:r>
-              <a:rPr lang="en-US" altLang="zh-CN"/>
-              <a:t>References</a:t>
-            </a:r>
-            <a:endParaRPr lang="en-US" altLang="zh-CN"/>
-          </a:p>
-          <a:p>
-            <a:pPr lvl="1"/>
-            <a:r>
-              <a:rPr lang="en-US" altLang="zh-CN"/>
-              <a:t>https://js.cytoscape.org/</a:t>
-            </a:r>
-            <a:endParaRPr lang="en-US" altLang="zh-CN"/>
-          </a:p>
-          <a:p>
-            <a:r>
-              <a:rPr lang="en-US" altLang="zh-CN"/>
-              <a:t>Points</a:t>
-            </a:r>
-            <a:endParaRPr lang="en-US" altLang="zh-CN"/>
-          </a:p>
-          <a:p>
-            <a:pPr lvl="1"/>
-            <a:r>
-              <a:rPr lang="en-US" altLang="zh-CN"/>
-              <a:t> A compound parent node does not have independent dimensions (position and size), as those values are automatically inferred by the positions and dimensions of the descendant nodes.</a:t>
-            </a:r>
-            <a:endParaRPr lang="en-US" altLang="zh-CN"/>
-          </a:p>
-        </p:txBody>
-      </p:sp>
-    </p:spTree>
-    <p:custDataLst>
-      <p:tags r:id="rId1"/>
-    </p:custDataLst>
-  </p:cSld>
-  <p:clrMapOvr>
-    <a:masterClrMapping/>
-  </p:clrMapOvr>
-</p:sld>
-</file>
-
 <file path=ppt/slides/slide4.xml><?xml version="1.0" encoding="utf-8"?>
 <p:sld xmlns:a="http://schemas.openxmlformats.org/drawingml/2006/main" xmlns:r="http://schemas.openxmlformats.org/officeDocument/2006/relationships" xmlns:p="http://schemas.openxmlformats.org/presentationml/2006/main">
   <p:cSld>
@@ -10363,7 +10029,7 @@
           <a:p>
             <a:r>
               <a:rPr lang="en-US" altLang="zh-CN"/>
-              <a:t>Raphael</a:t>
+              <a:t>Encryption/Decryption</a:t>
             </a:r>
             <a:endParaRPr lang="en-US" altLang="zh-CN"/>
           </a:p>
@@ -10379,39 +10045,425 @@
             <p:ph idx="1"/>
           </p:nvPr>
         </p:nvSpPr>
-        <p:spPr/>
-        <p:txBody>
-          <a:bodyPr/>
-          <a:p>
-            <a:r>
-              <a:rPr lang="en-US" altLang="zh-CN"/>
-              <a:t>Intro</a:t>
-            </a:r>
-            <a:endParaRPr lang="en-US" altLang="zh-CN"/>
-          </a:p>
-          <a:p>
-            <a:pPr lvl="1"/>
-            <a:r>
-              <a:rPr lang="en-US" altLang="zh-CN"/>
-              <a:t>vector graphics drawing</a:t>
-            </a:r>
-            <a:endParaRPr lang="en-US" altLang="zh-CN"/>
-          </a:p>
-          <a:p>
-            <a:pPr lvl="0"/>
-            <a:r>
-              <a:rPr lang="en-US" altLang="zh-CN"/>
+        <p:spPr>
+          <a:xfrm>
+            <a:off x="838200" y="1211580"/>
+            <a:ext cx="5829300" cy="3856355"/>
+          </a:xfrm>
+        </p:spPr>
+        <p:txBody>
+          <a:bodyPr>
+            <a:normAutofit/>
+          </a:bodyPr>
+          <a:p>
+            <a:r>
+              <a:rPr lang="en-US" altLang="zh-CN" sz="1600"/>
+              <a:t>CryptoJS</a:t>
+            </a:r>
+            <a:endParaRPr lang="en-US" altLang="zh-CN" sz="1600"/>
+          </a:p>
+          <a:p>
+            <a:pPr lvl="1"/>
+            <a:r>
+              <a:rPr lang="en-US" altLang="zh-CN" sz="1200"/>
               <a:t>References</a:t>
             </a:r>
-            <a:endParaRPr lang="en-US" altLang="zh-CN"/>
-          </a:p>
-          <a:p>
-            <a:pPr lvl="1"/>
-            <a:r>
-              <a:rPr lang="en-US" altLang="zh-CN"/>
-              <a:t>http://raphaeljs.com/</a:t>
-            </a:r>
-            <a:endParaRPr lang="en-US" altLang="zh-CN"/>
+            <a:endParaRPr lang="en-US" altLang="zh-CN" sz="1200"/>
+          </a:p>
+          <a:p>
+            <a:pPr lvl="2"/>
+            <a:r>
+              <a:rPr lang="en-US" altLang="zh-CN" sz="1200"/>
+              <a:t>https://cryptojs.gitbook.io/docs/</a:t>
+            </a:r>
+            <a:endParaRPr lang="en-US" altLang="zh-CN" sz="1200"/>
+          </a:p>
+          <a:p>
+            <a:pPr lvl="2"/>
+            <a:r>
+              <a:rPr lang="en-US" altLang="zh-CN" sz="1200"/>
+              <a:t>https://newbedev.com/cryptojs-aes-encryption-and-java-aes-decryption/</a:t>
+            </a:r>
+            <a:endParaRPr lang="en-US" altLang="zh-CN" sz="1200"/>
+          </a:p>
+          <a:p>
+            <a:pPr lvl="2"/>
+            <a:r>
+              <a:rPr lang="en-US" altLang="zh-CN" sz="1200"/>
+              <a:t>https://github.com/tpenaranda/vue-cryptojs</a:t>
+            </a:r>
+            <a:endParaRPr lang="en-US" altLang="zh-CN" sz="1200"/>
+          </a:p>
+          <a:p>
+            <a:pPr lvl="1"/>
+            <a:r>
+              <a:rPr lang="en-US" altLang="zh-CN" sz="1200"/>
+              <a:t>Hashing</a:t>
+            </a:r>
+            <a:endParaRPr lang="en-US" altLang="zh-CN" sz="1200"/>
+          </a:p>
+          <a:p>
+            <a:pPr lvl="2"/>
+            <a:r>
+              <a:rPr lang="en-US" altLang="zh-CN" sz="1200"/>
+              <a:t>MD5, SHA-1, SHA-2, SHA-3, RIPEMD-160, HMAC, PBKDF2</a:t>
+            </a:r>
+            <a:endParaRPr lang="en-US" altLang="zh-CN" sz="1200"/>
+          </a:p>
+          <a:p>
+            <a:pPr lvl="3"/>
+            <a:r>
+              <a:rPr lang="en-US" altLang="zh-CN" sz="1200"/>
+              <a:t>var hash = CryptoJS.MD5("Message");</a:t>
+            </a:r>
+            <a:endParaRPr lang="en-US" altLang="zh-CN" sz="1200"/>
+          </a:p>
+          <a:p>
+            <a:pPr lvl="3"/>
+            <a:r>
+              <a:rPr lang="en-US" altLang="zh-CN" sz="1200"/>
+              <a:t>var hash = CryptoJS.SHA1("Message");</a:t>
+            </a:r>
+            <a:endParaRPr lang="en-US" altLang="zh-CN" sz="1200"/>
+          </a:p>
+          <a:p>
+            <a:pPr lvl="1"/>
+            <a:r>
+              <a:rPr lang="en-US" altLang="zh-CN" sz="1200"/>
+              <a:t>Ciphers</a:t>
+            </a:r>
+            <a:endParaRPr lang="en-US" altLang="zh-CN" sz="1200"/>
+          </a:p>
+          <a:p>
+            <a:pPr lvl="2"/>
+            <a:r>
+              <a:rPr lang="en-US" altLang="zh-CN" sz="1200"/>
+              <a:t>AES</a:t>
+            </a:r>
+            <a:endParaRPr lang="en-US" altLang="zh-CN" sz="1200"/>
+          </a:p>
+          <a:p>
+            <a:pPr lvl="3"/>
+            <a:r>
+              <a:rPr lang="en-US" altLang="zh-CN" sz="1000"/>
+              <a:t>var encrypted = CryptoJS.AES.encrypt("Message", "Secret Passphrase");</a:t>
+            </a:r>
+            <a:endParaRPr lang="en-US" altLang="zh-CN" sz="1000"/>
+          </a:p>
+          <a:p>
+            <a:pPr lvl="3"/>
+            <a:r>
+              <a:rPr lang="en-US" altLang="zh-CN" sz="1000"/>
+              <a:t>var decrypted = CryptoJS.AES.decrypt(encrypted, "Secret Passphrase");</a:t>
+            </a:r>
+            <a:endParaRPr lang="en-US" altLang="zh-CN" sz="1000"/>
+          </a:p>
+          <a:p>
+            <a:pPr lvl="2"/>
+            <a:r>
+              <a:rPr lang="en-US" altLang="zh-CN" sz="1200"/>
+              <a:t>DES</a:t>
+            </a:r>
+            <a:endParaRPr lang="en-US" altLang="zh-CN" sz="1200"/>
+          </a:p>
+        </p:txBody>
+      </p:sp>
+      <p:sp>
+        <p:nvSpPr>
+          <p:cNvPr id="4" name="文本框 3"/>
+          <p:cNvSpPr txBox="1"/>
+          <p:nvPr/>
+        </p:nvSpPr>
+        <p:spPr>
+          <a:xfrm>
+            <a:off x="6813550" y="1083945"/>
+            <a:ext cx="4540250" cy="5323205"/>
+          </a:xfrm>
+          <a:prstGeom prst="rect">
+            <a:avLst/>
+          </a:prstGeom>
+          <a:noFill/>
+          <a:ln>
+            <a:solidFill>
+              <a:srgbClr val="FFC000"/>
+            </a:solidFill>
+          </a:ln>
+        </p:spPr>
+        <p:txBody>
+          <a:bodyPr wrap="square" rtlCol="0">
+            <a:spAutoFit/>
+          </a:bodyPr>
+          <a:p>
+            <a:r>
+              <a:rPr lang="zh-CN" altLang="en-US" sz="1000"/>
+              <a:t>// crypto module</a:t>
+            </a:r>
+            <a:endParaRPr lang="zh-CN" altLang="en-US" sz="1000"/>
+          </a:p>
+          <a:p>
+            <a:r>
+              <a:rPr lang="zh-CN" altLang="en-US" sz="1000"/>
+              <a:t>const crypto = require("crypto");</a:t>
+            </a:r>
+            <a:endParaRPr lang="zh-CN" altLang="en-US" sz="1000"/>
+          </a:p>
+          <a:p>
+            <a:endParaRPr lang="zh-CN" altLang="en-US" sz="1000"/>
+          </a:p>
+          <a:p>
+            <a:r>
+              <a:rPr lang="zh-CN" altLang="en-US" sz="1000"/>
+              <a:t>const algorithm = "aes-256-cbc"; </a:t>
+            </a:r>
+            <a:endParaRPr lang="zh-CN" altLang="en-US" sz="1000"/>
+          </a:p>
+          <a:p>
+            <a:endParaRPr lang="zh-CN" altLang="en-US" sz="1000"/>
+          </a:p>
+          <a:p>
+            <a:r>
+              <a:rPr lang="zh-CN" altLang="en-US" sz="1000"/>
+              <a:t>// generate 16 bytes of random data</a:t>
+            </a:r>
+            <a:endParaRPr lang="zh-CN" altLang="en-US" sz="1000"/>
+          </a:p>
+          <a:p>
+            <a:r>
+              <a:rPr lang="zh-CN" altLang="en-US" sz="1000"/>
+              <a:t>const initVector = crypto.randomBytes(16);</a:t>
+            </a:r>
+            <a:endParaRPr lang="zh-CN" altLang="en-US" sz="1000"/>
+          </a:p>
+          <a:p>
+            <a:endParaRPr lang="zh-CN" altLang="en-US" sz="1000"/>
+          </a:p>
+          <a:p>
+            <a:r>
+              <a:rPr lang="zh-CN" altLang="en-US" sz="1000"/>
+              <a:t>// protected data</a:t>
+            </a:r>
+            <a:endParaRPr lang="zh-CN" altLang="en-US" sz="1000"/>
+          </a:p>
+          <a:p>
+            <a:r>
+              <a:rPr lang="zh-CN" altLang="en-US" sz="1000"/>
+              <a:t>const message = "This is a secret message";</a:t>
+            </a:r>
+            <a:endParaRPr lang="zh-CN" altLang="en-US" sz="1000"/>
+          </a:p>
+          <a:p>
+            <a:endParaRPr lang="zh-CN" altLang="en-US" sz="1000"/>
+          </a:p>
+          <a:p>
+            <a:r>
+              <a:rPr lang="zh-CN" altLang="en-US" sz="1000"/>
+              <a:t>// secret key generate 32 bytes of random data</a:t>
+            </a:r>
+            <a:endParaRPr lang="zh-CN" altLang="en-US" sz="1000"/>
+          </a:p>
+          <a:p>
+            <a:r>
+              <a:rPr lang="zh-CN" altLang="en-US" sz="1000"/>
+              <a:t>const Securitykey = crypto.randomBytes(32);</a:t>
+            </a:r>
+            <a:endParaRPr lang="zh-CN" altLang="en-US" sz="1000"/>
+          </a:p>
+          <a:p>
+            <a:endParaRPr lang="zh-CN" altLang="en-US" sz="1000"/>
+          </a:p>
+          <a:p>
+            <a:r>
+              <a:rPr lang="zh-CN" altLang="en-US" sz="1000"/>
+              <a:t>// the cipher function</a:t>
+            </a:r>
+            <a:endParaRPr lang="zh-CN" altLang="en-US" sz="1000"/>
+          </a:p>
+          <a:p>
+            <a:r>
+              <a:rPr lang="zh-CN" altLang="en-US" sz="1000"/>
+              <a:t>const cipher = crypto.</a:t>
+            </a:r>
+            <a:r>
+              <a:rPr lang="zh-CN" altLang="en-US" sz="1000" b="1"/>
+              <a:t>createCipheriv</a:t>
+            </a:r>
+            <a:r>
+              <a:rPr lang="zh-CN" altLang="en-US" sz="1000"/>
+              <a:t>(algorithm, Securitykey, initVector);</a:t>
+            </a:r>
+            <a:endParaRPr lang="zh-CN" altLang="en-US" sz="1000"/>
+          </a:p>
+          <a:p>
+            <a:endParaRPr lang="zh-CN" altLang="en-US" sz="1000"/>
+          </a:p>
+          <a:p>
+            <a:r>
+              <a:rPr lang="zh-CN" altLang="en-US" sz="1000"/>
+              <a:t>// encrypt the message</a:t>
+            </a:r>
+            <a:endParaRPr lang="zh-CN" altLang="en-US" sz="1000"/>
+          </a:p>
+          <a:p>
+            <a:r>
+              <a:rPr lang="zh-CN" altLang="en-US" sz="1000"/>
+              <a:t>// input encoding</a:t>
+            </a:r>
+            <a:endParaRPr lang="zh-CN" altLang="en-US" sz="1000"/>
+          </a:p>
+          <a:p>
+            <a:r>
+              <a:rPr lang="zh-CN" altLang="en-US" sz="1000"/>
+              <a:t>// output encoding</a:t>
+            </a:r>
+            <a:endParaRPr lang="zh-CN" altLang="en-US" sz="1000"/>
+          </a:p>
+          <a:p>
+            <a:r>
+              <a:rPr lang="zh-CN" altLang="en-US" sz="1000"/>
+              <a:t>let encryptedData = cipher.update(message, "utf-8", "hex");</a:t>
+            </a:r>
+            <a:endParaRPr lang="zh-CN" altLang="en-US" sz="1000"/>
+          </a:p>
+          <a:p>
+            <a:endParaRPr lang="zh-CN" altLang="en-US" sz="1000"/>
+          </a:p>
+          <a:p>
+            <a:r>
+              <a:rPr lang="zh-CN" altLang="en-US" sz="1000"/>
+              <a:t>encryptedData += cipher.final("hex");</a:t>
+            </a:r>
+            <a:endParaRPr lang="zh-CN" altLang="en-US" sz="1000"/>
+          </a:p>
+          <a:p>
+            <a:endParaRPr lang="zh-CN" altLang="en-US" sz="1000"/>
+          </a:p>
+          <a:p>
+            <a:r>
+              <a:rPr lang="zh-CN" altLang="en-US" sz="1000"/>
+              <a:t>console.log("Encrypted message: " + encryptedData);</a:t>
+            </a:r>
+            <a:endParaRPr lang="zh-CN" altLang="en-US" sz="1000"/>
+          </a:p>
+          <a:p>
+            <a:endParaRPr lang="zh-CN" altLang="en-US" sz="1000"/>
+          </a:p>
+          <a:p>
+            <a:r>
+              <a:rPr lang="zh-CN" altLang="en-US" sz="1000"/>
+              <a:t>// the decipher function</a:t>
+            </a:r>
+            <a:endParaRPr lang="zh-CN" altLang="en-US" sz="1000"/>
+          </a:p>
+          <a:p>
+            <a:r>
+              <a:rPr lang="zh-CN" altLang="en-US" sz="1000"/>
+              <a:t>const decipher = crypto.</a:t>
+            </a:r>
+            <a:r>
+              <a:rPr lang="zh-CN" altLang="en-US" sz="1000" b="1"/>
+              <a:t>createDecipheriv</a:t>
+            </a:r>
+            <a:r>
+              <a:rPr lang="zh-CN" altLang="en-US" sz="1000"/>
+              <a:t>(algorithm, Securitykey, initVector);</a:t>
+            </a:r>
+            <a:endParaRPr lang="zh-CN" altLang="en-US" sz="1000"/>
+          </a:p>
+          <a:p>
+            <a:endParaRPr lang="zh-CN" altLang="en-US" sz="1000"/>
+          </a:p>
+          <a:p>
+            <a:r>
+              <a:rPr lang="zh-CN" altLang="en-US" sz="1000"/>
+              <a:t>let decryptedData = decipher.update(encryptedData, "hex", "utf-8");</a:t>
+            </a:r>
+            <a:endParaRPr lang="zh-CN" altLang="en-US" sz="1000"/>
+          </a:p>
+          <a:p>
+            <a:endParaRPr lang="zh-CN" altLang="en-US" sz="1000"/>
+          </a:p>
+          <a:p>
+            <a:r>
+              <a:rPr lang="zh-CN" altLang="en-US" sz="1000"/>
+              <a:t>decryptedData += decipher.final("utf8");</a:t>
+            </a:r>
+            <a:endParaRPr lang="zh-CN" altLang="en-US" sz="1000"/>
+          </a:p>
+          <a:p>
+            <a:endParaRPr lang="zh-CN" altLang="en-US" sz="1000"/>
+          </a:p>
+          <a:p>
+            <a:r>
+              <a:rPr lang="zh-CN" altLang="en-US" sz="1000"/>
+              <a:t>console.log("Decrypted message: " + decryptedData);</a:t>
+            </a:r>
+            <a:endParaRPr lang="zh-CN" altLang="en-US" sz="1000"/>
+          </a:p>
+        </p:txBody>
+      </p:sp>
+      <p:sp>
+        <p:nvSpPr>
+          <p:cNvPr id="5" name="文本框 4"/>
+          <p:cNvSpPr txBox="1"/>
+          <p:nvPr/>
+        </p:nvSpPr>
+        <p:spPr>
+          <a:xfrm>
+            <a:off x="1438910" y="5067935"/>
+            <a:ext cx="4951095" cy="1168400"/>
+          </a:xfrm>
+          <a:prstGeom prst="rect">
+            <a:avLst/>
+          </a:prstGeom>
+          <a:noFill/>
+          <a:ln>
+            <a:solidFill>
+              <a:srgbClr val="C00000"/>
+            </a:solidFill>
+          </a:ln>
+        </p:spPr>
+        <p:txBody>
+          <a:bodyPr wrap="square" rtlCol="0">
+            <a:spAutoFit/>
+          </a:bodyPr>
+          <a:p>
+            <a:r>
+              <a:rPr lang="en-US" altLang="zh-CN" sz="1000"/>
+              <a:t>// </a:t>
+            </a:r>
+            <a:r>
+              <a:rPr lang="zh-CN" altLang="en-US" sz="1000"/>
+              <a:t>npm install vue-cryptojs</a:t>
+            </a:r>
+            <a:endParaRPr lang="zh-CN" altLang="en-US" sz="1000"/>
+          </a:p>
+          <a:p>
+            <a:r>
+              <a:rPr lang="zh-CN" altLang="en-US" sz="1000"/>
+              <a:t>import VueCryptojs from 'vue-cryptojs'</a:t>
+            </a:r>
+            <a:endParaRPr lang="zh-CN" altLang="en-US" sz="1000"/>
+          </a:p>
+          <a:p>
+            <a:r>
+              <a:rPr lang="zh-CN" altLang="en-US" sz="1000"/>
+              <a:t>Vue.use(VueCryptojs)</a:t>
+            </a:r>
+            <a:endParaRPr lang="zh-CN" altLang="en-US" sz="1000"/>
+          </a:p>
+          <a:p>
+            <a:r>
+              <a:rPr lang="zh-CN" altLang="en-US" sz="1000"/>
+              <a:t>const encryptedText = this.$CryptoJS.AES.encrypt("Hi There!", "Secret Passphrase").toString()</a:t>
+            </a:r>
+            <a:endParaRPr lang="zh-CN" altLang="en-US" sz="1000"/>
+          </a:p>
+          <a:p>
+            <a:r>
+              <a:rPr lang="zh-CN" altLang="en-US" sz="1000"/>
+              <a:t>const decryptedText = this.$CryptoJS.AES.decrypt(encryptedText, "Secret Passphrase").toString(this.CryptoJS.enc.Utf8)</a:t>
+            </a:r>
+            <a:endParaRPr lang="zh-CN" altLang="en-US" sz="1000"/>
           </a:p>
         </p:txBody>
       </p:sp>
@@ -10452,7 +10504,7 @@
           <a:p>
             <a:r>
               <a:rPr lang="en-US" altLang="zh-CN"/>
-              <a:t>merge-images</a:t>
+              <a:t>Cytoscape</a:t>
             </a:r>
             <a:endParaRPr lang="en-US" altLang="zh-CN"/>
           </a:p>
@@ -10468,7 +10520,12 @@
             <p:ph idx="1"/>
           </p:nvPr>
         </p:nvSpPr>
-        <p:spPr/>
+        <p:spPr>
+          <a:xfrm>
+            <a:off x="838200" y="1211580"/>
+            <a:ext cx="5483225" cy="4549140"/>
+          </a:xfrm>
+        </p:spPr>
         <p:txBody>
           <a:bodyPr/>
           <a:p>
@@ -10482,7 +10539,22 @@
             <a:pPr lvl="1"/>
             <a:r>
               <a:rPr lang="en-US" altLang="zh-CN"/>
-              <a:t>https://www.npmjs.com/package/merge-images</a:t>
+              <a:t>https://js.cytoscape.org/</a:t>
+            </a:r>
+            <a:endParaRPr lang="en-US" altLang="zh-CN"/>
+          </a:p>
+          <a:p>
+            <a:r>
+              <a:rPr lang="en-US" altLang="zh-CN"/>
+              <a:t>Points</a:t>
+            </a:r>
+            <a:endParaRPr lang="en-US" altLang="zh-CN"/>
+          </a:p>
+          <a:p>
+            <a:pPr lvl="1"/>
+            <a:r>
+              <a:rPr lang="en-US" altLang="zh-CN"/>
+              <a:t> A compound parent node does not have independent dimensions (position and size), as those values are automatically inferred by the positions and dimensions of the descendant nodes.</a:t>
             </a:r>
             <a:endParaRPr lang="en-US" altLang="zh-CN"/>
           </a:p>
@@ -10525,6 +10597,168 @@
           <a:p>
             <a:r>
               <a:rPr lang="en-US" altLang="zh-CN"/>
+              <a:t>Raphael</a:t>
+            </a:r>
+            <a:endParaRPr lang="en-US" altLang="zh-CN"/>
+          </a:p>
+        </p:txBody>
+      </p:sp>
+      <p:sp>
+        <p:nvSpPr>
+          <p:cNvPr id="3" name="内容占位符 2"/>
+          <p:cNvSpPr>
+            <a:spLocks noGrp="1"/>
+          </p:cNvSpPr>
+          <p:nvPr>
+            <p:ph idx="1"/>
+          </p:nvPr>
+        </p:nvSpPr>
+        <p:spPr/>
+        <p:txBody>
+          <a:bodyPr/>
+          <a:p>
+            <a:r>
+              <a:rPr lang="en-US" altLang="zh-CN"/>
+              <a:t>Intro</a:t>
+            </a:r>
+            <a:endParaRPr lang="en-US" altLang="zh-CN"/>
+          </a:p>
+          <a:p>
+            <a:pPr lvl="1"/>
+            <a:r>
+              <a:rPr lang="en-US" altLang="zh-CN"/>
+              <a:t>vector graphics drawing</a:t>
+            </a:r>
+            <a:endParaRPr lang="en-US" altLang="zh-CN"/>
+          </a:p>
+          <a:p>
+            <a:pPr lvl="0"/>
+            <a:r>
+              <a:rPr lang="en-US" altLang="zh-CN"/>
+              <a:t>References</a:t>
+            </a:r>
+            <a:endParaRPr lang="en-US" altLang="zh-CN"/>
+          </a:p>
+          <a:p>
+            <a:pPr lvl="1"/>
+            <a:r>
+              <a:rPr lang="en-US" altLang="zh-CN"/>
+              <a:t>http://raphaeljs.com/</a:t>
+            </a:r>
+            <a:endParaRPr lang="en-US" altLang="zh-CN"/>
+          </a:p>
+        </p:txBody>
+      </p:sp>
+    </p:spTree>
+    <p:custDataLst>
+      <p:tags r:id="rId1"/>
+    </p:custDataLst>
+  </p:cSld>
+  <p:clrMapOvr>
+    <a:masterClrMapping/>
+  </p:clrMapOvr>
+</p:sld>
+</file>
+
+<file path=ppt/slides/slide43.xml><?xml version="1.0" encoding="utf-8"?>
+<p:sld xmlns:a="http://schemas.openxmlformats.org/drawingml/2006/main" xmlns:r="http://schemas.openxmlformats.org/officeDocument/2006/relationships" xmlns:p="http://schemas.openxmlformats.org/presentationml/2006/main">
+  <p:cSld>
+    <p:spTree>
+      <p:nvGrpSpPr>
+        <p:cNvPr id="1" name=""/>
+        <p:cNvGrpSpPr/>
+        <p:nvPr/>
+      </p:nvGrpSpPr>
+      <p:grpSpPr/>
+      <p:sp>
+        <p:nvSpPr>
+          <p:cNvPr id="2" name="标题 1"/>
+          <p:cNvSpPr>
+            <a:spLocks noGrp="1"/>
+          </p:cNvSpPr>
+          <p:nvPr>
+            <p:ph type="title"/>
+          </p:nvPr>
+        </p:nvSpPr>
+        <p:spPr/>
+        <p:txBody>
+          <a:bodyPr/>
+          <a:p>
+            <a:r>
+              <a:rPr lang="en-US" altLang="zh-CN"/>
+              <a:t>merge-images</a:t>
+            </a:r>
+            <a:endParaRPr lang="en-US" altLang="zh-CN"/>
+          </a:p>
+        </p:txBody>
+      </p:sp>
+      <p:sp>
+        <p:nvSpPr>
+          <p:cNvPr id="3" name="内容占位符 2"/>
+          <p:cNvSpPr>
+            <a:spLocks noGrp="1"/>
+          </p:cNvSpPr>
+          <p:nvPr>
+            <p:ph idx="1"/>
+          </p:nvPr>
+        </p:nvSpPr>
+        <p:spPr/>
+        <p:txBody>
+          <a:bodyPr/>
+          <a:p>
+            <a:r>
+              <a:rPr lang="en-US" altLang="zh-CN"/>
+              <a:t>References</a:t>
+            </a:r>
+            <a:endParaRPr lang="en-US" altLang="zh-CN"/>
+          </a:p>
+          <a:p>
+            <a:pPr lvl="1"/>
+            <a:r>
+              <a:rPr lang="en-US" altLang="zh-CN"/>
+              <a:t>https://www.npmjs.com/package/merge-images</a:t>
+            </a:r>
+            <a:endParaRPr lang="en-US" altLang="zh-CN"/>
+          </a:p>
+        </p:txBody>
+      </p:sp>
+    </p:spTree>
+    <p:custDataLst>
+      <p:tags r:id="rId1"/>
+    </p:custDataLst>
+  </p:cSld>
+  <p:clrMapOvr>
+    <a:masterClrMapping/>
+  </p:clrMapOvr>
+</p:sld>
+</file>
+
+<file path=ppt/slides/slide44.xml><?xml version="1.0" encoding="utf-8"?>
+<p:sld xmlns:a="http://schemas.openxmlformats.org/drawingml/2006/main" xmlns:r="http://schemas.openxmlformats.org/officeDocument/2006/relationships" xmlns:p="http://schemas.openxmlformats.org/presentationml/2006/main">
+  <p:cSld>
+    <p:spTree>
+      <p:nvGrpSpPr>
+        <p:cNvPr id="1" name=""/>
+        <p:cNvGrpSpPr/>
+        <p:nvPr/>
+      </p:nvGrpSpPr>
+      <p:grpSpPr/>
+      <p:sp>
+        <p:nvSpPr>
+          <p:cNvPr id="2" name="标题 1"/>
+          <p:cNvSpPr>
+            <a:spLocks noGrp="1"/>
+          </p:cNvSpPr>
+          <p:nvPr>
+            <p:ph type="title"/>
+          </p:nvPr>
+        </p:nvSpPr>
+        <p:spPr/>
+        <p:txBody>
+          <a:bodyPr/>
+          <a:p>
+            <a:r>
+              <a:rPr lang="en-US" altLang="zh-CN"/>
               <a:t>Image Map</a:t>
             </a:r>
             <a:endParaRPr lang="en-US" altLang="zh-CN"/>
@@ -10709,7 +10943,7 @@
 </p:sld>
 </file>
 
-<file path=ppt/slides/slide43.xml><?xml version="1.0" encoding="utf-8"?>
+<file path=ppt/slides/slide45.xml><?xml version="1.0" encoding="utf-8"?>
 <p:sld xmlns:a="http://schemas.openxmlformats.org/drawingml/2006/main" xmlns:r="http://schemas.openxmlformats.org/officeDocument/2006/relationships" xmlns:p="http://schemas.openxmlformats.org/presentationml/2006/main">
   <p:cSld>
     <p:spTree>
@@ -11121,7 +11355,7 @@
 </p:sld>
 </file>
 
-<file path=ppt/slides/slide44.xml><?xml version="1.0" encoding="utf-8"?>
+<file path=ppt/slides/slide46.xml><?xml version="1.0" encoding="utf-8"?>
 <p:sld xmlns:a="http://schemas.openxmlformats.org/drawingml/2006/main" xmlns:r="http://schemas.openxmlformats.org/officeDocument/2006/relationships" xmlns:p="http://schemas.openxmlformats.org/presentationml/2006/main">
   <p:cSld>
     <p:spTree>
@@ -11710,7 +11944,7 @@
 </p:sld>
 </file>
 
-<file path=ppt/slides/slide45.xml><?xml version="1.0" encoding="utf-8"?>
+<file path=ppt/slides/slide47.xml><?xml version="1.0" encoding="utf-8"?>
 <p:sld xmlns:a="http://schemas.openxmlformats.org/drawingml/2006/main" xmlns:r="http://schemas.openxmlformats.org/officeDocument/2006/relationships" xmlns:p="http://schemas.openxmlformats.org/presentationml/2006/main">
   <p:cSld>
     <p:spTree>
@@ -11771,7 +12005,7 @@
 </p:sld>
 </file>
 
-<file path=ppt/slides/slide46.xml><?xml version="1.0" encoding="utf-8"?>
+<file path=ppt/slides/slide48.xml><?xml version="1.0" encoding="utf-8"?>
 <p:sld xmlns:a="http://schemas.openxmlformats.org/drawingml/2006/main" xmlns:r="http://schemas.openxmlformats.org/officeDocument/2006/relationships" xmlns:p="http://schemas.openxmlformats.org/presentationml/2006/main">
   <p:cSld>
     <p:spTree>
@@ -11946,7 +12180,7 @@
 </p:sld>
 </file>
 
-<file path=ppt/slides/slide47.xml><?xml version="1.0" encoding="utf-8"?>
+<file path=ppt/slides/slide49.xml><?xml version="1.0" encoding="utf-8"?>
 <p:sld xmlns:a="http://schemas.openxmlformats.org/drawingml/2006/main" xmlns:r="http://schemas.openxmlformats.org/officeDocument/2006/relationships" xmlns:p="http://schemas.openxmlformats.org/presentationml/2006/main">
   <p:cSld>
     <p:spTree>
@@ -13111,374 +13345,6 @@
 </p:sld>
 </file>
 
-<file path=ppt/slides/slide48.xml><?xml version="1.0" encoding="utf-8"?>
-<p:sld xmlns:a="http://schemas.openxmlformats.org/drawingml/2006/main" xmlns:r="http://schemas.openxmlformats.org/officeDocument/2006/relationships" xmlns:p="http://schemas.openxmlformats.org/presentationml/2006/main">
-  <p:cSld>
-    <p:spTree>
-      <p:nvGrpSpPr>
-        <p:cNvPr id="1" name=""/>
-        <p:cNvGrpSpPr/>
-        <p:nvPr/>
-      </p:nvGrpSpPr>
-      <p:grpSpPr/>
-      <p:sp>
-        <p:nvSpPr>
-          <p:cNvPr id="2" name="标题 1"/>
-          <p:cNvSpPr>
-            <a:spLocks noGrp="1"/>
-          </p:cNvSpPr>
-          <p:nvPr>
-            <p:ph type="title"/>
-          </p:nvPr>
-        </p:nvSpPr>
-        <p:spPr/>
-        <p:txBody>
-          <a:bodyPr/>
-          <a:p>
-            <a:r>
-              <a:rPr lang="en-US" altLang="zh-CN"/>
-              <a:t>Three.js 2</a:t>
-            </a:r>
-            <a:endParaRPr lang="en-US" altLang="zh-CN"/>
-          </a:p>
-        </p:txBody>
-      </p:sp>
-      <p:sp>
-        <p:nvSpPr>
-          <p:cNvPr id="3" name="内容占位符 2"/>
-          <p:cNvSpPr>
-            <a:spLocks noGrp="1"/>
-          </p:cNvSpPr>
-          <p:nvPr>
-            <p:ph idx="1"/>
-          </p:nvPr>
-        </p:nvSpPr>
-        <p:spPr/>
-        <p:txBody>
-          <a:bodyPr/>
-          <a:p>
-            <a:r>
-              <a:rPr lang="en-US" altLang="zh-CN"/>
-              <a:t>VR support</a:t>
-            </a:r>
-            <a:endParaRPr lang="en-US" altLang="zh-CN"/>
-          </a:p>
-          <a:p>
-            <a:pPr lvl="1" algn="l">
-              <a:buClrTx/>
-              <a:buSzTx/>
-            </a:pPr>
-            <a:r>
-              <a:rPr lang="zh-CN" altLang="en-US">
-                <a:sym typeface="+mn-ea"/>
-              </a:rPr>
-              <a:t>https://threejs.org/docs/#manual/en/introduction/How-to-create-VR-content</a:t>
-            </a:r>
-            <a:endParaRPr lang="zh-CN" altLang="en-US"/>
-          </a:p>
-          <a:p>
-            <a:pPr lvl="1"/>
-            <a:r>
-              <a:rPr lang="zh-CN" altLang="en-US"/>
-              <a:t>https://immersiveweb.dev/#three.js</a:t>
-            </a:r>
-            <a:endParaRPr lang="zh-CN" altLang="en-US"/>
-          </a:p>
-          <a:p>
-            <a:pPr lvl="1"/>
-            <a:r>
-              <a:rPr lang="zh-CN" altLang="en-US"/>
-              <a:t>https://tutorialsforvr.com/enable-threejs-vr/</a:t>
-            </a:r>
-            <a:endParaRPr lang="zh-CN" altLang="en-US"/>
-          </a:p>
-          <a:p>
-            <a:pPr lvl="1"/>
-            <a:r>
-              <a:rPr lang="zh-CN" altLang="en-US"/>
-              <a:t>https://www.davrous.com/2017/07/07/from-zero-to-hero-creating-webvr-experiences-with-babylon-js-on-all-platforms/</a:t>
-            </a:r>
-            <a:endParaRPr lang="zh-CN" altLang="en-US"/>
-          </a:p>
-        </p:txBody>
-      </p:sp>
-    </p:spTree>
-    <p:custDataLst>
-      <p:tags r:id="rId1"/>
-    </p:custDataLst>
-  </p:cSld>
-  <p:clrMapOvr>
-    <a:masterClrMapping/>
-  </p:clrMapOvr>
-</p:sld>
-</file>
-
-<file path=ppt/slides/slide49.xml><?xml version="1.0" encoding="utf-8"?>
-<p:sld xmlns:a="http://schemas.openxmlformats.org/drawingml/2006/main" xmlns:r="http://schemas.openxmlformats.org/officeDocument/2006/relationships" xmlns:p="http://schemas.openxmlformats.org/presentationml/2006/main">
-  <p:cSld>
-    <p:spTree>
-      <p:nvGrpSpPr>
-        <p:cNvPr id="1" name=""/>
-        <p:cNvGrpSpPr/>
-        <p:nvPr/>
-      </p:nvGrpSpPr>
-      <p:grpSpPr/>
-      <p:sp>
-        <p:nvSpPr>
-          <p:cNvPr id="2" name="标题 1"/>
-          <p:cNvSpPr>
-            <a:spLocks noGrp="1"/>
-          </p:cNvSpPr>
-          <p:nvPr>
-            <p:ph type="title"/>
-          </p:nvPr>
-        </p:nvSpPr>
-        <p:spPr/>
-        <p:txBody>
-          <a:bodyPr/>
-          <a:p>
-            <a:r>
-              <a:rPr lang="en-US" altLang="zh-CN"/>
-              <a:t>A-Frame</a:t>
-            </a:r>
-            <a:endParaRPr lang="en-US" altLang="zh-CN"/>
-          </a:p>
-        </p:txBody>
-      </p:sp>
-      <p:sp>
-        <p:nvSpPr>
-          <p:cNvPr id="3" name="内容占位符 2"/>
-          <p:cNvSpPr>
-            <a:spLocks noGrp="1"/>
-          </p:cNvSpPr>
-          <p:nvPr>
-            <p:ph idx="1"/>
-          </p:nvPr>
-        </p:nvSpPr>
-        <p:spPr>
-          <a:xfrm>
-            <a:off x="838200" y="1211580"/>
-            <a:ext cx="5999480" cy="4549140"/>
-          </a:xfrm>
-        </p:spPr>
-        <p:txBody>
-          <a:bodyPr/>
-          <a:p>
-            <a:r>
-              <a:rPr lang="en-US" altLang="zh-CN"/>
-              <a:t>Concept</a:t>
-            </a:r>
-            <a:endParaRPr lang="en-US" altLang="zh-CN"/>
-          </a:p>
-          <a:p>
-            <a:pPr lvl="1"/>
-            <a:r>
-              <a:rPr lang="en-US" altLang="zh-CN"/>
-              <a:t>Declarative DOM-based Entity-Component-System</a:t>
-            </a:r>
-            <a:endParaRPr lang="en-US" altLang="zh-CN"/>
-          </a:p>
-          <a:p>
-            <a:pPr lvl="1"/>
-            <a:r>
-              <a:rPr lang="en-US" altLang="zh-CN"/>
-              <a:t>Component-based development</a:t>
-            </a:r>
-            <a:endParaRPr lang="en-US" altLang="zh-CN"/>
-          </a:p>
-        </p:txBody>
-      </p:sp>
-      <p:sp>
-        <p:nvSpPr>
-          <p:cNvPr id="4" name="文本框 3"/>
-          <p:cNvSpPr txBox="1"/>
-          <p:nvPr/>
-        </p:nvSpPr>
-        <p:spPr>
-          <a:xfrm>
-            <a:off x="6958330" y="1631950"/>
-            <a:ext cx="4859020" cy="3599815"/>
-          </a:xfrm>
-          <a:prstGeom prst="rect">
-            <a:avLst/>
-          </a:prstGeom>
-          <a:noFill/>
-          <a:ln>
-            <a:solidFill>
-              <a:srgbClr val="FFC000"/>
-            </a:solidFill>
-          </a:ln>
-        </p:spPr>
-        <p:txBody>
-          <a:bodyPr wrap="square" rtlCol="0">
-            <a:spAutoFit/>
-          </a:bodyPr>
-          <a:p>
-            <a:r>
-              <a:rPr lang="zh-CN" altLang="en-US" sz="1200"/>
-              <a:t>&lt;html&gt;</a:t>
-            </a:r>
-            <a:endParaRPr lang="zh-CN" altLang="en-US" sz="1200"/>
-          </a:p>
-          <a:p>
-            <a:r>
-              <a:rPr lang="zh-CN" altLang="en-US" sz="1200"/>
-              <a:t>  &lt;head&gt;</a:t>
-            </a:r>
-            <a:endParaRPr lang="zh-CN" altLang="en-US" sz="1200"/>
-          </a:p>
-          <a:p>
-            <a:r>
-              <a:rPr lang="zh-CN" altLang="en-US" sz="1200"/>
-              <a:t>    &lt;script src="https://aframe.io/releases/1.0.0/aframe.min.js"&gt;&lt;/script&gt;</a:t>
-            </a:r>
-            <a:endParaRPr lang="zh-CN" altLang="en-US" sz="1200"/>
-          </a:p>
-          <a:p>
-            <a:r>
-              <a:rPr lang="zh-CN" altLang="en-US" sz="1200"/>
-              <a:t>  &lt;/head&gt;</a:t>
-            </a:r>
-            <a:endParaRPr lang="zh-CN" altLang="en-US" sz="1200"/>
-          </a:p>
-          <a:p>
-            <a:r>
-              <a:rPr lang="zh-CN" altLang="en-US" sz="1200"/>
-              <a:t>  &lt;body&gt;</a:t>
-            </a:r>
-            <a:endParaRPr lang="zh-CN" altLang="en-US" sz="1200"/>
-          </a:p>
-          <a:p>
-            <a:r>
-              <a:rPr lang="zh-CN" altLang="en-US" sz="1200"/>
-              <a:t>    &lt;a-scene&gt;</a:t>
-            </a:r>
-            <a:endParaRPr lang="zh-CN" altLang="en-US" sz="1200"/>
-          </a:p>
-          <a:p>
-            <a:r>
-              <a:rPr lang="zh-CN" altLang="en-US" sz="1200"/>
-              <a:t>      &lt;a-box position="-1 0.5 -3" rotation="0 45 0" color="#4CC3D9"&gt;&lt;/a-box&gt;</a:t>
-            </a:r>
-            <a:endParaRPr lang="zh-CN" altLang="en-US" sz="1200"/>
-          </a:p>
-          <a:p>
-            <a:r>
-              <a:rPr lang="zh-CN" altLang="en-US" sz="1200"/>
-              <a:t>      &lt;a-sphere position="0 1.25 -5" radius="1.25" color="#EF2D5E"&gt;&lt;/a-sphere&gt;</a:t>
-            </a:r>
-            <a:endParaRPr lang="zh-CN" altLang="en-US" sz="1200"/>
-          </a:p>
-          <a:p>
-            <a:r>
-              <a:rPr lang="zh-CN" altLang="en-US" sz="1200"/>
-              <a:t>      &lt;a-cylinder position="1 0.75 -3" radius="0.5" height="1.5" color="#FFC65D"&gt;&lt;/a-cylinder&gt;</a:t>
-            </a:r>
-            <a:endParaRPr lang="zh-CN" altLang="en-US" sz="1200"/>
-          </a:p>
-          <a:p>
-            <a:r>
-              <a:rPr lang="zh-CN" altLang="en-US" sz="1200"/>
-              <a:t>      &lt;a-plane position="0 0 -4" rotation="-90 0 0" width="4" height="4" color="#7BC8A4"&gt;&lt;/a-plane&gt;</a:t>
-            </a:r>
-            <a:endParaRPr lang="zh-CN" altLang="en-US" sz="1200"/>
-          </a:p>
-          <a:p>
-            <a:r>
-              <a:rPr lang="zh-CN" altLang="en-US" sz="1200"/>
-              <a:t>      &lt;a-sky color="#ECECEC"&gt;&lt;/a-sky&gt;</a:t>
-            </a:r>
-            <a:endParaRPr lang="zh-CN" altLang="en-US" sz="1200"/>
-          </a:p>
-          <a:p>
-            <a:r>
-              <a:rPr lang="zh-CN" altLang="en-US" sz="1200"/>
-              <a:t>    &lt;/a-scene&gt;</a:t>
-            </a:r>
-            <a:endParaRPr lang="zh-CN" altLang="en-US" sz="1200"/>
-          </a:p>
-          <a:p>
-            <a:r>
-              <a:rPr lang="zh-CN" altLang="en-US" sz="1200"/>
-              <a:t>  &lt;/body&gt;</a:t>
-            </a:r>
-            <a:endParaRPr lang="zh-CN" altLang="en-US" sz="1200"/>
-          </a:p>
-          <a:p>
-            <a:r>
-              <a:rPr lang="zh-CN" altLang="en-US" sz="1200"/>
-              <a:t>&lt;/html&gt;</a:t>
-            </a:r>
-            <a:endParaRPr lang="zh-CN" altLang="en-US" sz="1200"/>
-          </a:p>
-        </p:txBody>
-      </p:sp>
-      <p:sp>
-        <p:nvSpPr>
-          <p:cNvPr id="5" name="文本框 4"/>
-          <p:cNvSpPr txBox="1"/>
-          <p:nvPr/>
-        </p:nvSpPr>
-        <p:spPr>
-          <a:xfrm>
-            <a:off x="6958330" y="5374005"/>
-            <a:ext cx="4859020" cy="953135"/>
-          </a:xfrm>
-          <a:prstGeom prst="rect">
-            <a:avLst/>
-          </a:prstGeom>
-          <a:noFill/>
-          <a:ln>
-            <a:solidFill>
-              <a:srgbClr val="FFC000"/>
-            </a:solidFill>
-          </a:ln>
-        </p:spPr>
-        <p:txBody>
-          <a:bodyPr wrap="square" rtlCol="0">
-            <a:spAutoFit/>
-          </a:bodyPr>
-          <a:p>
-            <a:r>
-              <a:rPr lang="zh-CN" altLang="en-US" sz="1400"/>
-              <a:t>&lt;a-entity geometry="primitive: sphere; radius: 1.5"</a:t>
-            </a:r>
-            <a:endParaRPr lang="zh-CN" altLang="en-US" sz="1400"/>
-          </a:p>
-          <a:p>
-            <a:r>
-              <a:rPr lang="zh-CN" altLang="en-US" sz="1400"/>
-              <a:t>          light="type: point; color: white; intensity: 2"</a:t>
-            </a:r>
-            <a:endParaRPr lang="zh-CN" altLang="en-US" sz="1400"/>
-          </a:p>
-          <a:p>
-            <a:r>
-              <a:rPr lang="zh-CN" altLang="en-US" sz="1400"/>
-              <a:t>          material="color: white; shader: flat; src: glow.jpg"</a:t>
-            </a:r>
-            <a:endParaRPr lang="zh-CN" altLang="en-US" sz="1400"/>
-          </a:p>
-          <a:p>
-            <a:r>
-              <a:rPr lang="zh-CN" altLang="en-US" sz="1400"/>
-              <a:t>          position="0 0 -5"&gt;&lt;/a-entity&gt;</a:t>
-            </a:r>
-            <a:endParaRPr lang="zh-CN" altLang="en-US" sz="1400"/>
-          </a:p>
-        </p:txBody>
-      </p:sp>
-    </p:spTree>
-    <p:custDataLst>
-      <p:tags r:id="rId1"/>
-    </p:custDataLst>
-  </p:cSld>
-  <p:clrMapOvr>
-    <a:masterClrMapping/>
-  </p:clrMapOvr>
-</p:sld>
-</file>
-
 <file path=ppt/slides/slide5.xml><?xml version="1.0" encoding="utf-8"?>
 <p:sld xmlns:a="http://schemas.openxmlformats.org/drawingml/2006/main" xmlns:r="http://schemas.openxmlformats.org/officeDocument/2006/relationships" xmlns:p="http://schemas.openxmlformats.org/presentationml/2006/main">
   <p:cSld>
@@ -13521,7 +13387,12 @@
             <p:ph idx="1"/>
           </p:nvPr>
         </p:nvSpPr>
-        <p:spPr/>
+        <p:spPr>
+          <a:xfrm>
+            <a:off x="838200" y="1211580"/>
+            <a:ext cx="5258435" cy="4549140"/>
+          </a:xfrm>
+        </p:spPr>
         <p:txBody>
           <a:bodyPr/>
           <a:p>
@@ -13583,6 +13454,296 @@
               <a:t>https://auth0.com/blog/four-types-of-leaks-in-your-javascript-code-and-how-to-get-rid-of-them/</a:t>
             </a:r>
             <a:endParaRPr lang="en-US" altLang="zh-CN"/>
+          </a:p>
+        </p:txBody>
+      </p:sp>
+      <p:sp>
+        <p:nvSpPr>
+          <p:cNvPr id="4" name="内容占位符 2"/>
+          <p:cNvSpPr>
+            <a:spLocks noGrp="1"/>
+          </p:cNvSpPr>
+          <p:nvPr/>
+        </p:nvSpPr>
+        <p:spPr>
+          <a:xfrm>
+            <a:off x="6430645" y="1154430"/>
+            <a:ext cx="5612765" cy="4549140"/>
+          </a:xfrm>
+          <a:prstGeom prst="rect">
+            <a:avLst/>
+          </a:prstGeom>
+        </p:spPr>
+        <p:txBody>
+          <a:bodyPr vert="horz" lIns="91440" tIns="45720" rIns="91440" bIns="45720" rtlCol="0">
+            <a:normAutofit/>
+          </a:bodyPr>
+          <a:lstStyle>
+            <a:lvl1pPr marL="342900" indent="-342900" algn="l" defTabSz="914400" rtl="0" eaLnBrk="1" latinLnBrk="0" hangingPunct="1">
+              <a:lnSpc>
+                <a:spcPct val="90000"/>
+              </a:lnSpc>
+              <a:spcBef>
+                <a:spcPts val="1000"/>
+              </a:spcBef>
+              <a:buFont typeface="黑体" panose="02010609060101010101" pitchFamily="49" charset="-122"/>
+              <a:buChar char="〉"/>
+              <a:defRPr sz="2400" kern="1200">
+                <a:solidFill>
+                  <a:schemeClr val="tx1"/>
+                </a:solidFill>
+                <a:latin typeface="+mn-lt"/>
+                <a:ea typeface="+mn-ea"/>
+                <a:cs typeface="+mn-cs"/>
+              </a:defRPr>
+            </a:lvl1pPr>
+            <a:lvl2pPr marL="800100" indent="-342900" algn="l" defTabSz="914400" rtl="0" eaLnBrk="1" latinLnBrk="0" hangingPunct="1">
+              <a:lnSpc>
+                <a:spcPct val="90000"/>
+              </a:lnSpc>
+              <a:spcBef>
+                <a:spcPts val="500"/>
+              </a:spcBef>
+              <a:buFont typeface="Arial" panose="020B0604020202020204" pitchFamily="34" charset="0"/>
+              <a:buChar char="•"/>
+              <a:defRPr sz="2000" kern="1200">
+                <a:solidFill>
+                  <a:schemeClr val="tx1"/>
+                </a:solidFill>
+                <a:latin typeface="+mn-lt"/>
+                <a:ea typeface="+mn-ea"/>
+                <a:cs typeface="+mn-cs"/>
+              </a:defRPr>
+            </a:lvl2pPr>
+            <a:lvl3pPr marL="1257300" indent="-342900" algn="l" defTabSz="914400" rtl="0" eaLnBrk="1" latinLnBrk="0" hangingPunct="1">
+              <a:lnSpc>
+                <a:spcPct val="90000"/>
+              </a:lnSpc>
+              <a:spcBef>
+                <a:spcPts val="500"/>
+              </a:spcBef>
+              <a:buFont typeface="Arial" panose="020B0604020202020204" pitchFamily="34" charset="0"/>
+              <a:buChar char="•"/>
+              <a:defRPr sz="1800" kern="1200">
+                <a:solidFill>
+                  <a:schemeClr val="tx1"/>
+                </a:solidFill>
+                <a:latin typeface="+mn-lt"/>
+                <a:ea typeface="+mn-ea"/>
+                <a:cs typeface="+mn-cs"/>
+              </a:defRPr>
+            </a:lvl3pPr>
+            <a:lvl4pPr marL="1657350" indent="-285750" algn="l" defTabSz="914400" rtl="0" eaLnBrk="1" latinLnBrk="0" hangingPunct="1">
+              <a:lnSpc>
+                <a:spcPct val="90000"/>
+              </a:lnSpc>
+              <a:spcBef>
+                <a:spcPts val="500"/>
+              </a:spcBef>
+              <a:buFont typeface="Arial" panose="020B0604020202020204" pitchFamily="34" charset="0"/>
+              <a:buChar char="•"/>
+              <a:defRPr sz="1800" kern="1200">
+                <a:solidFill>
+                  <a:schemeClr val="tx1"/>
+                </a:solidFill>
+                <a:latin typeface="+mn-lt"/>
+                <a:ea typeface="+mn-ea"/>
+                <a:cs typeface="+mn-cs"/>
+              </a:defRPr>
+            </a:lvl4pPr>
+            <a:lvl5pPr marL="2114550" indent="-285750" algn="l" defTabSz="914400" rtl="0" eaLnBrk="1" latinLnBrk="0" hangingPunct="1">
+              <a:lnSpc>
+                <a:spcPct val="90000"/>
+              </a:lnSpc>
+              <a:spcBef>
+                <a:spcPts val="500"/>
+              </a:spcBef>
+              <a:buFont typeface="Arial" panose="020B0604020202020204" pitchFamily="34" charset="0"/>
+              <a:buChar char="•"/>
+              <a:defRPr sz="1800" kern="1200">
+                <a:solidFill>
+                  <a:schemeClr val="tx1"/>
+                </a:solidFill>
+                <a:latin typeface="+mn-lt"/>
+                <a:ea typeface="+mn-ea"/>
+                <a:cs typeface="+mn-cs"/>
+              </a:defRPr>
+            </a:lvl5pPr>
+            <a:lvl6pPr marL="2514600" indent="-228600" algn="l" defTabSz="914400" rtl="0" eaLnBrk="1" latinLnBrk="0" hangingPunct="1">
+              <a:lnSpc>
+                <a:spcPct val="90000"/>
+              </a:lnSpc>
+              <a:spcBef>
+                <a:spcPts val="500"/>
+              </a:spcBef>
+              <a:buFont typeface="Arial" panose="020B0604020202020204" pitchFamily="34" charset="0"/>
+              <a:buChar char="•"/>
+              <a:defRPr sz="1800" kern="1200">
+                <a:solidFill>
+                  <a:schemeClr val="tx1"/>
+                </a:solidFill>
+                <a:latin typeface="+mn-lt"/>
+                <a:ea typeface="+mn-ea"/>
+                <a:cs typeface="+mn-cs"/>
+              </a:defRPr>
+            </a:lvl6pPr>
+            <a:lvl7pPr marL="2971800" indent="-228600" algn="l" defTabSz="914400" rtl="0" eaLnBrk="1" latinLnBrk="0" hangingPunct="1">
+              <a:lnSpc>
+                <a:spcPct val="90000"/>
+              </a:lnSpc>
+              <a:spcBef>
+                <a:spcPts val="500"/>
+              </a:spcBef>
+              <a:buFont typeface="Arial" panose="020B0604020202020204" pitchFamily="34" charset="0"/>
+              <a:buChar char="•"/>
+              <a:defRPr sz="1800" kern="1200">
+                <a:solidFill>
+                  <a:schemeClr val="tx1"/>
+                </a:solidFill>
+                <a:latin typeface="+mn-lt"/>
+                <a:ea typeface="+mn-ea"/>
+                <a:cs typeface="+mn-cs"/>
+              </a:defRPr>
+            </a:lvl7pPr>
+            <a:lvl8pPr marL="3429000" indent="-228600" algn="l" defTabSz="914400" rtl="0" eaLnBrk="1" latinLnBrk="0" hangingPunct="1">
+              <a:lnSpc>
+                <a:spcPct val="90000"/>
+              </a:lnSpc>
+              <a:spcBef>
+                <a:spcPts val="500"/>
+              </a:spcBef>
+              <a:buFont typeface="Arial" panose="020B0604020202020204" pitchFamily="34" charset="0"/>
+              <a:buChar char="•"/>
+              <a:defRPr sz="1800" kern="1200">
+                <a:solidFill>
+                  <a:schemeClr val="tx1"/>
+                </a:solidFill>
+                <a:latin typeface="+mn-lt"/>
+                <a:ea typeface="+mn-ea"/>
+                <a:cs typeface="+mn-cs"/>
+              </a:defRPr>
+            </a:lvl8pPr>
+            <a:lvl9pPr marL="3886200" indent="-228600" algn="l" defTabSz="914400" rtl="0" eaLnBrk="1" latinLnBrk="0" hangingPunct="1">
+              <a:lnSpc>
+                <a:spcPct val="90000"/>
+              </a:lnSpc>
+              <a:spcBef>
+                <a:spcPts val="500"/>
+              </a:spcBef>
+              <a:buFont typeface="Arial" panose="020B0604020202020204" pitchFamily="34" charset="0"/>
+              <a:buChar char="•"/>
+              <a:defRPr sz="1800" kern="1200">
+                <a:solidFill>
+                  <a:schemeClr val="tx1"/>
+                </a:solidFill>
+                <a:latin typeface="+mn-lt"/>
+                <a:ea typeface="+mn-ea"/>
+                <a:cs typeface="+mn-cs"/>
+              </a:defRPr>
+            </a:lvl9pPr>
+          </a:lstStyle>
+          <a:p>
+            <a:r>
+              <a:rPr lang="en-US" altLang="zh-CN" sz="2000"/>
+              <a:t>colorful console output</a:t>
+            </a:r>
+            <a:endParaRPr lang="en-US" altLang="zh-CN" sz="2000"/>
+          </a:p>
+          <a:p>
+            <a:pPr lvl="1"/>
+            <a:r>
+              <a:rPr lang="en-US" altLang="zh-CN" sz="1800"/>
+              <a:t>// ANSI 颜色代码  </a:t>
+            </a:r>
+            <a:endParaRPr lang="en-US" altLang="zh-CN" sz="1800"/>
+          </a:p>
+          <a:p>
+            <a:pPr lvl="1"/>
+            <a:r>
+              <a:rPr lang="en-US" altLang="zh-CN" sz="1800"/>
+              <a:t>const reset = "\x1b[0m"; // 重置所有属性  </a:t>
+            </a:r>
+            <a:endParaRPr lang="en-US" altLang="zh-CN" sz="1800"/>
+          </a:p>
+          <a:p>
+            <a:pPr lvl="1"/>
+            <a:r>
+              <a:rPr lang="en-US" altLang="zh-CN" sz="1800"/>
+              <a:t>const bold = "\x1b[1m"; // 加粗  </a:t>
+            </a:r>
+            <a:endParaRPr lang="en-US" altLang="zh-CN" sz="1800"/>
+          </a:p>
+          <a:p>
+            <a:pPr lvl="1"/>
+            <a:r>
+              <a:rPr lang="en-US" altLang="zh-CN" sz="1800"/>
+              <a:t>const underline = "\x1b[4m"; // 下划线  </a:t>
+            </a:r>
+            <a:endParaRPr lang="en-US" altLang="zh-CN" sz="1800"/>
+          </a:p>
+          <a:p>
+            <a:pPr lvl="1"/>
+            <a:r>
+              <a:rPr lang="en-US" altLang="zh-CN" sz="1800"/>
+              <a:t>const red = "\x1b[31m"; // 红色  </a:t>
+            </a:r>
+            <a:endParaRPr lang="en-US" altLang="zh-CN" sz="1800"/>
+          </a:p>
+          <a:p>
+            <a:pPr lvl="1"/>
+            <a:r>
+              <a:rPr lang="en-US" altLang="zh-CN" sz="1800"/>
+              <a:t>const green = "\x1b[32m"; // 绿色  </a:t>
+            </a:r>
+            <a:endParaRPr lang="en-US" altLang="zh-CN" sz="1800"/>
+          </a:p>
+          <a:p>
+            <a:pPr lvl="1"/>
+            <a:r>
+              <a:rPr lang="en-US" altLang="zh-CN" sz="1800"/>
+              <a:t>const yellow = "\x1b[33m"; // 黄色  </a:t>
+            </a:r>
+            <a:endParaRPr lang="en-US" altLang="zh-CN" sz="1800"/>
+          </a:p>
+          <a:p>
+            <a:pPr lvl="1"/>
+            <a:r>
+              <a:rPr lang="en-US" altLang="zh-CN" sz="1800"/>
+              <a:t>const blue = "\x1b[34m"; // 蓝色  </a:t>
+            </a:r>
+            <a:endParaRPr lang="en-US" altLang="zh-CN" sz="1800"/>
+          </a:p>
+          <a:p>
+            <a:pPr lvl="1"/>
+            <a:r>
+              <a:rPr lang="en-US" altLang="zh-CN" sz="1800"/>
+              <a:t>const magenta = "\x1b[35m"; // 品红  </a:t>
+            </a:r>
+            <a:endParaRPr lang="en-US" altLang="zh-CN" sz="1800"/>
+          </a:p>
+          <a:p>
+            <a:pPr lvl="1"/>
+            <a:r>
+              <a:rPr lang="en-US" altLang="zh-CN" sz="1800"/>
+              <a:t>const cyan = "\x1b[36m"; // 青色  </a:t>
+            </a:r>
+            <a:endParaRPr lang="en-US" altLang="zh-CN" sz="1800"/>
+          </a:p>
+          <a:p>
+            <a:pPr lvl="1"/>
+            <a:r>
+              <a:rPr lang="en-US" altLang="zh-CN" sz="1800"/>
+              <a:t>const white = "\x1b[37m"; // 白色  </a:t>
+            </a:r>
+            <a:endParaRPr lang="en-US" altLang="zh-CN" sz="1800"/>
+          </a:p>
+          <a:p>
+            <a:pPr lvl="1"/>
+            <a:r>
+              <a:rPr lang="en-US" altLang="zh-CN" sz="1800"/>
+              <a:t>console.log(red + "这是一个红色的文本" + reset);  </a:t>
+            </a:r>
+            <a:endParaRPr lang="en-US" altLang="zh-CN" sz="1800"/>
           </a:p>
         </p:txBody>
       </p:sp>
@@ -13623,7 +13784,7 @@
           <a:p>
             <a:r>
               <a:rPr lang="en-US" altLang="zh-CN"/>
-              <a:t>Google ModelViewer</a:t>
+              <a:t>Three.js 2</a:t>
             </a:r>
             <a:endParaRPr lang="en-US" altLang="zh-CN"/>
           </a:p>
@@ -13645,72 +13806,46 @@
           <a:p>
             <a:r>
               <a:rPr lang="en-US" altLang="zh-CN"/>
-              <a:t>Concept</a:t>
-            </a:r>
-            <a:endParaRPr lang="en-US" altLang="zh-CN"/>
-          </a:p>
-          <a:p>
-            <a:pPr lvl="1"/>
-            <a:r>
-              <a:rPr lang="en-US" altLang="zh-CN"/>
-              <a:t>Only glTF/GLB models are supported</a:t>
-            </a:r>
-            <a:endParaRPr lang="en-US" altLang="zh-CN"/>
-          </a:p>
-        </p:txBody>
-      </p:sp>
-      <p:sp>
-        <p:nvSpPr>
-          <p:cNvPr id="4" name="文本框 3"/>
-          <p:cNvSpPr txBox="1"/>
-          <p:nvPr/>
-        </p:nvSpPr>
-        <p:spPr>
-          <a:xfrm>
-            <a:off x="6999605" y="1414780"/>
-            <a:ext cx="4845050" cy="2799715"/>
-          </a:xfrm>
-          <a:prstGeom prst="rect">
-            <a:avLst/>
-          </a:prstGeom>
-          <a:noFill/>
-          <a:ln>
-            <a:solidFill>
-              <a:srgbClr val="FFC000"/>
-            </a:solidFill>
-          </a:ln>
-        </p:spPr>
-        <p:txBody>
-          <a:bodyPr wrap="square" rtlCol="0">
-            <a:spAutoFit/>
-          </a:bodyPr>
-          <a:p>
-            <a:r>
-              <a:rPr lang="zh-CN" altLang="en-US" sz="1600"/>
-              <a:t>&lt;script type="module" src="https://unpkg.com/@google/model-viewer/dist/model-viewer.js"&gt;&lt;/script&gt;</a:t>
-            </a:r>
-            <a:endParaRPr lang="zh-CN" altLang="en-US" sz="1600"/>
-          </a:p>
-          <a:p>
-            <a:r>
-              <a:rPr lang="zh-CN" altLang="en-US" sz="1600"/>
-              <a:t>&lt;script nomodule src="https://unpkg.com/@google/model-viewer/dist/model-viewer-legacy.js"&gt;&lt;/script&gt;</a:t>
-            </a:r>
-            <a:endParaRPr lang="zh-CN" altLang="en-US" sz="1600"/>
-          </a:p>
-          <a:p>
-            <a:r>
-              <a:rPr lang="zh-CN" altLang="en-US" sz="1600"/>
-              <a:t>&lt;!-- Use it like any other HTML element --&gt;</a:t>
-            </a:r>
-            <a:endParaRPr lang="zh-CN" altLang="en-US" sz="1600"/>
-          </a:p>
-          <a:p>
-            <a:r>
-              <a:rPr lang="zh-CN" altLang="en-US" sz="1600"/>
-              <a:t>&lt;model-viewer src="examples/assets/Astronaut.glb" alt="A 3D model of an astronaut" auto-rotate camera-controls background-color="#455A64"&gt;&lt;/model-viewer&gt;</a:t>
-            </a:r>
-            <a:endParaRPr lang="zh-CN" altLang="en-US" sz="1600"/>
+              <a:t>VR support</a:t>
+            </a:r>
+            <a:endParaRPr lang="en-US" altLang="zh-CN"/>
+          </a:p>
+          <a:p>
+            <a:pPr lvl="1" algn="l">
+              <a:buClrTx/>
+              <a:buSzTx/>
+            </a:pPr>
+            <a:r>
+              <a:rPr lang="zh-CN" altLang="en-US">
+                <a:sym typeface="+mn-ea"/>
+              </a:rPr>
+              <a:t>https://threejs.org/docs/#manual/en/introduction/How-to-create-VR-content</a:t>
+            </a:r>
+            <a:endParaRPr lang="zh-CN" altLang="en-US"/>
+          </a:p>
+          <a:p>
+            <a:pPr lvl="1"/>
+            <a:r>
+              <a:rPr lang="zh-CN" altLang="en-US"/>
+              <a:t>https://immersiveweb.dev/#three.js</a:t>
+            </a:r>
+            <a:endParaRPr lang="zh-CN" altLang="en-US"/>
+          </a:p>
+          <a:p>
+            <a:pPr lvl="1"/>
+            <a:r>
+              <a:rPr lang="zh-CN" altLang="en-US"/>
+              <a:t>https://tutorialsforvr.com/enable-threejs-vr/</a:t>
+            </a:r>
+            <a:endParaRPr lang="zh-CN" altLang="en-US"/>
+          </a:p>
+          <a:p>
+            <a:pPr lvl="1"/>
+            <a:r>
+              <a:rPr lang="zh-CN" altLang="en-US"/>
+              <a:t>https://www.davrous.com/2017/07/07/from-zero-to-hero-creating-webvr-experiences-with-babylon-js-on-all-platforms/</a:t>
+            </a:r>
+            <a:endParaRPr lang="zh-CN" altLang="en-US"/>
           </a:p>
         </p:txBody>
       </p:sp>
@@ -13751,6 +13886,400 @@
           <a:p>
             <a:r>
               <a:rPr lang="en-US" altLang="zh-CN"/>
+              <a:t>A-Frame</a:t>
+            </a:r>
+            <a:endParaRPr lang="en-US" altLang="zh-CN"/>
+          </a:p>
+        </p:txBody>
+      </p:sp>
+      <p:sp>
+        <p:nvSpPr>
+          <p:cNvPr id="3" name="内容占位符 2"/>
+          <p:cNvSpPr>
+            <a:spLocks noGrp="1"/>
+          </p:cNvSpPr>
+          <p:nvPr>
+            <p:ph idx="1"/>
+          </p:nvPr>
+        </p:nvSpPr>
+        <p:spPr>
+          <a:xfrm>
+            <a:off x="838200" y="1211580"/>
+            <a:ext cx="5999480" cy="4549140"/>
+          </a:xfrm>
+        </p:spPr>
+        <p:txBody>
+          <a:bodyPr/>
+          <a:p>
+            <a:r>
+              <a:rPr lang="en-US" altLang="zh-CN"/>
+              <a:t>Concept</a:t>
+            </a:r>
+            <a:endParaRPr lang="en-US" altLang="zh-CN"/>
+          </a:p>
+          <a:p>
+            <a:pPr lvl="1"/>
+            <a:r>
+              <a:rPr lang="en-US" altLang="zh-CN"/>
+              <a:t>Declarative DOM-based Entity-Component-System</a:t>
+            </a:r>
+            <a:endParaRPr lang="en-US" altLang="zh-CN"/>
+          </a:p>
+          <a:p>
+            <a:pPr lvl="1"/>
+            <a:r>
+              <a:rPr lang="en-US" altLang="zh-CN"/>
+              <a:t>Component-based development</a:t>
+            </a:r>
+            <a:endParaRPr lang="en-US" altLang="zh-CN"/>
+          </a:p>
+        </p:txBody>
+      </p:sp>
+      <p:sp>
+        <p:nvSpPr>
+          <p:cNvPr id="4" name="文本框 3"/>
+          <p:cNvSpPr txBox="1"/>
+          <p:nvPr/>
+        </p:nvSpPr>
+        <p:spPr>
+          <a:xfrm>
+            <a:off x="6958330" y="1631950"/>
+            <a:ext cx="4859020" cy="3599815"/>
+          </a:xfrm>
+          <a:prstGeom prst="rect">
+            <a:avLst/>
+          </a:prstGeom>
+          <a:noFill/>
+          <a:ln>
+            <a:solidFill>
+              <a:srgbClr val="FFC000"/>
+            </a:solidFill>
+          </a:ln>
+        </p:spPr>
+        <p:txBody>
+          <a:bodyPr wrap="square" rtlCol="0">
+            <a:spAutoFit/>
+          </a:bodyPr>
+          <a:p>
+            <a:r>
+              <a:rPr lang="zh-CN" altLang="en-US" sz="1200"/>
+              <a:t>&lt;html&gt;</a:t>
+            </a:r>
+            <a:endParaRPr lang="zh-CN" altLang="en-US" sz="1200"/>
+          </a:p>
+          <a:p>
+            <a:r>
+              <a:rPr lang="zh-CN" altLang="en-US" sz="1200"/>
+              <a:t>  &lt;head&gt;</a:t>
+            </a:r>
+            <a:endParaRPr lang="zh-CN" altLang="en-US" sz="1200"/>
+          </a:p>
+          <a:p>
+            <a:r>
+              <a:rPr lang="zh-CN" altLang="en-US" sz="1200"/>
+              <a:t>    &lt;script src="https://aframe.io/releases/1.0.0/aframe.min.js"&gt;&lt;/script&gt;</a:t>
+            </a:r>
+            <a:endParaRPr lang="zh-CN" altLang="en-US" sz="1200"/>
+          </a:p>
+          <a:p>
+            <a:r>
+              <a:rPr lang="zh-CN" altLang="en-US" sz="1200"/>
+              <a:t>  &lt;/head&gt;</a:t>
+            </a:r>
+            <a:endParaRPr lang="zh-CN" altLang="en-US" sz="1200"/>
+          </a:p>
+          <a:p>
+            <a:r>
+              <a:rPr lang="zh-CN" altLang="en-US" sz="1200"/>
+              <a:t>  &lt;body&gt;</a:t>
+            </a:r>
+            <a:endParaRPr lang="zh-CN" altLang="en-US" sz="1200"/>
+          </a:p>
+          <a:p>
+            <a:r>
+              <a:rPr lang="zh-CN" altLang="en-US" sz="1200"/>
+              <a:t>    &lt;a-scene&gt;</a:t>
+            </a:r>
+            <a:endParaRPr lang="zh-CN" altLang="en-US" sz="1200"/>
+          </a:p>
+          <a:p>
+            <a:r>
+              <a:rPr lang="zh-CN" altLang="en-US" sz="1200"/>
+              <a:t>      &lt;a-box position="-1 0.5 -3" rotation="0 45 0" color="#4CC3D9"&gt;&lt;/a-box&gt;</a:t>
+            </a:r>
+            <a:endParaRPr lang="zh-CN" altLang="en-US" sz="1200"/>
+          </a:p>
+          <a:p>
+            <a:r>
+              <a:rPr lang="zh-CN" altLang="en-US" sz="1200"/>
+              <a:t>      &lt;a-sphere position="0 1.25 -5" radius="1.25" color="#EF2D5E"&gt;&lt;/a-sphere&gt;</a:t>
+            </a:r>
+            <a:endParaRPr lang="zh-CN" altLang="en-US" sz="1200"/>
+          </a:p>
+          <a:p>
+            <a:r>
+              <a:rPr lang="zh-CN" altLang="en-US" sz="1200"/>
+              <a:t>      &lt;a-cylinder position="1 0.75 -3" radius="0.5" height="1.5" color="#FFC65D"&gt;&lt;/a-cylinder&gt;</a:t>
+            </a:r>
+            <a:endParaRPr lang="zh-CN" altLang="en-US" sz="1200"/>
+          </a:p>
+          <a:p>
+            <a:r>
+              <a:rPr lang="zh-CN" altLang="en-US" sz="1200"/>
+              <a:t>      &lt;a-plane position="0 0 -4" rotation="-90 0 0" width="4" height="4" color="#7BC8A4"&gt;&lt;/a-plane&gt;</a:t>
+            </a:r>
+            <a:endParaRPr lang="zh-CN" altLang="en-US" sz="1200"/>
+          </a:p>
+          <a:p>
+            <a:r>
+              <a:rPr lang="zh-CN" altLang="en-US" sz="1200"/>
+              <a:t>      &lt;a-sky color="#ECECEC"&gt;&lt;/a-sky&gt;</a:t>
+            </a:r>
+            <a:endParaRPr lang="zh-CN" altLang="en-US" sz="1200"/>
+          </a:p>
+          <a:p>
+            <a:r>
+              <a:rPr lang="zh-CN" altLang="en-US" sz="1200"/>
+              <a:t>    &lt;/a-scene&gt;</a:t>
+            </a:r>
+            <a:endParaRPr lang="zh-CN" altLang="en-US" sz="1200"/>
+          </a:p>
+          <a:p>
+            <a:r>
+              <a:rPr lang="zh-CN" altLang="en-US" sz="1200"/>
+              <a:t>  &lt;/body&gt;</a:t>
+            </a:r>
+            <a:endParaRPr lang="zh-CN" altLang="en-US" sz="1200"/>
+          </a:p>
+          <a:p>
+            <a:r>
+              <a:rPr lang="zh-CN" altLang="en-US" sz="1200"/>
+              <a:t>&lt;/html&gt;</a:t>
+            </a:r>
+            <a:endParaRPr lang="zh-CN" altLang="en-US" sz="1200"/>
+          </a:p>
+        </p:txBody>
+      </p:sp>
+      <p:sp>
+        <p:nvSpPr>
+          <p:cNvPr id="5" name="文本框 4"/>
+          <p:cNvSpPr txBox="1"/>
+          <p:nvPr/>
+        </p:nvSpPr>
+        <p:spPr>
+          <a:xfrm>
+            <a:off x="6958330" y="5374005"/>
+            <a:ext cx="4859020" cy="953135"/>
+          </a:xfrm>
+          <a:prstGeom prst="rect">
+            <a:avLst/>
+          </a:prstGeom>
+          <a:noFill/>
+          <a:ln>
+            <a:solidFill>
+              <a:srgbClr val="FFC000"/>
+            </a:solidFill>
+          </a:ln>
+        </p:spPr>
+        <p:txBody>
+          <a:bodyPr wrap="square" rtlCol="0">
+            <a:spAutoFit/>
+          </a:bodyPr>
+          <a:p>
+            <a:r>
+              <a:rPr lang="zh-CN" altLang="en-US" sz="1400"/>
+              <a:t>&lt;a-entity geometry="primitive: sphere; radius: 1.5"</a:t>
+            </a:r>
+            <a:endParaRPr lang="zh-CN" altLang="en-US" sz="1400"/>
+          </a:p>
+          <a:p>
+            <a:r>
+              <a:rPr lang="zh-CN" altLang="en-US" sz="1400"/>
+              <a:t>          light="type: point; color: white; intensity: 2"</a:t>
+            </a:r>
+            <a:endParaRPr lang="zh-CN" altLang="en-US" sz="1400"/>
+          </a:p>
+          <a:p>
+            <a:r>
+              <a:rPr lang="zh-CN" altLang="en-US" sz="1400"/>
+              <a:t>          material="color: white; shader: flat; src: glow.jpg"</a:t>
+            </a:r>
+            <a:endParaRPr lang="zh-CN" altLang="en-US" sz="1400"/>
+          </a:p>
+          <a:p>
+            <a:r>
+              <a:rPr lang="zh-CN" altLang="en-US" sz="1400"/>
+              <a:t>          position="0 0 -5"&gt;&lt;/a-entity&gt;</a:t>
+            </a:r>
+            <a:endParaRPr lang="zh-CN" altLang="en-US" sz="1400"/>
+          </a:p>
+        </p:txBody>
+      </p:sp>
+    </p:spTree>
+    <p:custDataLst>
+      <p:tags r:id="rId1"/>
+    </p:custDataLst>
+  </p:cSld>
+  <p:clrMapOvr>
+    <a:masterClrMapping/>
+  </p:clrMapOvr>
+</p:sld>
+</file>
+
+<file path=ppt/slides/slide52.xml><?xml version="1.0" encoding="utf-8"?>
+<p:sld xmlns:a="http://schemas.openxmlformats.org/drawingml/2006/main" xmlns:r="http://schemas.openxmlformats.org/officeDocument/2006/relationships" xmlns:p="http://schemas.openxmlformats.org/presentationml/2006/main">
+  <p:cSld>
+    <p:spTree>
+      <p:nvGrpSpPr>
+        <p:cNvPr id="1" name=""/>
+        <p:cNvGrpSpPr/>
+        <p:nvPr/>
+      </p:nvGrpSpPr>
+      <p:grpSpPr/>
+      <p:sp>
+        <p:nvSpPr>
+          <p:cNvPr id="2" name="标题 1"/>
+          <p:cNvSpPr>
+            <a:spLocks noGrp="1"/>
+          </p:cNvSpPr>
+          <p:nvPr>
+            <p:ph type="title"/>
+          </p:nvPr>
+        </p:nvSpPr>
+        <p:spPr/>
+        <p:txBody>
+          <a:bodyPr/>
+          <a:p>
+            <a:r>
+              <a:rPr lang="en-US" altLang="zh-CN"/>
+              <a:t>Google ModelViewer</a:t>
+            </a:r>
+            <a:endParaRPr lang="en-US" altLang="zh-CN"/>
+          </a:p>
+        </p:txBody>
+      </p:sp>
+      <p:sp>
+        <p:nvSpPr>
+          <p:cNvPr id="3" name="内容占位符 2"/>
+          <p:cNvSpPr>
+            <a:spLocks noGrp="1"/>
+          </p:cNvSpPr>
+          <p:nvPr>
+            <p:ph idx="1"/>
+          </p:nvPr>
+        </p:nvSpPr>
+        <p:spPr/>
+        <p:txBody>
+          <a:bodyPr/>
+          <a:p>
+            <a:r>
+              <a:rPr lang="en-US" altLang="zh-CN"/>
+              <a:t>Concept</a:t>
+            </a:r>
+            <a:endParaRPr lang="en-US" altLang="zh-CN"/>
+          </a:p>
+          <a:p>
+            <a:pPr lvl="1"/>
+            <a:r>
+              <a:rPr lang="en-US" altLang="zh-CN"/>
+              <a:t>Only glTF/GLB models are supported</a:t>
+            </a:r>
+            <a:endParaRPr lang="en-US" altLang="zh-CN"/>
+          </a:p>
+        </p:txBody>
+      </p:sp>
+      <p:sp>
+        <p:nvSpPr>
+          <p:cNvPr id="4" name="文本框 3"/>
+          <p:cNvSpPr txBox="1"/>
+          <p:nvPr/>
+        </p:nvSpPr>
+        <p:spPr>
+          <a:xfrm>
+            <a:off x="6999605" y="1414780"/>
+            <a:ext cx="4845050" cy="2799715"/>
+          </a:xfrm>
+          <a:prstGeom prst="rect">
+            <a:avLst/>
+          </a:prstGeom>
+          <a:noFill/>
+          <a:ln>
+            <a:solidFill>
+              <a:srgbClr val="FFC000"/>
+            </a:solidFill>
+          </a:ln>
+        </p:spPr>
+        <p:txBody>
+          <a:bodyPr wrap="square" rtlCol="0">
+            <a:spAutoFit/>
+          </a:bodyPr>
+          <a:p>
+            <a:r>
+              <a:rPr lang="zh-CN" altLang="en-US" sz="1600"/>
+              <a:t>&lt;script type="module" src="https://unpkg.com/@google/model-viewer/dist/model-viewer.js"&gt;&lt;/script&gt;</a:t>
+            </a:r>
+            <a:endParaRPr lang="zh-CN" altLang="en-US" sz="1600"/>
+          </a:p>
+          <a:p>
+            <a:r>
+              <a:rPr lang="zh-CN" altLang="en-US" sz="1600"/>
+              <a:t>&lt;script nomodule src="https://unpkg.com/@google/model-viewer/dist/model-viewer-legacy.js"&gt;&lt;/script&gt;</a:t>
+            </a:r>
+            <a:endParaRPr lang="zh-CN" altLang="en-US" sz="1600"/>
+          </a:p>
+          <a:p>
+            <a:r>
+              <a:rPr lang="zh-CN" altLang="en-US" sz="1600"/>
+              <a:t>&lt;!-- Use it like any other HTML element --&gt;</a:t>
+            </a:r>
+            <a:endParaRPr lang="zh-CN" altLang="en-US" sz="1600"/>
+          </a:p>
+          <a:p>
+            <a:r>
+              <a:rPr lang="zh-CN" altLang="en-US" sz="1600"/>
+              <a:t>&lt;model-viewer src="examples/assets/Astronaut.glb" alt="A 3D model of an astronaut" auto-rotate camera-controls background-color="#455A64"&gt;&lt;/model-viewer&gt;</a:t>
+            </a:r>
+            <a:endParaRPr lang="zh-CN" altLang="en-US" sz="1600"/>
+          </a:p>
+        </p:txBody>
+      </p:sp>
+    </p:spTree>
+    <p:custDataLst>
+      <p:tags r:id="rId1"/>
+    </p:custDataLst>
+  </p:cSld>
+  <p:clrMapOvr>
+    <a:masterClrMapping/>
+  </p:clrMapOvr>
+</p:sld>
+</file>
+
+<file path=ppt/slides/slide53.xml><?xml version="1.0" encoding="utf-8"?>
+<p:sld xmlns:a="http://schemas.openxmlformats.org/drawingml/2006/main" xmlns:r="http://schemas.openxmlformats.org/officeDocument/2006/relationships" xmlns:p="http://schemas.openxmlformats.org/presentationml/2006/main">
+  <p:cSld>
+    <p:spTree>
+      <p:nvGrpSpPr>
+        <p:cNvPr id="1" name=""/>
+        <p:cNvGrpSpPr/>
+        <p:nvPr/>
+      </p:nvGrpSpPr>
+      <p:grpSpPr/>
+      <p:sp>
+        <p:nvSpPr>
+          <p:cNvPr id="2" name="标题 1"/>
+          <p:cNvSpPr>
+            <a:spLocks noGrp="1"/>
+          </p:cNvSpPr>
+          <p:nvPr>
+            <p:ph type="title"/>
+          </p:nvPr>
+        </p:nvSpPr>
+        <p:spPr/>
+        <p:txBody>
+          <a:bodyPr/>
+          <a:p>
+            <a:r>
+              <a:rPr lang="en-US" altLang="zh-CN"/>
               <a:t>Babylon.js - Basic</a:t>
             </a:r>
             <a:endParaRPr lang="en-US" altLang="zh-CN"/>
@@ -14037,7 +14566,7 @@
 </p:sld>
 </file>
 
-<file path=ppt/slides/slide52.xml><?xml version="1.0" encoding="utf-8"?>
+<file path=ppt/slides/slide54.xml><?xml version="1.0" encoding="utf-8"?>
 <p:sld xmlns:a="http://schemas.openxmlformats.org/drawingml/2006/main" xmlns:r="http://schemas.openxmlformats.org/officeDocument/2006/relationships" xmlns:p="http://schemas.openxmlformats.org/presentationml/2006/main">
   <p:cSld>
     <p:spTree>
@@ -14798,7 +15327,7 @@
 </p:sld>
 </file>
 
-<file path=ppt/slides/slide53.xml><?xml version="1.0" encoding="utf-8"?>
+<file path=ppt/slides/slide55.xml><?xml version="1.0" encoding="utf-8"?>
 <p:sld xmlns:a="http://schemas.openxmlformats.org/drawingml/2006/main" xmlns:r="http://schemas.openxmlformats.org/officeDocument/2006/relationships" xmlns:p="http://schemas.openxmlformats.org/presentationml/2006/main">
   <p:cSld>
     <p:spTree>
@@ -15158,196 +15687,6 @@
             <a:r>
               <a:rPr lang="en-US" altLang="zh-CN"/>
               <a:t>  reset()</a:t>
-            </a:r>
-            <a:endParaRPr lang="en-US" altLang="zh-CN"/>
-          </a:p>
-        </p:txBody>
-      </p:sp>
-    </p:spTree>
-    <p:custDataLst>
-      <p:tags r:id="rId1"/>
-    </p:custDataLst>
-  </p:cSld>
-  <p:clrMapOvr>
-    <a:masterClrMapping/>
-  </p:clrMapOvr>
-</p:sld>
-</file>
-
-<file path=ppt/slides/slide54.xml><?xml version="1.0" encoding="utf-8"?>
-<p:sld xmlns:a="http://schemas.openxmlformats.org/drawingml/2006/main" xmlns:r="http://schemas.openxmlformats.org/officeDocument/2006/relationships" xmlns:p="http://schemas.openxmlformats.org/presentationml/2006/main">
-  <p:cSld>
-    <p:spTree>
-      <p:nvGrpSpPr>
-        <p:cNvPr id="1" name=""/>
-        <p:cNvGrpSpPr/>
-        <p:nvPr/>
-      </p:nvGrpSpPr>
-      <p:grpSpPr/>
-      <p:sp>
-        <p:nvSpPr>
-          <p:cNvPr id="4" name="标题 3"/>
-          <p:cNvSpPr>
-            <a:spLocks noGrp="1"/>
-          </p:cNvSpPr>
-          <p:nvPr>
-            <p:ph type="title"/>
-          </p:nvPr>
-        </p:nvSpPr>
-        <p:spPr/>
-        <p:txBody>
-          <a:bodyPr/>
-          <a:p>
-            <a:r>
-              <a:rPr lang="en-US" altLang="zh-CN"/>
-              <a:t>Data Visualization</a:t>
-            </a:r>
-            <a:endParaRPr lang="en-US" altLang="zh-CN"/>
-          </a:p>
-        </p:txBody>
-      </p:sp>
-      <p:sp>
-        <p:nvSpPr>
-          <p:cNvPr id="5" name="文本占位符 4"/>
-          <p:cNvSpPr>
-            <a:spLocks noGrp="1"/>
-          </p:cNvSpPr>
-          <p:nvPr>
-            <p:ph type="body" idx="1"/>
-          </p:nvPr>
-        </p:nvSpPr>
-        <p:spPr/>
-        <p:txBody>
-          <a:bodyPr/>
-          <a:p>
-            <a:endParaRPr lang="zh-CN" altLang="en-US"/>
-          </a:p>
-        </p:txBody>
-      </p:sp>
-    </p:spTree>
-    <p:custDataLst>
-      <p:tags r:id="rId1"/>
-    </p:custDataLst>
-  </p:cSld>
-  <p:clrMapOvr>
-    <a:masterClrMapping/>
-  </p:clrMapOvr>
-</p:sld>
-</file>
-
-<file path=ppt/slides/slide55.xml><?xml version="1.0" encoding="utf-8"?>
-<p:sld xmlns:a="http://schemas.openxmlformats.org/drawingml/2006/main" xmlns:r="http://schemas.openxmlformats.org/officeDocument/2006/relationships" xmlns:p="http://schemas.openxmlformats.org/presentationml/2006/main">
-  <p:cSld>
-    <p:spTree>
-      <p:nvGrpSpPr>
-        <p:cNvPr id="1" name=""/>
-        <p:cNvGrpSpPr/>
-        <p:nvPr/>
-      </p:nvGrpSpPr>
-      <p:grpSpPr/>
-      <p:sp>
-        <p:nvSpPr>
-          <p:cNvPr id="4" name="标题 3"/>
-          <p:cNvSpPr>
-            <a:spLocks noGrp="1"/>
-          </p:cNvSpPr>
-          <p:nvPr>
-            <p:ph type="title"/>
-          </p:nvPr>
-        </p:nvSpPr>
-        <p:spPr/>
-        <p:txBody>
-          <a:bodyPr/>
-          <a:p>
-            <a:r>
-              <a:rPr lang="en-US" altLang="zh-CN"/>
-              <a:t>QRCode</a:t>
-            </a:r>
-            <a:endParaRPr lang="en-US" altLang="zh-CN"/>
-          </a:p>
-        </p:txBody>
-      </p:sp>
-      <p:sp>
-        <p:nvSpPr>
-          <p:cNvPr id="5" name="内容占位符 4"/>
-          <p:cNvSpPr>
-            <a:spLocks noGrp="1"/>
-          </p:cNvSpPr>
-          <p:nvPr>
-            <p:ph idx="1"/>
-          </p:nvPr>
-        </p:nvSpPr>
-        <p:spPr/>
-        <p:txBody>
-          <a:bodyPr/>
-          <a:p>
-            <a:r>
-              <a:rPr lang="en-US" altLang="zh-CN"/>
-              <a:t>References</a:t>
-            </a:r>
-            <a:endParaRPr lang="en-US" altLang="zh-CN"/>
-          </a:p>
-          <a:p>
-            <a:pPr lvl="1"/>
-            <a:r>
-              <a:rPr lang="en-US" altLang="zh-CN"/>
-              <a:t>https://towardsdatascience.com/the-importance-of-interactive-data-visualization-5e125cb04ce3</a:t>
-            </a:r>
-            <a:endParaRPr lang="en-US" altLang="zh-CN"/>
-          </a:p>
-          <a:p>
-            <a:pPr lvl="0"/>
-            <a:r>
-              <a:rPr lang="en-US" altLang="zh-CN"/>
-              <a:t>Libraries</a:t>
-            </a:r>
-            <a:endParaRPr lang="en-US" altLang="zh-CN"/>
-          </a:p>
-          <a:p>
-            <a:pPr lvl="1"/>
-            <a:r>
-              <a:rPr lang="en-US" altLang="zh-CN"/>
-              <a:t>Low-level</a:t>
-            </a:r>
-            <a:endParaRPr lang="en-US" altLang="zh-CN"/>
-          </a:p>
-          <a:p>
-            <a:pPr lvl="2"/>
-            <a:r>
-              <a:rPr lang="en-US" altLang="zh-CN"/>
-              <a:t>D3</a:t>
-            </a:r>
-            <a:endParaRPr lang="en-US" altLang="zh-CN"/>
-          </a:p>
-          <a:p>
-            <a:pPr lvl="1"/>
-            <a:r>
-              <a:rPr lang="en-US" altLang="zh-CN"/>
-              <a:t>High-level</a:t>
-            </a:r>
-            <a:endParaRPr lang="en-US" altLang="zh-CN"/>
-          </a:p>
-          <a:p>
-            <a:pPr lvl="2"/>
-            <a:r>
-              <a:rPr lang="en-US" altLang="zh-CN"/>
-              <a:t>Vega, Vega-Lite</a:t>
-            </a:r>
-            <a:endParaRPr lang="en-US" altLang="zh-CN"/>
-          </a:p>
-          <a:p>
-            <a:pPr lvl="1"/>
-            <a:r>
-              <a:rPr lang="en-US" altLang="zh-CN"/>
-              <a:t>Top-level</a:t>
-            </a:r>
-            <a:endParaRPr lang="en-US" altLang="zh-CN"/>
-          </a:p>
-          <a:p>
-            <a:pPr lvl="2"/>
-            <a:r>
-              <a:rPr lang="en-US" altLang="zh-CN"/>
-              <a:t>Voyager</a:t>
             </a:r>
             <a:endParaRPr lang="en-US" altLang="zh-CN"/>
           </a:p>
@@ -15390,9 +15729,9 @@
           <a:p>
             <a:r>
               <a:rPr lang="en-US" altLang="zh-CN"/>
-              <a:t>Misc.</a:t>
-            </a:r>
-            <a:endParaRPr lang="zh-CN" altLang="en-US"/>
+              <a:t>Data Visualization</a:t>
+            </a:r>
+            <a:endParaRPr lang="en-US" altLang="zh-CN"/>
           </a:p>
         </p:txBody>
       </p:sp>
@@ -15481,7 +15820,7 @@
             <a:pPr lvl="1"/>
             <a:r>
               <a:rPr lang="en-US" altLang="zh-CN"/>
-              <a:t>https://code-boxx.com/generate-qr-code-javascript/#:~:text=To%20generate%20QR%20codes%20in%20Javascript%3A%201%20Load,var%20qrc%20%3D%20new%20QRCode%20%28document.getElementById%20%28%22qrcode%22%29%2C%20%22http%3A%2F%2Fsite.com%2F%22%29%3B</a:t>
+              <a:t>https://towardsdatascience.com/the-importance-of-interactive-data-visualization-5e125cb04ce3</a:t>
             </a:r>
             <a:endParaRPr lang="en-US" altLang="zh-CN"/>
           </a:p>
@@ -15489,23 +15828,55 @@
             <a:pPr lvl="0"/>
             <a:r>
               <a:rPr lang="en-US" altLang="zh-CN"/>
-              <a:t>qrcodejs</a:t>
-            </a:r>
-            <a:endParaRPr lang="en-US" altLang="zh-CN"/>
-          </a:p>
-          <a:p>
-            <a:pPr lvl="1"/>
-            <a:r>
-              <a:rPr lang="en-US" altLang="zh-CN"/>
-              <a:t>https://cdnjs.com/libraries/qrcodejs</a:t>
-            </a:r>
-            <a:endParaRPr lang="en-US" altLang="zh-CN"/>
-          </a:p>
-          <a:p>
-            <a:pPr lvl="1"/>
-            <a:r>
-              <a:rPr lang="en-US" altLang="zh-CN"/>
-              <a:t>var qrc = new QRCode(document.getElementById("qrcode"), "content");</a:t>
+              <a:t>Libraries</a:t>
+            </a:r>
+            <a:endParaRPr lang="en-US" altLang="zh-CN"/>
+          </a:p>
+          <a:p>
+            <a:pPr lvl="1"/>
+            <a:r>
+              <a:rPr lang="en-US" altLang="zh-CN"/>
+              <a:t>Low-level</a:t>
+            </a:r>
+            <a:endParaRPr lang="en-US" altLang="zh-CN"/>
+          </a:p>
+          <a:p>
+            <a:pPr lvl="2"/>
+            <a:r>
+              <a:rPr lang="en-US" altLang="zh-CN"/>
+              <a:t>D3</a:t>
+            </a:r>
+            <a:endParaRPr lang="en-US" altLang="zh-CN"/>
+          </a:p>
+          <a:p>
+            <a:pPr lvl="1"/>
+            <a:r>
+              <a:rPr lang="en-US" altLang="zh-CN"/>
+              <a:t>High-level</a:t>
+            </a:r>
+            <a:endParaRPr lang="en-US" altLang="zh-CN"/>
+          </a:p>
+          <a:p>
+            <a:pPr lvl="2"/>
+            <a:r>
+              <a:rPr lang="en-US" altLang="zh-CN"/>
+              <a:t>Vega, Vega-Lite</a:t>
+            </a:r>
+            <a:endParaRPr lang="en-US" altLang="zh-CN"/>
+          </a:p>
+          <a:p>
+            <a:pPr lvl="1"/>
+            <a:r>
+              <a:rPr lang="en-US" altLang="zh-CN"/>
+              <a:t>Top-level</a:t>
+            </a:r>
+            <a:endParaRPr lang="en-US" altLang="zh-CN"/>
+          </a:p>
+          <a:p>
+            <a:pPr lvl="2"/>
+            <a:r>
+              <a:rPr lang="en-US" altLang="zh-CN"/>
+              <a:t>Voyager</a:t>
             </a:r>
             <a:endParaRPr lang="en-US" altLang="zh-CN"/>
           </a:p>
@@ -15534,7 +15905,7 @@
       <p:grpSpPr/>
       <p:sp>
         <p:nvSpPr>
-          <p:cNvPr id="2" name="标题 1"/>
+          <p:cNvPr id="4" name="标题 3"/>
           <p:cNvSpPr>
             <a:spLocks noGrp="1"/>
           </p:cNvSpPr>
@@ -15548,39 +15919,27 @@
           <a:p>
             <a:r>
               <a:rPr lang="en-US" altLang="zh-CN"/>
-              <a:t>Input validation</a:t>
-            </a:r>
-            <a:endParaRPr lang="en-US" altLang="zh-CN"/>
-          </a:p>
-        </p:txBody>
-      </p:sp>
-      <p:sp>
-        <p:nvSpPr>
-          <p:cNvPr id="3" name="内容占位符 2"/>
-          <p:cNvSpPr>
-            <a:spLocks noGrp="1"/>
-          </p:cNvSpPr>
-          <p:nvPr>
-            <p:ph idx="1"/>
+              <a:t>Misc.</a:t>
+            </a:r>
+            <a:endParaRPr lang="zh-CN" altLang="en-US"/>
+          </a:p>
+        </p:txBody>
+      </p:sp>
+      <p:sp>
+        <p:nvSpPr>
+          <p:cNvPr id="5" name="文本占位符 4"/>
+          <p:cNvSpPr>
+            <a:spLocks noGrp="1"/>
+          </p:cNvSpPr>
+          <p:nvPr>
+            <p:ph type="body" idx="1"/>
           </p:nvPr>
         </p:nvSpPr>
         <p:spPr/>
         <p:txBody>
           <a:bodyPr/>
           <a:p>
-            <a:r>
-              <a:rPr lang="en-US" altLang="zh-CN"/>
-              <a:t>Reference</a:t>
-            </a:r>
-            <a:endParaRPr lang="en-US" altLang="zh-CN"/>
-          </a:p>
-          <a:p>
-            <a:pPr lvl="1"/>
-            <a:r>
-              <a:rPr lang="en-US" altLang="zh-CN"/>
-              <a:t>https://developpaper.com/javascript-text-box-verification-code-based-on-regular-expression/</a:t>
-            </a:r>
-            <a:endParaRPr lang="en-US" altLang="zh-CN"/>
+            <a:endParaRPr lang="zh-CN" altLang="en-US"/>
           </a:p>
         </p:txBody>
       </p:sp>
@@ -15617,33 +15976,67 @@
         </p:nvSpPr>
         <p:spPr/>
         <p:txBody>
-          <a:bodyPr>
-            <a:normAutofit fontScale="90000"/>
-          </a:bodyPr>
-          <a:p>
-            <a:r>
-              <a:rPr lang="en-US" altLang="zh-CN"/>
-              <a:t>Interaction with Other Language</a:t>
-            </a:r>
-            <a:endParaRPr lang="en-US" altLang="zh-CN"/>
-          </a:p>
-        </p:txBody>
-      </p:sp>
-      <p:sp>
-        <p:nvSpPr>
-          <p:cNvPr id="5" name="文本占位符 4"/>
-          <p:cNvSpPr>
-            <a:spLocks noGrp="1"/>
-          </p:cNvSpPr>
-          <p:nvPr>
-            <p:ph type="body" idx="1"/>
+          <a:bodyPr/>
+          <a:p>
+            <a:r>
+              <a:rPr lang="en-US" altLang="zh-CN"/>
+              <a:t>QRCode</a:t>
+            </a:r>
+            <a:endParaRPr lang="en-US" altLang="zh-CN"/>
+          </a:p>
+        </p:txBody>
+      </p:sp>
+      <p:sp>
+        <p:nvSpPr>
+          <p:cNvPr id="5" name="内容占位符 4"/>
+          <p:cNvSpPr>
+            <a:spLocks noGrp="1"/>
+          </p:cNvSpPr>
+          <p:nvPr>
+            <p:ph idx="1"/>
           </p:nvPr>
         </p:nvSpPr>
         <p:spPr/>
         <p:txBody>
           <a:bodyPr/>
           <a:p>
-            <a:endParaRPr lang="zh-CN" altLang="en-US"/>
+            <a:r>
+              <a:rPr lang="en-US" altLang="zh-CN"/>
+              <a:t>References</a:t>
+            </a:r>
+            <a:endParaRPr lang="en-US" altLang="zh-CN"/>
+          </a:p>
+          <a:p>
+            <a:pPr lvl="1"/>
+            <a:r>
+              <a:rPr lang="en-US" altLang="zh-CN"/>
+              <a:t>https://code-boxx.com/generate-qr-code-javascript/#:~:text=To%20generate%20QR%20codes%20in%20Javascript%3A%201%20Load,var%20qrc%20%3D%20new%20QRCode%20%28document.getElementById%20%28%22qrcode%22%29%2C%20%22http%3A%2F%2Fsite.com%2F%22%29%3B</a:t>
+            </a:r>
+            <a:endParaRPr lang="en-US" altLang="zh-CN"/>
+          </a:p>
+          <a:p>
+            <a:pPr lvl="0"/>
+            <a:r>
+              <a:rPr lang="en-US" altLang="zh-CN"/>
+              <a:t>qrcodejs</a:t>
+            </a:r>
+            <a:endParaRPr lang="en-US" altLang="zh-CN"/>
+          </a:p>
+          <a:p>
+            <a:pPr lvl="1"/>
+            <a:r>
+              <a:rPr lang="en-US" altLang="zh-CN"/>
+              <a:t>https://cdnjs.com/libraries/qrcodejs</a:t>
+            </a:r>
+            <a:endParaRPr lang="en-US" altLang="zh-CN"/>
+          </a:p>
+          <a:p>
+            <a:pPr lvl="1"/>
+            <a:r>
+              <a:rPr lang="en-US" altLang="zh-CN"/>
+              <a:t>var qrc = new QRCode(document.getElementById("qrcode"), "content");</a:t>
+            </a:r>
+            <a:endParaRPr lang="en-US" altLang="zh-CN"/>
           </a:p>
         </p:txBody>
       </p:sp>
@@ -15746,6 +16139,262 @@
 </file>
 
 <file path=ppt/slides/slide60.xml><?xml version="1.0" encoding="utf-8"?>
+<p:sld xmlns:a="http://schemas.openxmlformats.org/drawingml/2006/main" xmlns:r="http://schemas.openxmlformats.org/officeDocument/2006/relationships" xmlns:p="http://schemas.openxmlformats.org/presentationml/2006/main">
+  <p:cSld>
+    <p:spTree>
+      <p:nvGrpSpPr>
+        <p:cNvPr id="1" name=""/>
+        <p:cNvGrpSpPr/>
+        <p:nvPr/>
+      </p:nvGrpSpPr>
+      <p:grpSpPr/>
+      <p:sp>
+        <p:nvSpPr>
+          <p:cNvPr id="2" name="标题 1"/>
+          <p:cNvSpPr>
+            <a:spLocks noGrp="1"/>
+          </p:cNvSpPr>
+          <p:nvPr>
+            <p:ph type="title"/>
+          </p:nvPr>
+        </p:nvSpPr>
+        <p:spPr/>
+        <p:txBody>
+          <a:bodyPr/>
+          <a:p>
+            <a:r>
+              <a:rPr lang="en-US" altLang="zh-CN"/>
+              <a:t>Input validation</a:t>
+            </a:r>
+            <a:endParaRPr lang="en-US" altLang="zh-CN"/>
+          </a:p>
+        </p:txBody>
+      </p:sp>
+      <p:sp>
+        <p:nvSpPr>
+          <p:cNvPr id="3" name="内容占位符 2"/>
+          <p:cNvSpPr>
+            <a:spLocks noGrp="1"/>
+          </p:cNvSpPr>
+          <p:nvPr>
+            <p:ph idx="1"/>
+          </p:nvPr>
+        </p:nvSpPr>
+        <p:spPr/>
+        <p:txBody>
+          <a:bodyPr/>
+          <a:p>
+            <a:r>
+              <a:rPr lang="en-US" altLang="zh-CN"/>
+              <a:t>Reference</a:t>
+            </a:r>
+            <a:endParaRPr lang="en-US" altLang="zh-CN"/>
+          </a:p>
+          <a:p>
+            <a:pPr lvl="1"/>
+            <a:r>
+              <a:rPr lang="en-US" altLang="zh-CN"/>
+              <a:t>https://developpaper.com/javascript-text-box-verification-code-based-on-regular-expression/</a:t>
+            </a:r>
+            <a:endParaRPr lang="en-US" altLang="zh-CN"/>
+          </a:p>
+        </p:txBody>
+      </p:sp>
+    </p:spTree>
+    <p:custDataLst>
+      <p:tags r:id="rId1"/>
+    </p:custDataLst>
+  </p:cSld>
+  <p:clrMapOvr>
+    <a:masterClrMapping/>
+  </p:clrMapOvr>
+</p:sld>
+</file>
+
+<file path=ppt/slides/slide61.xml><?xml version="1.0" encoding="utf-8"?>
+<p:sld xmlns:a="http://schemas.openxmlformats.org/drawingml/2006/main" xmlns:r="http://schemas.openxmlformats.org/officeDocument/2006/relationships" xmlns:p="http://schemas.openxmlformats.org/presentationml/2006/main">
+  <p:cSld>
+    <p:spTree>
+      <p:nvGrpSpPr>
+        <p:cNvPr id="1" name=""/>
+        <p:cNvGrpSpPr/>
+        <p:nvPr/>
+      </p:nvGrpSpPr>
+      <p:grpSpPr/>
+      <p:sp>
+        <p:nvSpPr>
+          <p:cNvPr id="2" name="标题 1"/>
+          <p:cNvSpPr>
+            <a:spLocks noGrp="1"/>
+          </p:cNvSpPr>
+          <p:nvPr>
+            <p:ph type="title"/>
+          </p:nvPr>
+        </p:nvSpPr>
+        <p:spPr/>
+        <p:txBody>
+          <a:bodyPr/>
+          <a:p>
+            <a:r>
+              <a:rPr lang="en-US" altLang="zh-CN"/>
+              <a:t>Face Detection</a:t>
+            </a:r>
+            <a:endParaRPr lang="en-US" altLang="zh-CN"/>
+          </a:p>
+        </p:txBody>
+      </p:sp>
+      <p:sp>
+        <p:nvSpPr>
+          <p:cNvPr id="3" name="内容占位符 2"/>
+          <p:cNvSpPr>
+            <a:spLocks noGrp="1"/>
+          </p:cNvSpPr>
+          <p:nvPr>
+            <p:ph idx="1"/>
+          </p:nvPr>
+        </p:nvSpPr>
+        <p:spPr/>
+        <p:txBody>
+          <a:bodyPr/>
+          <a:p>
+            <a:pPr lvl="0"/>
+            <a:r>
+              <a:rPr lang="en-US" altLang="zh-CN"/>
+              <a:t>face-api.js</a:t>
+            </a:r>
+            <a:endParaRPr lang="en-US" altLang="zh-CN"/>
+          </a:p>
+          <a:p>
+            <a:pPr lvl="1"/>
+            <a:r>
+              <a:rPr lang="en-US" altLang="zh-CN">
+                <a:sym typeface="+mn-ea"/>
+              </a:rPr>
+              <a:t>References</a:t>
+            </a:r>
+            <a:endParaRPr lang="en-US" altLang="zh-CN"/>
+          </a:p>
+          <a:p>
+            <a:pPr lvl="2"/>
+            <a:r>
+              <a:rPr lang="en-US" altLang="zh-CN"/>
+              <a:t>https://github.com/justadudewhohacks/face-api.js</a:t>
+            </a:r>
+            <a:endParaRPr lang="en-US" altLang="zh-CN"/>
+          </a:p>
+          <a:p>
+            <a:pPr lvl="2"/>
+            <a:r>
+              <a:rPr lang="en-US" altLang="zh-CN"/>
+              <a:t>https://segmentfault.com/a/1190000040583469</a:t>
+            </a:r>
+            <a:endParaRPr lang="en-US" altLang="zh-CN"/>
+          </a:p>
+          <a:p>
+            <a:pPr lvl="1"/>
+            <a:r>
+              <a:rPr lang="en-US" altLang="zh-CN"/>
+              <a:t>Intro</a:t>
+            </a:r>
+            <a:endParaRPr lang="en-US" altLang="zh-CN"/>
+          </a:p>
+          <a:p>
+            <a:pPr lvl="2"/>
+            <a:r>
+              <a:rPr lang="zh-CN" altLang="en-US"/>
+              <a:t>基于</a:t>
+            </a:r>
+            <a:r>
+              <a:rPr lang="en-US" altLang="zh-CN"/>
+              <a:t>tensorflow.js</a:t>
+            </a:r>
+            <a:endParaRPr lang="en-US" altLang="zh-CN"/>
+          </a:p>
+          <a:p>
+            <a:pPr lvl="2"/>
+            <a:r>
+              <a:rPr lang="en-US" altLang="zh-CN"/>
+              <a:t>Features: face recognition, facial landmarks detection, facial expression recognition, age estimation, gender recognition, </a:t>
+            </a:r>
+            <a:endParaRPr lang="en-US" altLang="zh-CN"/>
+          </a:p>
+        </p:txBody>
+      </p:sp>
+    </p:spTree>
+    <p:custDataLst>
+      <p:tags r:id="rId1"/>
+    </p:custDataLst>
+  </p:cSld>
+  <p:clrMapOvr>
+    <a:masterClrMapping/>
+  </p:clrMapOvr>
+</p:sld>
+</file>
+
+<file path=ppt/slides/slide62.xml><?xml version="1.0" encoding="utf-8"?>
+<p:sld xmlns:a="http://schemas.openxmlformats.org/drawingml/2006/main" xmlns:r="http://schemas.openxmlformats.org/officeDocument/2006/relationships" xmlns:p="http://schemas.openxmlformats.org/presentationml/2006/main">
+  <p:cSld>
+    <p:spTree>
+      <p:nvGrpSpPr>
+        <p:cNvPr id="1" name=""/>
+        <p:cNvGrpSpPr/>
+        <p:nvPr/>
+      </p:nvGrpSpPr>
+      <p:grpSpPr/>
+      <p:sp>
+        <p:nvSpPr>
+          <p:cNvPr id="4" name="标题 3"/>
+          <p:cNvSpPr>
+            <a:spLocks noGrp="1"/>
+          </p:cNvSpPr>
+          <p:nvPr>
+            <p:ph type="title"/>
+          </p:nvPr>
+        </p:nvSpPr>
+        <p:spPr/>
+        <p:txBody>
+          <a:bodyPr>
+            <a:normAutofit fontScale="90000"/>
+          </a:bodyPr>
+          <a:p>
+            <a:r>
+              <a:rPr lang="en-US" altLang="zh-CN"/>
+              <a:t>Interaction with Other Language</a:t>
+            </a:r>
+            <a:endParaRPr lang="en-US" altLang="zh-CN"/>
+          </a:p>
+        </p:txBody>
+      </p:sp>
+      <p:sp>
+        <p:nvSpPr>
+          <p:cNvPr id="5" name="文本占位符 4"/>
+          <p:cNvSpPr>
+            <a:spLocks noGrp="1"/>
+          </p:cNvSpPr>
+          <p:nvPr>
+            <p:ph type="body" idx="1"/>
+          </p:nvPr>
+        </p:nvSpPr>
+        <p:spPr/>
+        <p:txBody>
+          <a:bodyPr/>
+          <a:p>
+            <a:endParaRPr lang="zh-CN" altLang="en-US"/>
+          </a:p>
+        </p:txBody>
+      </p:sp>
+    </p:spTree>
+    <p:custDataLst>
+      <p:tags r:id="rId1"/>
+    </p:custDataLst>
+  </p:cSld>
+  <p:clrMapOvr>
+    <a:masterClrMapping/>
+  </p:clrMapOvr>
+</p:sld>
+</file>
+
+<file path=ppt/slides/slide63.xml><?xml version="1.0" encoding="utf-8"?>
 <p:sld xmlns:a="http://schemas.openxmlformats.org/drawingml/2006/main" xmlns:r="http://schemas.openxmlformats.org/officeDocument/2006/relationships" xmlns:p="http://schemas.openxmlformats.org/presentationml/2006/main">
   <p:cSld>
     <p:spTree>
@@ -16884,22 +17533,22 @@
 
 <file path=ppt/tags/tag16.xml><?xml version="1.0" encoding="utf-8"?>
 <p:tagLst xmlns:p="http://schemas.openxmlformats.org/presentationml/2006/main">
+  <p:tag name="KSO_WM_BEAUTIFY_FLAG" val="#wm#"/>
+  <p:tag name="KSO_WM_TEMPLATE_CATEGORY" val="custom"/>
+  <p:tag name="KSO_WM_TEMPLATE_INDEX" val="160402"/>
+</p:tagLst>
+</file>
+
+<file path=ppt/tags/tag17.xml><?xml version="1.0" encoding="utf-8"?>
+<p:tagLst xmlns:p="http://schemas.openxmlformats.org/presentationml/2006/main">
   <p:tag name="REFSHAPE" val="954434956"/>
   <p:tag name="KSO_WM_UNIT_PLACING_PICTURE_USER_VIEWPORT" val="{&quot;height&quot;:7860,&quot;width&quot;:10380}"/>
 </p:tagLst>
 </file>
 
-<file path=ppt/tags/tag17.xml><?xml version="1.0" encoding="utf-8"?>
+<file path=ppt/tags/tag18.xml><?xml version="1.0" encoding="utf-8"?>
 <p:tagLst xmlns:p="http://schemas.openxmlformats.org/presentationml/2006/main">
   <p:tag name="KSO_WM_UNIT_TABLE_BEAUTIFY" val="smartTable{0bafd17d-c47b-41ce-adf8-7fe5cd76de8a}"/>
-</p:tagLst>
-</file>
-
-<file path=ppt/tags/tag18.xml><?xml version="1.0" encoding="utf-8"?>
-<p:tagLst xmlns:p="http://schemas.openxmlformats.org/presentationml/2006/main">
-  <p:tag name="KSO_WM_BEAUTIFY_FLAG" val="#wm#"/>
-  <p:tag name="KSO_WM_TEMPLATE_CATEGORY" val="custom"/>
-  <p:tag name="KSO_WM_TEMPLATE_INDEX" val="160402"/>
 </p:tagLst>
 </file>
 
@@ -16993,8 +17642,9 @@
 
 <file path=ppt/tags/tag29.xml><?xml version="1.0" encoding="utf-8"?>
 <p:tagLst xmlns:p="http://schemas.openxmlformats.org/presentationml/2006/main">
-  <p:tag name="REFSHAPE" val="817661980"/>
-  <p:tag name="KSO_WM_UNIT_PLACING_PICTURE_USER_VIEWPORT" val="{&quot;height&quot;:4695,&quot;width&quot;:5835}"/>
+  <p:tag name="KSO_WM_BEAUTIFY_FLAG" val="#wm#"/>
+  <p:tag name="KSO_WM_TEMPLATE_CATEGORY" val="custom"/>
+  <p:tag name="KSO_WM_TEMPLATE_INDEX" val="160402"/>
 </p:tagLst>
 </file>
 
@@ -17010,23 +17660,22 @@
 
 <file path=ppt/tags/tag30.xml><?xml version="1.0" encoding="utf-8"?>
 <p:tagLst xmlns:p="http://schemas.openxmlformats.org/presentationml/2006/main">
+  <p:tag name="REFSHAPE" val="817661980"/>
+  <p:tag name="KSO_WM_UNIT_PLACING_PICTURE_USER_VIEWPORT" val="{&quot;height&quot;:4695,&quot;width&quot;:5835}"/>
+</p:tagLst>
+</file>
+
+<file path=ppt/tags/tag31.xml><?xml version="1.0" encoding="utf-8"?>
+<p:tagLst xmlns:p="http://schemas.openxmlformats.org/presentationml/2006/main">
   <p:tag name="KSO_WM_BEAUTIFY_FLAG" val="#wm#"/>
   <p:tag name="KSO_WM_TEMPLATE_CATEGORY" val="custom"/>
   <p:tag name="KSO_WM_TEMPLATE_INDEX" val="160402"/>
 </p:tagLst>
 </file>
 
-<file path=ppt/tags/tag31.xml><?xml version="1.0" encoding="utf-8"?>
+<file path=ppt/tags/tag32.xml><?xml version="1.0" encoding="utf-8"?>
 <p:tagLst xmlns:p="http://schemas.openxmlformats.org/presentationml/2006/main">
   <p:tag name="KSO_WM_UNIT_PLACING_PICTURE_USER_VIEWPORT" val="{&quot;height&quot;:11880,&quot;width&quot;:15540}"/>
-</p:tagLst>
-</file>
-
-<file path=ppt/tags/tag32.xml><?xml version="1.0" encoding="utf-8"?>
-<p:tagLst xmlns:p="http://schemas.openxmlformats.org/presentationml/2006/main">
-  <p:tag name="KSO_WM_BEAUTIFY_FLAG" val="#wm#"/>
-  <p:tag name="KSO_WM_TEMPLATE_CATEGORY" val="custom"/>
-  <p:tag name="KSO_WM_TEMPLATE_INDEX" val="160402"/>
 </p:tagLst>
 </file>
 
@@ -17116,8 +17765,9 @@
 
 <file path=ppt/tags/tag41.xml><?xml version="1.0" encoding="utf-8"?>
 <p:tagLst xmlns:p="http://schemas.openxmlformats.org/presentationml/2006/main">
-  <p:tag name="REFSHAPE" val="1066456668"/>
-  <p:tag name="KSO_WM_UNIT_PLACING_PICTURE_USER_VIEWPORT" val="{&quot;height&quot;:15840,&quot;width&quot;:11264}"/>
+  <p:tag name="KSO_WM_BEAUTIFY_FLAG" val="#wm#"/>
+  <p:tag name="KSO_WM_TEMPLATE_CATEGORY" val="custom"/>
+  <p:tag name="KSO_WM_TEMPLATE_INDEX" val="160402"/>
 </p:tagLst>
 </file>
 
@@ -17131,9 +17781,8 @@
 
 <file path=ppt/tags/tag43.xml><?xml version="1.0" encoding="utf-8"?>
 <p:tagLst xmlns:p="http://schemas.openxmlformats.org/presentationml/2006/main">
-  <p:tag name="KSO_WM_BEAUTIFY_FLAG" val="#wm#"/>
-  <p:tag name="KSO_WM_TEMPLATE_CATEGORY" val="custom"/>
-  <p:tag name="KSO_WM_TEMPLATE_INDEX" val="160402"/>
+  <p:tag name="REFSHAPE" val="1066456668"/>
+  <p:tag name="KSO_WM_UNIT_PLACING_PICTURE_USER_VIEWPORT" val="{&quot;height&quot;:15840,&quot;width&quot;:11264}"/>
 </p:tagLst>
 </file>
 
@@ -17378,9 +18027,9 @@
 
 <file path=ppt/tags/tag69.xml><?xml version="1.0" encoding="utf-8"?>
 <p:tagLst xmlns:p="http://schemas.openxmlformats.org/presentationml/2006/main">
-  <p:tag name="COMMONDATA" val="eyJoZGlkIjoiYjRhZjQ5NWVmZmQxNmM3NmNkNDYxNWRmNzNmMjA1ZDAifQ=="/>
-  <p:tag name="KSO_WPP_MARK_KEY" val="a35375c5-519a-4add-9bbc-1782d173b1f9"/>
-  <p:tag name="commondata" val="eyJoZGlkIjoiYjk5ODM0YmMxOWJiYWQyNDU4MGIzYWRmYTA0ZmI5NDcifQ=="/>
+  <p:tag name="KSO_WM_BEAUTIFY_FLAG" val="#wm#"/>
+  <p:tag name="KSO_WM_TEMPLATE_CATEGORY" val="custom"/>
+  <p:tag name="KSO_WM_TEMPLATE_INDEX" val="160402"/>
 </p:tagLst>
 </file>
 
@@ -17389,6 +18038,30 @@
   <p:tag name="KSO_WM_BEAUTIFY_FLAG" val="#wm#"/>
   <p:tag name="KSO_WM_TEMPLATE_CATEGORY" val="custom"/>
   <p:tag name="KSO_WM_TEMPLATE_INDEX" val="160402"/>
+</p:tagLst>
+</file>
+
+<file path=ppt/tags/tag70.xml><?xml version="1.0" encoding="utf-8"?>
+<p:tagLst xmlns:p="http://schemas.openxmlformats.org/presentationml/2006/main">
+  <p:tag name="KSO_WM_BEAUTIFY_FLAG" val="#wm#"/>
+  <p:tag name="KSO_WM_TEMPLATE_CATEGORY" val="custom"/>
+  <p:tag name="KSO_WM_TEMPLATE_INDEX" val="160402"/>
+</p:tagLst>
+</file>
+
+<file path=ppt/tags/tag71.xml><?xml version="1.0" encoding="utf-8"?>
+<p:tagLst xmlns:p="http://schemas.openxmlformats.org/presentationml/2006/main">
+  <p:tag name="KSO_WM_BEAUTIFY_FLAG" val="#wm#"/>
+  <p:tag name="KSO_WM_TEMPLATE_CATEGORY" val="custom"/>
+  <p:tag name="KSO_WM_TEMPLATE_INDEX" val="160402"/>
+</p:tagLst>
+</file>
+
+<file path=ppt/tags/tag72.xml><?xml version="1.0" encoding="utf-8"?>
+<p:tagLst xmlns:p="http://schemas.openxmlformats.org/presentationml/2006/main">
+  <p:tag name="COMMONDATA" val="eyJoZGlkIjoiYjRhZjQ5NWVmZmQxNmM3NmNkNDYxNWRmNzNmMjA1ZDAifQ=="/>
+  <p:tag name="KSO_WPP_MARK_KEY" val="a35375c5-519a-4add-9bbc-1782d173b1f9"/>
+  <p:tag name="commondata" val="eyJoZGlkIjoiYjk5ODM0YmMxOWJiYWQyNDU4MGIzYWRmYTA0ZmI5NDcifQ=="/>
 </p:tagLst>
 </file>
 
